--- a/modulos/02-modelagem-dados/sessao-ao-vivo-modelagem-dados.pptx
+++ b/modulos/02-modelagem-dados/sessao-ao-vivo-modelagem-dados.pptx
@@ -2,28 +2,28 @@
 <file path=ppt/presentation.xml><?xml version="1.0" encoding="utf-8"?>
 <p:presentation xmlns:p="http://schemas.openxmlformats.org/presentationml/2006/main">
   <p:sldMasterIdLst>
-    <p:sldMasterId xmlns:r="http://schemas.openxmlformats.org/officeDocument/2006/relationships" id="2147483648" r:id="R6f87e7d5f663446c"/>
+    <p:sldMasterId xmlns:r="http://schemas.openxmlformats.org/officeDocument/2006/relationships" id="2147483648" r:id="R0a475ac891d44944"/>
   </p:sldMasterIdLst>
   <p:notesMasterIdLst>
-    <p:notesMasterId xmlns:r="http://schemas.openxmlformats.org/officeDocument/2006/relationships" r:id="R3d1febb4500a481a"/>
+    <p:notesMasterId xmlns:r="http://schemas.openxmlformats.org/officeDocument/2006/relationships" r:id="R11f1f83b5bf64ce9"/>
   </p:notesMasterIdLst>
   <p:sldIdLst>
-    <p:sldId xmlns:r="http://schemas.openxmlformats.org/officeDocument/2006/relationships" id="256" r:id="Rd56d76106b1f43c9"/>
-    <p:sldId xmlns:r="http://schemas.openxmlformats.org/officeDocument/2006/relationships" id="257" r:id="R9c7dbda123934a52"/>
-    <p:sldId xmlns:r="http://schemas.openxmlformats.org/officeDocument/2006/relationships" id="258" r:id="Rf3a92cc4df8f45e2"/>
-    <p:sldId xmlns:r="http://schemas.openxmlformats.org/officeDocument/2006/relationships" id="259" r:id="R333f2f0a6e1e4c2c"/>
-    <p:sldId xmlns:r="http://schemas.openxmlformats.org/officeDocument/2006/relationships" id="260" r:id="R24e46262184b4dd2"/>
-    <p:sldId xmlns:r="http://schemas.openxmlformats.org/officeDocument/2006/relationships" id="261" r:id="R6f9dbbd2a27e4da9"/>
-    <p:sldId xmlns:r="http://schemas.openxmlformats.org/officeDocument/2006/relationships" id="262" r:id="Rb3aa49b382664934"/>
-    <p:sldId xmlns:r="http://schemas.openxmlformats.org/officeDocument/2006/relationships" id="263" r:id="Rbcf9b0a503e24f61"/>
-    <p:sldId xmlns:r="http://schemas.openxmlformats.org/officeDocument/2006/relationships" id="264" r:id="Rebd30a0a85d54708"/>
-    <p:sldId xmlns:r="http://schemas.openxmlformats.org/officeDocument/2006/relationships" id="265" r:id="R3a91a5e6d1c14970"/>
-    <p:sldId xmlns:r="http://schemas.openxmlformats.org/officeDocument/2006/relationships" id="266" r:id="R8ca8efbf97894906"/>
-    <p:sldId xmlns:r="http://schemas.openxmlformats.org/officeDocument/2006/relationships" id="267" r:id="R7ee1e11445eb4808"/>
-    <p:sldId xmlns:r="http://schemas.openxmlformats.org/officeDocument/2006/relationships" id="268" r:id="R9aa7a0824c6f45fa"/>
-    <p:sldId xmlns:r="http://schemas.openxmlformats.org/officeDocument/2006/relationships" id="269" r:id="Rb3033dda05e94dde"/>
-    <p:sldId xmlns:r="http://schemas.openxmlformats.org/officeDocument/2006/relationships" id="270" r:id="R00f0039fb3e0496b"/>
-    <p:sldId xmlns:r="http://schemas.openxmlformats.org/officeDocument/2006/relationships" id="271" r:id="R9e14b52c33b347ca"/>
+    <p:sldId xmlns:r="http://schemas.openxmlformats.org/officeDocument/2006/relationships" id="256" r:id="R2f8e644591754cee"/>
+    <p:sldId xmlns:r="http://schemas.openxmlformats.org/officeDocument/2006/relationships" id="257" r:id="R8bb79368136943e0"/>
+    <p:sldId xmlns:r="http://schemas.openxmlformats.org/officeDocument/2006/relationships" id="258" r:id="R45d49c17d90b4340"/>
+    <p:sldId xmlns:r="http://schemas.openxmlformats.org/officeDocument/2006/relationships" id="259" r:id="R698c7ce20a184ea7"/>
+    <p:sldId xmlns:r="http://schemas.openxmlformats.org/officeDocument/2006/relationships" id="260" r:id="R736d4f2a7e264751"/>
+    <p:sldId xmlns:r="http://schemas.openxmlformats.org/officeDocument/2006/relationships" id="261" r:id="R05aa2cff85b4434e"/>
+    <p:sldId xmlns:r="http://schemas.openxmlformats.org/officeDocument/2006/relationships" id="262" r:id="R3275f1831d134479"/>
+    <p:sldId xmlns:r="http://schemas.openxmlformats.org/officeDocument/2006/relationships" id="263" r:id="R7dc45e30e33a418c"/>
+    <p:sldId xmlns:r="http://schemas.openxmlformats.org/officeDocument/2006/relationships" id="264" r:id="R71ae0ef716fe4184"/>
+    <p:sldId xmlns:r="http://schemas.openxmlformats.org/officeDocument/2006/relationships" id="265" r:id="Rc727f9a843f64fa1"/>
+    <p:sldId xmlns:r="http://schemas.openxmlformats.org/officeDocument/2006/relationships" id="266" r:id="Re2175e8185ef466c"/>
+    <p:sldId xmlns:r="http://schemas.openxmlformats.org/officeDocument/2006/relationships" id="267" r:id="Rf0403fcc8a554366"/>
+    <p:sldId xmlns:r="http://schemas.openxmlformats.org/officeDocument/2006/relationships" id="268" r:id="R97540c415c934058"/>
+    <p:sldId xmlns:r="http://schemas.openxmlformats.org/officeDocument/2006/relationships" id="269" r:id="Rf644a6a02cb54dba"/>
+    <p:sldId xmlns:r="http://schemas.openxmlformats.org/officeDocument/2006/relationships" id="270" r:id="R55ba7b753ba74256"/>
+    <p:sldId xmlns:r="http://schemas.openxmlformats.org/officeDocument/2006/relationships" id="271" r:id="R5026494753834374"/>
   </p:sldIdLst>
   <p:sldSz cx="12192000" cy="6858000"/>
   <p:notesSz cx="6858000" cy="9144000"/>
@@ -1560,7 +1560,7 @@
   </p:cSld>
   <p:clrMap bg1="lt1" tx1="dk1" bg2="lt2" tx2="dk2" accent1="accent1" accent2="accent2" accent3="accent3" accent4="accent4" accent5="accent5" accent6="accent6" hlink="hlink" folHlink="folHlink"/>
   <p:sldLayoutIdLst>
-    <p:sldLayoutId xmlns:r="http://schemas.openxmlformats.org/officeDocument/2006/relationships" id="2147483649" r:id="Ref7b7f618aed4b3b"/>
+    <p:sldLayoutId xmlns:r="http://schemas.openxmlformats.org/officeDocument/2006/relationships" id="2147483649" r:id="R516597dce58041be"/>
   </p:sldLayoutIdLst>
   <p:txStyles>
     <p:titleStyle>
@@ -1848,7 +1848,7 @@
     <p:bg>
       <p:bgPr>
         <a:solidFill xmlns:a="http://schemas.openxmlformats.org/drawingml/2006/main">
-          <a:srgbClr val="0E1B3E"/>
+          <a:srgbClr val="070F26"/>
         </a:solidFill>
       </p:bgPr>
     </p:bg>
@@ -1866,7 +1866,7 @@
           <p:cNvPr id="1" name="">
             <a:extLst xmlns:a="http://schemas.openxmlformats.org/drawingml/2006/main">
               <a:ext uri="{FF2B5EF4-FFF2-40B4-BE49-F238E27FC236}">
-                <a16:creationId xmlns:a16="http://schemas.microsoft.com/office/drawing/2014/main" id="{AEB73955-836B-48C2-83B7-A92B707A01C9}"/>
+                <a16:creationId xmlns:a16="http://schemas.microsoft.com/office/drawing/2014/main" id="{A7AA6A36-8A93-41A3-A0B2-8CCFD113EA37}"/>
               </a:ext>
             </a:extLst>
           </p:cNvPr>
@@ -1884,7 +1884,7 @@
             <a:avLst/>
           </a:prstGeom>
           <a:solidFill xmlns:a="http://schemas.openxmlformats.org/drawingml/2006/main">
-            <a:srgbClr val="0E1B3E"/>
+            <a:srgbClr val="070F26"/>
           </a:solidFill>
           <a:ln xmlns:a="http://schemas.openxmlformats.org/drawingml/2006/main" w="0">
             <a:solidFill>
@@ -1905,7 +1905,7 @@
           <p:nvPr/>
         </p:nvPicPr>
         <p:blipFill>
-          <a:blip xmlns:r="http://schemas.openxmlformats.org/officeDocument/2006/relationships" xmlns:a="http://schemas.openxmlformats.org/drawingml/2006/main" r:embed="R50f9e48681684eec"/>
+          <a:blip xmlns:r="http://schemas.openxmlformats.org/officeDocument/2006/relationships" xmlns:a="http://schemas.openxmlformats.org/drawingml/2006/main" r:embed="R0485f9be467e4051"/>
           <a:stretch xmlns:a="http://schemas.openxmlformats.org/drawingml/2006/main"/>
         </p:blipFill>
         <p:spPr>
@@ -1923,7 +1923,7 @@
           <p:cNvPr id="3" name="">
             <a:extLst xmlns:a="http://schemas.openxmlformats.org/drawingml/2006/main">
               <a:ext uri="{FF2B5EF4-FFF2-40B4-BE49-F238E27FC236}">
-                <a16:creationId xmlns:a16="http://schemas.microsoft.com/office/drawing/2014/main" id="{3FC056CE-3A0A-4EBA-9226-176E32E19567}"/>
+                <a16:creationId xmlns:a16="http://schemas.microsoft.com/office/drawing/2014/main" id="{6FE12E80-04E2-4CC3-B8FB-20D88E6DD49E}"/>
               </a:ext>
             </a:extLst>
           </p:cNvPr>
@@ -1981,7 +1981,7 @@
           <p:cNvPr id="4" name="">
             <a:extLst xmlns:a="http://schemas.openxmlformats.org/drawingml/2006/main">
               <a:ext uri="{FF2B5EF4-FFF2-40B4-BE49-F238E27FC236}">
-                <a16:creationId xmlns:a16="http://schemas.microsoft.com/office/drawing/2014/main" id="{E389C7A3-5DC8-4ECB-8D8C-E8C468601932}"/>
+                <a16:creationId xmlns:a16="http://schemas.microsoft.com/office/drawing/2014/main" id="{AAABA5F1-4E7A-4BC9-94E0-BA0B12C4EA27}"/>
               </a:ext>
             </a:extLst>
           </p:cNvPr>
@@ -2039,7 +2039,7 @@
           <p:cNvPr id="5" name="">
             <a:extLst xmlns:a="http://schemas.openxmlformats.org/drawingml/2006/main">
               <a:ext uri="{FF2B5EF4-FFF2-40B4-BE49-F238E27FC236}">
-                <a16:creationId xmlns:a16="http://schemas.microsoft.com/office/drawing/2014/main" id="{D82C7FDE-FB25-4CF4-BA64-1E54947D3F60}"/>
+                <a16:creationId xmlns:a16="http://schemas.microsoft.com/office/drawing/2014/main" id="{FE0AF9AA-2208-43A1-93D9-684B9261FAD8}"/>
               </a:ext>
             </a:extLst>
           </p:cNvPr>
@@ -2101,7 +2101,7 @@
           <p:nvPr/>
         </p:nvPicPr>
         <p:blipFill>
-          <a:blip xmlns:r="http://schemas.openxmlformats.org/officeDocument/2006/relationships" xmlns:a="http://schemas.openxmlformats.org/drawingml/2006/main" r:embed="R2ce31cd70bf14fae"/>
+          <a:blip xmlns:r="http://schemas.openxmlformats.org/officeDocument/2006/relationships" xmlns:a="http://schemas.openxmlformats.org/drawingml/2006/main" r:embed="Ra87a749db6864ffb"/>
           <a:stretch xmlns:a="http://schemas.openxmlformats.org/drawingml/2006/main"/>
         </p:blipFill>
         <p:spPr>
@@ -2119,7 +2119,7 @@
           <p:cNvPr id="7" name="">
             <a:extLst xmlns:a="http://schemas.openxmlformats.org/drawingml/2006/main">
               <a:ext uri="{FF2B5EF4-FFF2-40B4-BE49-F238E27FC236}">
-                <a16:creationId xmlns:a16="http://schemas.microsoft.com/office/drawing/2014/main" id="{3EFE1213-FE82-4E8A-8803-D8CEBBA5CCF4}"/>
+                <a16:creationId xmlns:a16="http://schemas.microsoft.com/office/drawing/2014/main" id="{2F853963-8E11-4881-8E74-E302ABE96F6F}"/>
               </a:ext>
             </a:extLst>
           </p:cNvPr>
@@ -2177,7 +2177,7 @@
           <p:cNvPr id="8" name="">
             <a:extLst xmlns:a="http://schemas.openxmlformats.org/drawingml/2006/main">
               <a:ext uri="{FF2B5EF4-FFF2-40B4-BE49-F238E27FC236}">
-                <a16:creationId xmlns:a16="http://schemas.microsoft.com/office/drawing/2014/main" id="{09D6813A-BD3D-4034-8822-FD63EE6D4AE3}"/>
+                <a16:creationId xmlns:a16="http://schemas.microsoft.com/office/drawing/2014/main" id="{01D3127A-9C8E-4B49-8CC9-C8714E03A500}"/>
               </a:ext>
             </a:extLst>
           </p:cNvPr>
@@ -2235,7 +2235,7 @@
           <p:cNvPr id="9" name="">
             <a:extLst xmlns:a="http://schemas.openxmlformats.org/drawingml/2006/main">
               <a:ext uri="{FF2B5EF4-FFF2-40B4-BE49-F238E27FC236}">
-                <a16:creationId xmlns:a16="http://schemas.microsoft.com/office/drawing/2014/main" id="{BE0D22F1-7788-4358-933C-68757C3355F7}"/>
+                <a16:creationId xmlns:a16="http://schemas.microsoft.com/office/drawing/2014/main" id="{CABD567E-8074-49AE-8363-E0B6DE497C95}"/>
               </a:ext>
             </a:extLst>
           </p:cNvPr>
@@ -2293,7 +2293,7 @@
           <p:cNvPr id="10" name="">
             <a:extLst xmlns:a="http://schemas.openxmlformats.org/drawingml/2006/main">
               <a:ext uri="{FF2B5EF4-FFF2-40B4-BE49-F238E27FC236}">
-                <a16:creationId xmlns:a16="http://schemas.microsoft.com/office/drawing/2014/main" id="{7CB927F9-98D8-4A66-845C-2951F34FE544}"/>
+                <a16:creationId xmlns:a16="http://schemas.microsoft.com/office/drawing/2014/main" id="{0D8FCF30-0DA4-4485-BF1A-2AD970BFBDB5}"/>
               </a:ext>
             </a:extLst>
           </p:cNvPr>
@@ -2328,7 +2328,7 @@
           <p:cNvPr id="11" name="">
             <a:extLst xmlns:a="http://schemas.openxmlformats.org/drawingml/2006/main">
               <a:ext uri="{FF2B5EF4-FFF2-40B4-BE49-F238E27FC236}">
-                <a16:creationId xmlns:a16="http://schemas.microsoft.com/office/drawing/2014/main" id="{843712A1-E2B0-4E65-8F63-9BB7F3025CC1}"/>
+                <a16:creationId xmlns:a16="http://schemas.microsoft.com/office/drawing/2014/main" id="{F14A5685-9C14-42D5-A1E4-6D1FC99C82CA}"/>
               </a:ext>
             </a:extLst>
           </p:cNvPr>
@@ -2384,7 +2384,7 @@
     </p:spTree>
     <p:extLst>
       <p:ext uri="{BB962C8B-B14F-4D97-AF65-F5344CB8AC3E}">
-        <p14:creationId xmlns:p14="http://schemas.microsoft.com/office/powerpoint/2010/main" val="1352476934"/>
+        <p14:creationId xmlns:p14="http://schemas.microsoft.com/office/powerpoint/2010/main" val="1066325987"/>
       </p:ext>
     </p:extLst>
   </p:cSld>
@@ -2415,7 +2415,7 @@
           <p:cNvPr id="1" name="">
             <a:extLst xmlns:a="http://schemas.openxmlformats.org/drawingml/2006/main">
               <a:ext uri="{FF2B5EF4-FFF2-40B4-BE49-F238E27FC236}">
-                <a16:creationId xmlns:a16="http://schemas.microsoft.com/office/drawing/2014/main" id="{2A8D66B5-C2CA-45C2-B0C4-01A46E9B6AD6}"/>
+                <a16:creationId xmlns:a16="http://schemas.microsoft.com/office/drawing/2014/main" id="{6C62072E-1CE6-4948-A166-494FC975AEDB}"/>
               </a:ext>
             </a:extLst>
           </p:cNvPr>
@@ -2454,7 +2454,7 @@
           <p:nvPr/>
         </p:nvPicPr>
         <p:blipFill>
-          <a:blip xmlns:r="http://schemas.openxmlformats.org/officeDocument/2006/relationships" xmlns:a="http://schemas.openxmlformats.org/drawingml/2006/main" r:embed="Recaa822c92584324"/>
+          <a:blip xmlns:r="http://schemas.openxmlformats.org/officeDocument/2006/relationships" xmlns:a="http://schemas.openxmlformats.org/drawingml/2006/main" r:embed="Raddf9302fbb64ed3"/>
           <a:stretch xmlns:a="http://schemas.openxmlformats.org/drawingml/2006/main"/>
         </p:blipFill>
         <p:spPr>
@@ -2472,7 +2472,7 @@
           <p:cNvPr id="3" name="">
             <a:extLst xmlns:a="http://schemas.openxmlformats.org/drawingml/2006/main">
               <a:ext uri="{FF2B5EF4-FFF2-40B4-BE49-F238E27FC236}">
-                <a16:creationId xmlns:a16="http://schemas.microsoft.com/office/drawing/2014/main" id="{1B46201B-3214-4414-ADA5-B78B2C1BE712}"/>
+                <a16:creationId xmlns:a16="http://schemas.microsoft.com/office/drawing/2014/main" id="{0801CEE1-387D-4DAE-B5EB-3CEE971B2B8E}"/>
               </a:ext>
             </a:extLst>
           </p:cNvPr>
@@ -2510,14 +2510,14 @@
             <a:pPr algn="r">
               <a:defRPr sz="825" b="1">
                 <a:solidFill>
-                  <a:srgbClr val="0E1B3E"/>
+                  <a:srgbClr val="070F26"/>
                 </a:solidFill>
               </a:defRPr>
             </a:pPr>
             <a:r>
               <a:rPr sz="825" b="1">
                 <a:solidFill>
-                  <a:srgbClr val="0E1B3E"/>
+                  <a:srgbClr val="070F26"/>
                 </a:solidFill>
               </a:rPr>
               <a:t>NTT DATA UNIVERSITY</a:t>
@@ -2530,7 +2530,7 @@
           <p:cNvPr id="4" name="">
             <a:extLst xmlns:a="http://schemas.openxmlformats.org/drawingml/2006/main">
               <a:ext uri="{FF2B5EF4-FFF2-40B4-BE49-F238E27FC236}">
-                <a16:creationId xmlns:a16="http://schemas.microsoft.com/office/drawing/2014/main" id="{069357F4-F731-40B6-AA4E-FBC158764300}"/>
+                <a16:creationId xmlns:a16="http://schemas.microsoft.com/office/drawing/2014/main" id="{1CE8A4C8-DA1D-46B8-82DD-FDA0115A91E3}"/>
               </a:ext>
             </a:extLst>
           </p:cNvPr>
@@ -2588,7 +2588,7 @@
           <p:cNvPr id="5" name="">
             <a:extLst xmlns:a="http://schemas.openxmlformats.org/drawingml/2006/main">
               <a:ext uri="{FF2B5EF4-FFF2-40B4-BE49-F238E27FC236}">
-                <a16:creationId xmlns:a16="http://schemas.microsoft.com/office/drawing/2014/main" id="{B78A5D98-AD1C-4B73-877A-5B3158DDBDBA}"/>
+                <a16:creationId xmlns:a16="http://schemas.microsoft.com/office/drawing/2014/main" id="{AD92F120-598B-4821-ADC7-CEAEB21AEF86}"/>
               </a:ext>
             </a:extLst>
           </p:cNvPr>
@@ -2646,7 +2646,7 @@
           <p:cNvPr id="6" name="">
             <a:extLst xmlns:a="http://schemas.openxmlformats.org/drawingml/2006/main">
               <a:ext uri="{FF2B5EF4-FFF2-40B4-BE49-F238E27FC236}">
-                <a16:creationId xmlns:a16="http://schemas.microsoft.com/office/drawing/2014/main" id="{BBC9F1C3-78AE-4123-91A6-1760126B3841}"/>
+                <a16:creationId xmlns:a16="http://schemas.microsoft.com/office/drawing/2014/main" id="{27B55AC6-DCDE-4B1D-8EA0-C31A3B1DBF3F}"/>
               </a:ext>
             </a:extLst>
           </p:cNvPr>
@@ -2684,14 +2684,14 @@
             <a:pPr algn="r">
               <a:defRPr sz="675" b="1">
                 <a:solidFill>
-                  <a:srgbClr val="0E1B3E"/>
+                  <a:srgbClr val="070F26"/>
                 </a:solidFill>
               </a:defRPr>
             </a:pPr>
             <a:r>
               <a:rPr sz="675" b="1">
                 <a:solidFill>
-                  <a:srgbClr val="0E1B3E"/>
+                  <a:srgbClr val="070F26"/>
                 </a:solidFill>
               </a:rPr>
               <a:t>NTT DATA UNIVERSITY</a:t>
@@ -2704,7 +2704,7 @@
           <p:cNvPr id="7" name="">
             <a:extLst xmlns:a="http://schemas.openxmlformats.org/drawingml/2006/main">
               <a:ext uri="{FF2B5EF4-FFF2-40B4-BE49-F238E27FC236}">
-                <a16:creationId xmlns:a16="http://schemas.microsoft.com/office/drawing/2014/main" id="{F02E15C0-4842-47B4-9DCF-85F8E2F38DFF}"/>
+                <a16:creationId xmlns:a16="http://schemas.microsoft.com/office/drawing/2014/main" id="{8583A6F0-46FB-4891-8145-42EF753F00BA}"/>
               </a:ext>
             </a:extLst>
           </p:cNvPr>
@@ -2762,7 +2762,7 @@
           <p:cNvPr id="8" name="">
             <a:extLst xmlns:a="http://schemas.openxmlformats.org/drawingml/2006/main">
               <a:ext uri="{FF2B5EF4-FFF2-40B4-BE49-F238E27FC236}">
-                <a16:creationId xmlns:a16="http://schemas.microsoft.com/office/drawing/2014/main" id="{6B1F8635-B417-4040-824B-E15E2B929A43}"/>
+                <a16:creationId xmlns:a16="http://schemas.microsoft.com/office/drawing/2014/main" id="{26163E76-6B9B-431E-9BC7-B95BD71879A5}"/>
               </a:ext>
             </a:extLst>
           </p:cNvPr>
@@ -2800,14 +2800,14 @@
             <a:pPr algn="l">
               <a:defRPr sz="2400" b="0">
                 <a:solidFill>
-                  <a:srgbClr val="0E1B3E"/>
+                  <a:srgbClr val="070F26"/>
                 </a:solidFill>
               </a:defRPr>
             </a:pPr>
             <a:r>
               <a:rPr sz="2400" b="0">
                 <a:solidFill>
-                  <a:srgbClr val="0E1B3E"/>
+                  <a:srgbClr val="070F26"/>
                 </a:solidFill>
               </a:rPr>
               <a:t>Provocações para guiar a apresentação</a:t>
@@ -2820,7 +2820,7 @@
           <p:cNvPr id="9" name="">
             <a:extLst xmlns:a="http://schemas.openxmlformats.org/drawingml/2006/main">
               <a:ext uri="{FF2B5EF4-FFF2-40B4-BE49-F238E27FC236}">
-                <a16:creationId xmlns:a16="http://schemas.microsoft.com/office/drawing/2014/main" id="{73CC416E-4233-40E6-8B46-D16CDD07E2ED}"/>
+                <a16:creationId xmlns:a16="http://schemas.microsoft.com/office/drawing/2014/main" id="{4463F6AC-EC9E-48DF-80AE-879C207830A9}"/>
               </a:ext>
             </a:extLst>
           </p:cNvPr>
@@ -2878,7 +2878,7 @@
           <p:cNvPr id="10" name="">
             <a:extLst xmlns:a="http://schemas.openxmlformats.org/drawingml/2006/main">
               <a:ext uri="{FF2B5EF4-FFF2-40B4-BE49-F238E27FC236}">
-                <a16:creationId xmlns:a16="http://schemas.microsoft.com/office/drawing/2014/main" id="{30580A26-0D5D-406A-8753-58398A9AE115}"/>
+                <a16:creationId xmlns:a16="http://schemas.microsoft.com/office/drawing/2014/main" id="{0619113F-6FE2-4220-9714-3B565733B271}"/>
               </a:ext>
             </a:extLst>
           </p:cNvPr>
@@ -2911,7 +2911,7 @@
           <p:cNvPr id="11" name="">
             <a:extLst xmlns:a="http://schemas.openxmlformats.org/drawingml/2006/main">
               <a:ext uri="{FF2B5EF4-FFF2-40B4-BE49-F238E27FC236}">
-                <a16:creationId xmlns:a16="http://schemas.microsoft.com/office/drawing/2014/main" id="{92027FDA-5617-404A-86F5-409471CCF152}"/>
+                <a16:creationId xmlns:a16="http://schemas.microsoft.com/office/drawing/2014/main" id="{6FC12CB9-D6F8-4138-A879-D3244A509298}"/>
               </a:ext>
             </a:extLst>
           </p:cNvPr>
@@ -2946,7 +2946,7 @@
           <p:cNvPr id="12" name="">
             <a:extLst xmlns:a="http://schemas.openxmlformats.org/drawingml/2006/main">
               <a:ext uri="{FF2B5EF4-FFF2-40B4-BE49-F238E27FC236}">
-                <a16:creationId xmlns:a16="http://schemas.microsoft.com/office/drawing/2014/main" id="{96C324F0-3E2F-438C-A6D1-F9555AC6960E}"/>
+                <a16:creationId xmlns:a16="http://schemas.microsoft.com/office/drawing/2014/main" id="{9CC8F2AB-915D-4730-BA2B-AC6DB8A24788}"/>
               </a:ext>
             </a:extLst>
           </p:cNvPr>
@@ -3004,7 +3004,7 @@
           <p:cNvPr id="13" name="">
             <a:extLst xmlns:a="http://schemas.openxmlformats.org/drawingml/2006/main">
               <a:ext uri="{FF2B5EF4-FFF2-40B4-BE49-F238E27FC236}">
-                <a16:creationId xmlns:a16="http://schemas.microsoft.com/office/drawing/2014/main" id="{1A2AC9BE-CF22-4B17-B71B-0556C1D51B21}"/>
+                <a16:creationId xmlns:a16="http://schemas.microsoft.com/office/drawing/2014/main" id="{6E5DD4C1-D515-446A-8A12-395C44FC57CF}"/>
               </a:ext>
             </a:extLst>
           </p:cNvPr>
@@ -3079,7 +3079,7 @@
           <p:cNvPr id="14" name="">
             <a:extLst xmlns:a="http://schemas.openxmlformats.org/drawingml/2006/main">
               <a:ext uri="{FF2B5EF4-FFF2-40B4-BE49-F238E27FC236}">
-                <a16:creationId xmlns:a16="http://schemas.microsoft.com/office/drawing/2014/main" id="{232313EB-C257-45DD-9F62-02ACB21C10A0}"/>
+                <a16:creationId xmlns:a16="http://schemas.microsoft.com/office/drawing/2014/main" id="{7FFC04C0-0462-4DD4-A06C-F31C0DE011D1}"/>
               </a:ext>
             </a:extLst>
           </p:cNvPr>
@@ -3112,7 +3112,7 @@
           <p:cNvPr id="15" name="">
             <a:extLst xmlns:a="http://schemas.openxmlformats.org/drawingml/2006/main">
               <a:ext uri="{FF2B5EF4-FFF2-40B4-BE49-F238E27FC236}">
-                <a16:creationId xmlns:a16="http://schemas.microsoft.com/office/drawing/2014/main" id="{1FF4F266-304F-4A7B-90C4-B2FB84787701}"/>
+                <a16:creationId xmlns:a16="http://schemas.microsoft.com/office/drawing/2014/main" id="{B64FE310-B8ED-4E8A-94B6-803331C20958}"/>
               </a:ext>
             </a:extLst>
           </p:cNvPr>
@@ -3147,7 +3147,7 @@
           <p:cNvPr id="16" name="">
             <a:extLst xmlns:a="http://schemas.openxmlformats.org/drawingml/2006/main">
               <a:ext uri="{FF2B5EF4-FFF2-40B4-BE49-F238E27FC236}">
-                <a16:creationId xmlns:a16="http://schemas.microsoft.com/office/drawing/2014/main" id="{0E02EBDE-730F-4C08-A755-4A34A719A34A}"/>
+                <a16:creationId xmlns:a16="http://schemas.microsoft.com/office/drawing/2014/main" id="{78248C10-9E75-4EC4-A326-129417B9FAAD}"/>
               </a:ext>
             </a:extLst>
           </p:cNvPr>
@@ -3205,7 +3205,7 @@
           <p:cNvPr id="17" name="">
             <a:extLst xmlns:a="http://schemas.openxmlformats.org/drawingml/2006/main">
               <a:ext uri="{FF2B5EF4-FFF2-40B4-BE49-F238E27FC236}">
-                <a16:creationId xmlns:a16="http://schemas.microsoft.com/office/drawing/2014/main" id="{CFBFB1DA-70FD-4DB2-9564-72E3F8F9EB40}"/>
+                <a16:creationId xmlns:a16="http://schemas.microsoft.com/office/drawing/2014/main" id="{6EBF35B5-162D-41D2-B35D-DEBFEFE884F0}"/>
               </a:ext>
             </a:extLst>
           </p:cNvPr>
@@ -3280,7 +3280,7 @@
           <p:cNvPr id="18" name="">
             <a:extLst xmlns:a="http://schemas.openxmlformats.org/drawingml/2006/main">
               <a:ext uri="{FF2B5EF4-FFF2-40B4-BE49-F238E27FC236}">
-                <a16:creationId xmlns:a16="http://schemas.microsoft.com/office/drawing/2014/main" id="{ED4ABC3B-4615-445E-874F-E481D7F573F0}"/>
+                <a16:creationId xmlns:a16="http://schemas.microsoft.com/office/drawing/2014/main" id="{EC501EBA-9411-451C-8D2C-98DA0D962A2E}"/>
               </a:ext>
             </a:extLst>
           </p:cNvPr>
@@ -3313,7 +3313,7 @@
           <p:cNvPr id="19" name="">
             <a:extLst xmlns:a="http://schemas.openxmlformats.org/drawingml/2006/main">
               <a:ext uri="{FF2B5EF4-FFF2-40B4-BE49-F238E27FC236}">
-                <a16:creationId xmlns:a16="http://schemas.microsoft.com/office/drawing/2014/main" id="{DCE9CA3F-D3C7-4795-843D-02F0DD8D79C9}"/>
+                <a16:creationId xmlns:a16="http://schemas.microsoft.com/office/drawing/2014/main" id="{F1425D98-3DBE-4529-8E22-3D36E33641F1}"/>
               </a:ext>
             </a:extLst>
           </p:cNvPr>
@@ -3348,7 +3348,7 @@
           <p:cNvPr id="20" name="">
             <a:extLst xmlns:a="http://schemas.openxmlformats.org/drawingml/2006/main">
               <a:ext uri="{FF2B5EF4-FFF2-40B4-BE49-F238E27FC236}">
-                <a16:creationId xmlns:a16="http://schemas.microsoft.com/office/drawing/2014/main" id="{7AD17D0F-CE03-4A11-A0A2-73CFFF9D371C}"/>
+                <a16:creationId xmlns:a16="http://schemas.microsoft.com/office/drawing/2014/main" id="{BAD9AF76-6DE1-4A00-ACC6-D1AB6518DFD9}"/>
               </a:ext>
             </a:extLst>
           </p:cNvPr>
@@ -3406,7 +3406,7 @@
           <p:cNvPr id="21" name="">
             <a:extLst xmlns:a="http://schemas.openxmlformats.org/drawingml/2006/main">
               <a:ext uri="{FF2B5EF4-FFF2-40B4-BE49-F238E27FC236}">
-                <a16:creationId xmlns:a16="http://schemas.microsoft.com/office/drawing/2014/main" id="{7EB9B1C8-A260-4ABC-9609-3D54AFAF0794}"/>
+                <a16:creationId xmlns:a16="http://schemas.microsoft.com/office/drawing/2014/main" id="{875CAA57-B70D-49E9-8891-8C51BEF4322A}"/>
               </a:ext>
             </a:extLst>
           </p:cNvPr>
@@ -3481,7 +3481,7 @@
           <p:cNvPr id="22" name="">
             <a:extLst xmlns:a="http://schemas.openxmlformats.org/drawingml/2006/main">
               <a:ext uri="{FF2B5EF4-FFF2-40B4-BE49-F238E27FC236}">
-                <a16:creationId xmlns:a16="http://schemas.microsoft.com/office/drawing/2014/main" id="{8EACB2B6-60C1-4710-B3D6-B1BC3C2618F0}"/>
+                <a16:creationId xmlns:a16="http://schemas.microsoft.com/office/drawing/2014/main" id="{0C0FDEFB-E29C-4761-AD7E-8EF89420ABC6}"/>
               </a:ext>
             </a:extLst>
           </p:cNvPr>
@@ -3514,7 +3514,7 @@
           <p:cNvPr id="23" name="">
             <a:extLst xmlns:a="http://schemas.openxmlformats.org/drawingml/2006/main">
               <a:ext uri="{FF2B5EF4-FFF2-40B4-BE49-F238E27FC236}">
-                <a16:creationId xmlns:a16="http://schemas.microsoft.com/office/drawing/2014/main" id="{62FD1C4C-3A25-4107-8F2E-B4FF7CB0F7A8}"/>
+                <a16:creationId xmlns:a16="http://schemas.microsoft.com/office/drawing/2014/main" id="{D9697945-CF09-4546-8422-65A7CC754868}"/>
               </a:ext>
             </a:extLst>
           </p:cNvPr>
@@ -3549,7 +3549,7 @@
           <p:cNvPr id="24" name="">
             <a:extLst xmlns:a="http://schemas.openxmlformats.org/drawingml/2006/main">
               <a:ext uri="{FF2B5EF4-FFF2-40B4-BE49-F238E27FC236}">
-                <a16:creationId xmlns:a16="http://schemas.microsoft.com/office/drawing/2014/main" id="{463587D7-8916-4D13-A5A4-AEDC0A51D598}"/>
+                <a16:creationId xmlns:a16="http://schemas.microsoft.com/office/drawing/2014/main" id="{205E1D27-A04A-43C1-91AE-6C4FBAC60C29}"/>
               </a:ext>
             </a:extLst>
           </p:cNvPr>
@@ -3607,7 +3607,7 @@
           <p:cNvPr id="25" name="">
             <a:extLst xmlns:a="http://schemas.openxmlformats.org/drawingml/2006/main">
               <a:ext uri="{FF2B5EF4-FFF2-40B4-BE49-F238E27FC236}">
-                <a16:creationId xmlns:a16="http://schemas.microsoft.com/office/drawing/2014/main" id="{BDA9C0FA-2C0D-46DA-A704-74BD686EE84B}"/>
+                <a16:creationId xmlns:a16="http://schemas.microsoft.com/office/drawing/2014/main" id="{448CF118-7401-47EB-AAE6-A2F671F6733A}"/>
               </a:ext>
             </a:extLst>
           </p:cNvPr>
@@ -3680,7 +3680,7 @@
     </p:spTree>
     <p:extLst>
       <p:ext uri="{BB962C8B-B14F-4D97-AF65-F5344CB8AC3E}">
-        <p14:creationId xmlns:p14="http://schemas.microsoft.com/office/powerpoint/2010/main" val="539387369"/>
+        <p14:creationId xmlns:p14="http://schemas.microsoft.com/office/powerpoint/2010/main" val="1315458170"/>
       </p:ext>
     </p:extLst>
   </p:cSld>
@@ -3711,7 +3711,7 @@
           <p:cNvPr id="1" name="">
             <a:extLst xmlns:a="http://schemas.openxmlformats.org/drawingml/2006/main">
               <a:ext uri="{FF2B5EF4-FFF2-40B4-BE49-F238E27FC236}">
-                <a16:creationId xmlns:a16="http://schemas.microsoft.com/office/drawing/2014/main" id="{EBD9D431-4917-450A-BFF5-737EEAE5130D}"/>
+                <a16:creationId xmlns:a16="http://schemas.microsoft.com/office/drawing/2014/main" id="{5D2A5FDF-02CC-4908-BE20-24E7E17D0BB4}"/>
               </a:ext>
             </a:extLst>
           </p:cNvPr>
@@ -3750,7 +3750,7 @@
           <p:nvPr/>
         </p:nvPicPr>
         <p:blipFill>
-          <a:blip xmlns:r="http://schemas.openxmlformats.org/officeDocument/2006/relationships" xmlns:a="http://schemas.openxmlformats.org/drawingml/2006/main" r:embed="R313010145d2f4c0c"/>
+          <a:blip xmlns:r="http://schemas.openxmlformats.org/officeDocument/2006/relationships" xmlns:a="http://schemas.openxmlformats.org/drawingml/2006/main" r:embed="Rf81e4c6b9c6d4746"/>
           <a:stretch xmlns:a="http://schemas.openxmlformats.org/drawingml/2006/main"/>
         </p:blipFill>
         <p:spPr>
@@ -3768,7 +3768,7 @@
           <p:cNvPr id="3" name="">
             <a:extLst xmlns:a="http://schemas.openxmlformats.org/drawingml/2006/main">
               <a:ext uri="{FF2B5EF4-FFF2-40B4-BE49-F238E27FC236}">
-                <a16:creationId xmlns:a16="http://schemas.microsoft.com/office/drawing/2014/main" id="{CA778CF1-6899-4162-8C5F-5125EBDA0BF3}"/>
+                <a16:creationId xmlns:a16="http://schemas.microsoft.com/office/drawing/2014/main" id="{5C1E5FA8-B16F-46C4-98E6-6BE5261A506C}"/>
               </a:ext>
             </a:extLst>
           </p:cNvPr>
@@ -3806,14 +3806,14 @@
             <a:pPr algn="r">
               <a:defRPr sz="825" b="1">
                 <a:solidFill>
-                  <a:srgbClr val="0E1B3E"/>
+                  <a:srgbClr val="070F26"/>
                 </a:solidFill>
               </a:defRPr>
             </a:pPr>
             <a:r>
               <a:rPr sz="825" b="1">
                 <a:solidFill>
-                  <a:srgbClr val="0E1B3E"/>
+                  <a:srgbClr val="070F26"/>
                 </a:solidFill>
               </a:rPr>
               <a:t>NTT DATA UNIVERSITY</a:t>
@@ -3826,7 +3826,7 @@
           <p:cNvPr id="4" name="">
             <a:extLst xmlns:a="http://schemas.openxmlformats.org/drawingml/2006/main">
               <a:ext uri="{FF2B5EF4-FFF2-40B4-BE49-F238E27FC236}">
-                <a16:creationId xmlns:a16="http://schemas.microsoft.com/office/drawing/2014/main" id="{BF391D95-D3C1-44DD-8ECC-ED53DE95308C}"/>
+                <a16:creationId xmlns:a16="http://schemas.microsoft.com/office/drawing/2014/main" id="{EB14CEF8-B2F7-415C-8C50-B0F316B38F23}"/>
               </a:ext>
             </a:extLst>
           </p:cNvPr>
@@ -3884,7 +3884,7 @@
           <p:cNvPr id="5" name="">
             <a:extLst xmlns:a="http://schemas.openxmlformats.org/drawingml/2006/main">
               <a:ext uri="{FF2B5EF4-FFF2-40B4-BE49-F238E27FC236}">
-                <a16:creationId xmlns:a16="http://schemas.microsoft.com/office/drawing/2014/main" id="{CD218C8E-EF6D-4509-A683-8777053A3046}"/>
+                <a16:creationId xmlns:a16="http://schemas.microsoft.com/office/drawing/2014/main" id="{054B37D4-20CF-4164-8682-084E3125A063}"/>
               </a:ext>
             </a:extLst>
           </p:cNvPr>
@@ -3942,7 +3942,7 @@
           <p:cNvPr id="6" name="">
             <a:extLst xmlns:a="http://schemas.openxmlformats.org/drawingml/2006/main">
               <a:ext uri="{FF2B5EF4-FFF2-40B4-BE49-F238E27FC236}">
-                <a16:creationId xmlns:a16="http://schemas.microsoft.com/office/drawing/2014/main" id="{217F8F00-6673-4013-A3F6-D94C27121830}"/>
+                <a16:creationId xmlns:a16="http://schemas.microsoft.com/office/drawing/2014/main" id="{374AFF30-5CD6-4688-9E7A-F4C8E507FFE1}"/>
               </a:ext>
             </a:extLst>
           </p:cNvPr>
@@ -3980,14 +3980,14 @@
             <a:pPr algn="r">
               <a:defRPr sz="675" b="1">
                 <a:solidFill>
-                  <a:srgbClr val="0E1B3E"/>
+                  <a:srgbClr val="070F26"/>
                 </a:solidFill>
               </a:defRPr>
             </a:pPr>
             <a:r>
               <a:rPr sz="675" b="1">
                 <a:solidFill>
-                  <a:srgbClr val="0E1B3E"/>
+                  <a:srgbClr val="070F26"/>
                 </a:solidFill>
               </a:rPr>
               <a:t>NTT DATA UNIVERSITY</a:t>
@@ -4000,7 +4000,7 @@
           <p:cNvPr id="7" name="">
             <a:extLst xmlns:a="http://schemas.openxmlformats.org/drawingml/2006/main">
               <a:ext uri="{FF2B5EF4-FFF2-40B4-BE49-F238E27FC236}">
-                <a16:creationId xmlns:a16="http://schemas.microsoft.com/office/drawing/2014/main" id="{F2C30D5C-F97E-4F6D-8E28-64169D6A07A2}"/>
+                <a16:creationId xmlns:a16="http://schemas.microsoft.com/office/drawing/2014/main" id="{9EEA001B-0C5B-4297-AFE8-AA503FDF98CF}"/>
               </a:ext>
             </a:extLst>
           </p:cNvPr>
@@ -4058,7 +4058,7 @@
           <p:cNvPr id="8" name="">
             <a:extLst xmlns:a="http://schemas.openxmlformats.org/drawingml/2006/main">
               <a:ext uri="{FF2B5EF4-FFF2-40B4-BE49-F238E27FC236}">
-                <a16:creationId xmlns:a16="http://schemas.microsoft.com/office/drawing/2014/main" id="{C6B4BF0C-2318-4A0A-A4A7-353B698AD705}"/>
+                <a16:creationId xmlns:a16="http://schemas.microsoft.com/office/drawing/2014/main" id="{A47A85A0-C140-4182-8D9F-A716D7FE39A3}"/>
               </a:ext>
             </a:extLst>
           </p:cNvPr>
@@ -4096,14 +4096,14 @@
             <a:pPr algn="l">
               <a:defRPr sz="2400" b="0">
                 <a:solidFill>
-                  <a:srgbClr val="0E1B3E"/>
+                  <a:srgbClr val="070F26"/>
                 </a:solidFill>
               </a:defRPr>
             </a:pPr>
             <a:r>
               <a:rPr sz="2400" b="0">
                 <a:solidFill>
-                  <a:srgbClr val="0E1B3E"/>
+                  <a:srgbClr val="070F26"/>
                 </a:solidFill>
               </a:rPr>
               <a:t>Star schema consensuado — adapte conforme a discussão</a:t>
@@ -4116,7 +4116,7 @@
           <p:cNvPr id="9" name="">
             <a:extLst xmlns:a="http://schemas.openxmlformats.org/drawingml/2006/main">
               <a:ext uri="{FF2B5EF4-FFF2-40B4-BE49-F238E27FC236}">
-                <a16:creationId xmlns:a16="http://schemas.microsoft.com/office/drawing/2014/main" id="{6F427179-9D43-43C3-A045-639928DA95F2}"/>
+                <a16:creationId xmlns:a16="http://schemas.microsoft.com/office/drawing/2014/main" id="{D0ED21C9-22F5-4EE9-A478-96FCBB4166A6}"/>
               </a:ext>
             </a:extLst>
           </p:cNvPr>
@@ -4174,7 +4174,7 @@
           <p:cNvPr id="10" name="">
             <a:extLst xmlns:a="http://schemas.openxmlformats.org/drawingml/2006/main">
               <a:ext uri="{FF2B5EF4-FFF2-40B4-BE49-F238E27FC236}">
-                <a16:creationId xmlns:a16="http://schemas.microsoft.com/office/drawing/2014/main" id="{3150B581-711B-4CD1-8F01-5CF06560D34D}"/>
+                <a16:creationId xmlns:a16="http://schemas.microsoft.com/office/drawing/2014/main" id="{FD109A7F-A3F2-4625-B412-14AB20C10EDB}"/>
               </a:ext>
             </a:extLst>
           </p:cNvPr>
@@ -4207,7 +4207,7 @@
           <p:cNvPr id="11" name="">
             <a:extLst xmlns:a="http://schemas.openxmlformats.org/drawingml/2006/main">
               <a:ext uri="{FF2B5EF4-FFF2-40B4-BE49-F238E27FC236}">
-                <a16:creationId xmlns:a16="http://schemas.microsoft.com/office/drawing/2014/main" id="{0AAF5662-2118-4472-8257-79C18033B43E}"/>
+                <a16:creationId xmlns:a16="http://schemas.microsoft.com/office/drawing/2014/main" id="{233DDA79-C367-4324-A1AE-00130BE53F71}"/>
               </a:ext>
             </a:extLst>
           </p:cNvPr>
@@ -4242,7 +4242,7 @@
           <p:cNvPr id="12" name="">
             <a:extLst xmlns:a="http://schemas.openxmlformats.org/drawingml/2006/main">
               <a:ext uri="{FF2B5EF4-FFF2-40B4-BE49-F238E27FC236}">
-                <a16:creationId xmlns:a16="http://schemas.microsoft.com/office/drawing/2014/main" id="{14928115-BAE5-4F4C-AC5A-A7538163B7C6}"/>
+                <a16:creationId xmlns:a16="http://schemas.microsoft.com/office/drawing/2014/main" id="{8638DEC7-8A65-4620-B907-E0DFECE881E9}"/>
               </a:ext>
             </a:extLst>
           </p:cNvPr>
@@ -4300,7 +4300,7 @@
           <p:cNvPr id="13" name="">
             <a:extLst xmlns:a="http://schemas.openxmlformats.org/drawingml/2006/main">
               <a:ext uri="{FF2B5EF4-FFF2-40B4-BE49-F238E27FC236}">
-                <a16:creationId xmlns:a16="http://schemas.microsoft.com/office/drawing/2014/main" id="{51C2D2ED-ABBF-4BC6-8543-391D3BB5087F}"/>
+                <a16:creationId xmlns:a16="http://schemas.microsoft.com/office/drawing/2014/main" id="{8C7B2DA6-DFBA-4B8A-8897-9D2334BDD03E}"/>
               </a:ext>
             </a:extLst>
           </p:cNvPr>
@@ -4533,7 +4533,7 @@
           <p:cNvPr id="14" name="">
             <a:extLst xmlns:a="http://schemas.openxmlformats.org/drawingml/2006/main">
               <a:ext uri="{FF2B5EF4-FFF2-40B4-BE49-F238E27FC236}">
-                <a16:creationId xmlns:a16="http://schemas.microsoft.com/office/drawing/2014/main" id="{F11D1995-860A-4655-8A6A-86E85ECE5259}"/>
+                <a16:creationId xmlns:a16="http://schemas.microsoft.com/office/drawing/2014/main" id="{49E168B5-4BFD-44C7-AC17-0A7D16414641}"/>
               </a:ext>
             </a:extLst>
           </p:cNvPr>
@@ -4566,7 +4566,7 @@
           <p:cNvPr id="15" name="">
             <a:extLst xmlns:a="http://schemas.openxmlformats.org/drawingml/2006/main">
               <a:ext uri="{FF2B5EF4-FFF2-40B4-BE49-F238E27FC236}">
-                <a16:creationId xmlns:a16="http://schemas.microsoft.com/office/drawing/2014/main" id="{785A2594-203F-43F5-A31A-F4D2FA968369}"/>
+                <a16:creationId xmlns:a16="http://schemas.microsoft.com/office/drawing/2014/main" id="{3560C8EF-3FF8-4887-A729-AEAF020C9849}"/>
               </a:ext>
             </a:extLst>
           </p:cNvPr>
@@ -4601,7 +4601,7 @@
           <p:cNvPr id="16" name="">
             <a:extLst xmlns:a="http://schemas.openxmlformats.org/drawingml/2006/main">
               <a:ext uri="{FF2B5EF4-FFF2-40B4-BE49-F238E27FC236}">
-                <a16:creationId xmlns:a16="http://schemas.microsoft.com/office/drawing/2014/main" id="{92C25C87-B595-43BF-9555-2EB258E2649F}"/>
+                <a16:creationId xmlns:a16="http://schemas.microsoft.com/office/drawing/2014/main" id="{4707B5DE-CB59-491D-AA6E-908C89B40140}"/>
               </a:ext>
             </a:extLst>
           </p:cNvPr>
@@ -4659,7 +4659,7 @@
           <p:cNvPr id="17" name="">
             <a:extLst xmlns:a="http://schemas.openxmlformats.org/drawingml/2006/main">
               <a:ext uri="{FF2B5EF4-FFF2-40B4-BE49-F238E27FC236}">
-                <a16:creationId xmlns:a16="http://schemas.microsoft.com/office/drawing/2014/main" id="{4DB93C53-E5D0-4E72-82AA-257440466C65}"/>
+                <a16:creationId xmlns:a16="http://schemas.microsoft.com/office/drawing/2014/main" id="{F644C968-AFBA-4203-B94D-8428CCEA8D33}"/>
               </a:ext>
             </a:extLst>
           </p:cNvPr>
@@ -4890,7 +4890,7 @@
     </p:spTree>
     <p:extLst>
       <p:ext uri="{BB962C8B-B14F-4D97-AF65-F5344CB8AC3E}">
-        <p14:creationId xmlns:p14="http://schemas.microsoft.com/office/powerpoint/2010/main" val="343898322"/>
+        <p14:creationId xmlns:p14="http://schemas.microsoft.com/office/powerpoint/2010/main" val="450128708"/>
       </p:ext>
     </p:extLst>
   </p:cSld>
@@ -4921,7 +4921,7 @@
           <p:cNvPr id="1" name="">
             <a:extLst xmlns:a="http://schemas.openxmlformats.org/drawingml/2006/main">
               <a:ext uri="{FF2B5EF4-FFF2-40B4-BE49-F238E27FC236}">
-                <a16:creationId xmlns:a16="http://schemas.microsoft.com/office/drawing/2014/main" id="{301ACE0B-5523-421C-852D-627B15478359}"/>
+                <a16:creationId xmlns:a16="http://schemas.microsoft.com/office/drawing/2014/main" id="{9E08728A-A010-461B-B280-B6C78D2535BB}"/>
               </a:ext>
             </a:extLst>
           </p:cNvPr>
@@ -4960,7 +4960,7 @@
           <p:nvPr/>
         </p:nvPicPr>
         <p:blipFill>
-          <a:blip xmlns:r="http://schemas.openxmlformats.org/officeDocument/2006/relationships" xmlns:a="http://schemas.openxmlformats.org/drawingml/2006/main" r:embed="R25fecd469bd4415b"/>
+          <a:blip xmlns:r="http://schemas.openxmlformats.org/officeDocument/2006/relationships" xmlns:a="http://schemas.openxmlformats.org/drawingml/2006/main" r:embed="R7449233bdcc849a5"/>
           <a:stretch xmlns:a="http://schemas.openxmlformats.org/drawingml/2006/main"/>
         </p:blipFill>
         <p:spPr>
@@ -4978,7 +4978,7 @@
           <p:cNvPr id="3" name="">
             <a:extLst xmlns:a="http://schemas.openxmlformats.org/drawingml/2006/main">
               <a:ext uri="{FF2B5EF4-FFF2-40B4-BE49-F238E27FC236}">
-                <a16:creationId xmlns:a16="http://schemas.microsoft.com/office/drawing/2014/main" id="{C6FEDCC4-7E01-40A6-AE12-EC65DAFD047D}"/>
+                <a16:creationId xmlns:a16="http://schemas.microsoft.com/office/drawing/2014/main" id="{2C5B09AF-9DB0-43D5-9C4D-725C10FBDA3F}"/>
               </a:ext>
             </a:extLst>
           </p:cNvPr>
@@ -5016,14 +5016,14 @@
             <a:pPr algn="r">
               <a:defRPr sz="825" b="1">
                 <a:solidFill>
-                  <a:srgbClr val="0E1B3E"/>
+                  <a:srgbClr val="070F26"/>
                 </a:solidFill>
               </a:defRPr>
             </a:pPr>
             <a:r>
               <a:rPr sz="825" b="1">
                 <a:solidFill>
-                  <a:srgbClr val="0E1B3E"/>
+                  <a:srgbClr val="070F26"/>
                 </a:solidFill>
               </a:rPr>
               <a:t>NTT DATA UNIVERSITY</a:t>
@@ -5036,7 +5036,7 @@
           <p:cNvPr id="4" name="">
             <a:extLst xmlns:a="http://schemas.openxmlformats.org/drawingml/2006/main">
               <a:ext uri="{FF2B5EF4-FFF2-40B4-BE49-F238E27FC236}">
-                <a16:creationId xmlns:a16="http://schemas.microsoft.com/office/drawing/2014/main" id="{6EFCCC09-60E3-4BF9-9C51-B1664C58DFEF}"/>
+                <a16:creationId xmlns:a16="http://schemas.microsoft.com/office/drawing/2014/main" id="{2F20EE28-8F30-4D80-8B3E-D63ED369AA89}"/>
               </a:ext>
             </a:extLst>
           </p:cNvPr>
@@ -5094,7 +5094,7 @@
           <p:cNvPr id="5" name="">
             <a:extLst xmlns:a="http://schemas.openxmlformats.org/drawingml/2006/main">
               <a:ext uri="{FF2B5EF4-FFF2-40B4-BE49-F238E27FC236}">
-                <a16:creationId xmlns:a16="http://schemas.microsoft.com/office/drawing/2014/main" id="{43502EDD-DF4A-443B-A1A1-5CDF32BF9A04}"/>
+                <a16:creationId xmlns:a16="http://schemas.microsoft.com/office/drawing/2014/main" id="{4A9B84EE-7856-4650-894A-666128E4354C}"/>
               </a:ext>
             </a:extLst>
           </p:cNvPr>
@@ -5152,7 +5152,7 @@
           <p:cNvPr id="6" name="">
             <a:extLst xmlns:a="http://schemas.openxmlformats.org/drawingml/2006/main">
               <a:ext uri="{FF2B5EF4-FFF2-40B4-BE49-F238E27FC236}">
-                <a16:creationId xmlns:a16="http://schemas.microsoft.com/office/drawing/2014/main" id="{BB88923F-E860-4295-BA65-72FC63B64601}"/>
+                <a16:creationId xmlns:a16="http://schemas.microsoft.com/office/drawing/2014/main" id="{7ECBD700-6FE8-48EF-919D-D3534998BD42}"/>
               </a:ext>
             </a:extLst>
           </p:cNvPr>
@@ -5190,14 +5190,14 @@
             <a:pPr algn="r">
               <a:defRPr sz="675" b="1">
                 <a:solidFill>
-                  <a:srgbClr val="0E1B3E"/>
+                  <a:srgbClr val="070F26"/>
                 </a:solidFill>
               </a:defRPr>
             </a:pPr>
             <a:r>
               <a:rPr sz="675" b="1">
                 <a:solidFill>
-                  <a:srgbClr val="0E1B3E"/>
+                  <a:srgbClr val="070F26"/>
                 </a:solidFill>
               </a:rPr>
               <a:t>NTT DATA UNIVERSITY</a:t>
@@ -5210,7 +5210,7 @@
           <p:cNvPr id="7" name="">
             <a:extLst xmlns:a="http://schemas.openxmlformats.org/drawingml/2006/main">
               <a:ext uri="{FF2B5EF4-FFF2-40B4-BE49-F238E27FC236}">
-                <a16:creationId xmlns:a16="http://schemas.microsoft.com/office/drawing/2014/main" id="{F34848B0-CAD2-4099-A01E-0E2EA5289CAB}"/>
+                <a16:creationId xmlns:a16="http://schemas.microsoft.com/office/drawing/2014/main" id="{6D7737F7-BF7B-4C0E-B301-8545005BDD87}"/>
               </a:ext>
             </a:extLst>
           </p:cNvPr>
@@ -5268,7 +5268,7 @@
           <p:cNvPr id="8" name="">
             <a:extLst xmlns:a="http://schemas.openxmlformats.org/drawingml/2006/main">
               <a:ext uri="{FF2B5EF4-FFF2-40B4-BE49-F238E27FC236}">
-                <a16:creationId xmlns:a16="http://schemas.microsoft.com/office/drawing/2014/main" id="{1201F813-C35C-45FE-B179-8C09945A4DAC}"/>
+                <a16:creationId xmlns:a16="http://schemas.microsoft.com/office/drawing/2014/main" id="{0E3A2626-F3E9-4392-87D8-F1DBFE0DCFF3}"/>
               </a:ext>
             </a:extLst>
           </p:cNvPr>
@@ -5306,14 +5306,14 @@
             <a:pPr algn="l">
               <a:defRPr sz="2400" b="0">
                 <a:solidFill>
-                  <a:srgbClr val="0E1B3E"/>
+                  <a:srgbClr val="070F26"/>
                 </a:solidFill>
               </a:defRPr>
             </a:pPr>
             <a:r>
               <a:rPr sz="2400" b="0">
                 <a:solidFill>
-                  <a:srgbClr val="0E1B3E"/>
+                  <a:srgbClr val="070F26"/>
                 </a:solidFill>
               </a:rPr>
               <a:t>E se quiséssemos rastrear preço ao longo do tempo?</a:t>
@@ -5326,7 +5326,7 @@
           <p:cNvPr id="9" name="">
             <a:extLst xmlns:a="http://schemas.openxmlformats.org/drawingml/2006/main">
               <a:ext uri="{FF2B5EF4-FFF2-40B4-BE49-F238E27FC236}">
-                <a16:creationId xmlns:a16="http://schemas.microsoft.com/office/drawing/2014/main" id="{7016E238-9F63-4954-BA09-B3A41F030D87}"/>
+                <a16:creationId xmlns:a16="http://schemas.microsoft.com/office/drawing/2014/main" id="{D4EC3ACF-368C-4850-BADD-511E76452688}"/>
               </a:ext>
             </a:extLst>
           </p:cNvPr>
@@ -5384,7 +5384,7 @@
           <p:cNvPr id="10" name="">
             <a:extLst xmlns:a="http://schemas.openxmlformats.org/drawingml/2006/main">
               <a:ext uri="{FF2B5EF4-FFF2-40B4-BE49-F238E27FC236}">
-                <a16:creationId xmlns:a16="http://schemas.microsoft.com/office/drawing/2014/main" id="{0F9575C9-4BD9-4CAB-B2F2-AF8036AE48CD}"/>
+                <a16:creationId xmlns:a16="http://schemas.microsoft.com/office/drawing/2014/main" id="{B691E79F-81C7-43FB-B2EE-89B6D84FEFE8}"/>
               </a:ext>
             </a:extLst>
           </p:cNvPr>
@@ -5417,7 +5417,7 @@
           <p:cNvPr id="11" name="">
             <a:extLst xmlns:a="http://schemas.openxmlformats.org/drawingml/2006/main">
               <a:ext uri="{FF2B5EF4-FFF2-40B4-BE49-F238E27FC236}">
-                <a16:creationId xmlns:a16="http://schemas.microsoft.com/office/drawing/2014/main" id="{FB0C0093-6B19-4217-865E-455C50FA78BD}"/>
+                <a16:creationId xmlns:a16="http://schemas.microsoft.com/office/drawing/2014/main" id="{B6487646-E2C5-484A-BB23-FB8866FB98E1}"/>
               </a:ext>
             </a:extLst>
           </p:cNvPr>
@@ -5452,7 +5452,7 @@
           <p:cNvPr id="12" name="">
             <a:extLst xmlns:a="http://schemas.openxmlformats.org/drawingml/2006/main">
               <a:ext uri="{FF2B5EF4-FFF2-40B4-BE49-F238E27FC236}">
-                <a16:creationId xmlns:a16="http://schemas.microsoft.com/office/drawing/2014/main" id="{850E7F43-58C6-4D76-82F9-1C7822201CE8}"/>
+                <a16:creationId xmlns:a16="http://schemas.microsoft.com/office/drawing/2014/main" id="{7FAEEFFF-D45C-48D3-960B-13B794287406}"/>
               </a:ext>
             </a:extLst>
           </p:cNvPr>
@@ -5510,7 +5510,7 @@
           <p:cNvPr id="13" name="">
             <a:extLst xmlns:a="http://schemas.openxmlformats.org/drawingml/2006/main">
               <a:ext uri="{FF2B5EF4-FFF2-40B4-BE49-F238E27FC236}">
-                <a16:creationId xmlns:a16="http://schemas.microsoft.com/office/drawing/2014/main" id="{8B2EB89C-37B1-4703-89C3-BA7789C78F36}"/>
+                <a16:creationId xmlns:a16="http://schemas.microsoft.com/office/drawing/2014/main" id="{E5C921A4-6373-4DFC-A8C4-7C392D21DDED}"/>
               </a:ext>
             </a:extLst>
           </p:cNvPr>
@@ -5619,7 +5619,7 @@
           <p:cNvPr id="14" name="">
             <a:extLst xmlns:a="http://schemas.openxmlformats.org/drawingml/2006/main">
               <a:ext uri="{FF2B5EF4-FFF2-40B4-BE49-F238E27FC236}">
-                <a16:creationId xmlns:a16="http://schemas.microsoft.com/office/drawing/2014/main" id="{F8AB861D-FE03-412A-8750-B4B6ABAFBE85}"/>
+                <a16:creationId xmlns:a16="http://schemas.microsoft.com/office/drawing/2014/main" id="{EE4F6E92-C1F7-4018-81B2-BBDB58B5066D}"/>
               </a:ext>
             </a:extLst>
           </p:cNvPr>
@@ -5652,7 +5652,7 @@
           <p:cNvPr id="15" name="">
             <a:extLst xmlns:a="http://schemas.openxmlformats.org/drawingml/2006/main">
               <a:ext uri="{FF2B5EF4-FFF2-40B4-BE49-F238E27FC236}">
-                <a16:creationId xmlns:a16="http://schemas.microsoft.com/office/drawing/2014/main" id="{B2015318-8F9D-49BA-A6DE-BCC1FADED746}"/>
+                <a16:creationId xmlns:a16="http://schemas.microsoft.com/office/drawing/2014/main" id="{7CD65CFA-D2F4-4BA2-864E-DDCB9D76C31B}"/>
               </a:ext>
             </a:extLst>
           </p:cNvPr>
@@ -5687,7 +5687,7 @@
           <p:cNvPr id="16" name="">
             <a:extLst xmlns:a="http://schemas.openxmlformats.org/drawingml/2006/main">
               <a:ext uri="{FF2B5EF4-FFF2-40B4-BE49-F238E27FC236}">
-                <a16:creationId xmlns:a16="http://schemas.microsoft.com/office/drawing/2014/main" id="{68328156-1ECE-4BA1-8C2B-64A9F0A0D73E}"/>
+                <a16:creationId xmlns:a16="http://schemas.microsoft.com/office/drawing/2014/main" id="{EB1B523D-8184-409A-9BF9-194582F8B7E1}"/>
               </a:ext>
             </a:extLst>
           </p:cNvPr>
@@ -5745,7 +5745,7 @@
           <p:cNvPr id="17" name="">
             <a:extLst xmlns:a="http://schemas.openxmlformats.org/drawingml/2006/main">
               <a:ext uri="{FF2B5EF4-FFF2-40B4-BE49-F238E27FC236}">
-                <a16:creationId xmlns:a16="http://schemas.microsoft.com/office/drawing/2014/main" id="{77C22F76-6A24-4185-9827-9756FB9CE746}"/>
+                <a16:creationId xmlns:a16="http://schemas.microsoft.com/office/drawing/2014/main" id="{C3FA3ACC-8D2F-4B0C-82F3-A6E31EED9BD6}"/>
               </a:ext>
             </a:extLst>
           </p:cNvPr>
@@ -5871,7 +5871,7 @@
           <p:cNvPr id="18" name="">
             <a:extLst xmlns:a="http://schemas.openxmlformats.org/drawingml/2006/main">
               <a:ext uri="{FF2B5EF4-FFF2-40B4-BE49-F238E27FC236}">
-                <a16:creationId xmlns:a16="http://schemas.microsoft.com/office/drawing/2014/main" id="{075C1AFB-5C74-42BC-970B-5893C5430DF8}"/>
+                <a16:creationId xmlns:a16="http://schemas.microsoft.com/office/drawing/2014/main" id="{878D86EF-C022-4714-9061-DD3720041782}"/>
               </a:ext>
             </a:extLst>
           </p:cNvPr>
@@ -5904,7 +5904,7 @@
           <p:cNvPr id="19" name="">
             <a:extLst xmlns:a="http://schemas.openxmlformats.org/drawingml/2006/main">
               <a:ext uri="{FF2B5EF4-FFF2-40B4-BE49-F238E27FC236}">
-                <a16:creationId xmlns:a16="http://schemas.microsoft.com/office/drawing/2014/main" id="{878329DF-8672-44E6-A5D2-2B01AE72C211}"/>
+                <a16:creationId xmlns:a16="http://schemas.microsoft.com/office/drawing/2014/main" id="{771A73D0-AE1F-44C7-BD1C-58D5B8928BC0}"/>
               </a:ext>
             </a:extLst>
           </p:cNvPr>
@@ -5939,7 +5939,7 @@
           <p:cNvPr id="20" name="">
             <a:extLst xmlns:a="http://schemas.openxmlformats.org/drawingml/2006/main">
               <a:ext uri="{FF2B5EF4-FFF2-40B4-BE49-F238E27FC236}">
-                <a16:creationId xmlns:a16="http://schemas.microsoft.com/office/drawing/2014/main" id="{D201EC3C-DE9A-4BE7-A284-7BA2889FC88F}"/>
+                <a16:creationId xmlns:a16="http://schemas.microsoft.com/office/drawing/2014/main" id="{AD789EED-FEAF-4FE7-A265-FAF02B384D77}"/>
               </a:ext>
             </a:extLst>
           </p:cNvPr>
@@ -5997,7 +5997,7 @@
           <p:cNvPr id="21" name="">
             <a:extLst xmlns:a="http://schemas.openxmlformats.org/drawingml/2006/main">
               <a:ext uri="{FF2B5EF4-FFF2-40B4-BE49-F238E27FC236}">
-                <a16:creationId xmlns:a16="http://schemas.microsoft.com/office/drawing/2014/main" id="{099D8296-8092-415D-A72F-1FCA3442D843}"/>
+                <a16:creationId xmlns:a16="http://schemas.microsoft.com/office/drawing/2014/main" id="{7650963D-FFF3-40EF-9D53-7BE22166F547}"/>
               </a:ext>
             </a:extLst>
           </p:cNvPr>
@@ -6104,7 +6104,7 @@
     </p:spTree>
     <p:extLst>
       <p:ext uri="{BB962C8B-B14F-4D97-AF65-F5344CB8AC3E}">
-        <p14:creationId xmlns:p14="http://schemas.microsoft.com/office/powerpoint/2010/main" val="697160507"/>
+        <p14:creationId xmlns:p14="http://schemas.microsoft.com/office/powerpoint/2010/main" val="1853763956"/>
       </p:ext>
     </p:extLst>
   </p:cSld>
@@ -6117,7 +6117,7 @@
     <p:bg>
       <p:bgPr>
         <a:solidFill xmlns:a="http://schemas.openxmlformats.org/drawingml/2006/main">
-          <a:srgbClr val="0E1B3E"/>
+          <a:srgbClr val="070F26"/>
         </a:solidFill>
       </p:bgPr>
     </p:bg>
@@ -6135,7 +6135,7 @@
           <p:cNvPr id="1" name="">
             <a:extLst xmlns:a="http://schemas.openxmlformats.org/drawingml/2006/main">
               <a:ext uri="{FF2B5EF4-FFF2-40B4-BE49-F238E27FC236}">
-                <a16:creationId xmlns:a16="http://schemas.microsoft.com/office/drawing/2014/main" id="{A214084A-3F3A-44B8-B01B-38D8B82AE2AB}"/>
+                <a16:creationId xmlns:a16="http://schemas.microsoft.com/office/drawing/2014/main" id="{E8F17631-6500-4017-8A3C-B483CE2F67FD}"/>
               </a:ext>
             </a:extLst>
           </p:cNvPr>
@@ -6153,7 +6153,7 @@
             <a:avLst/>
           </a:prstGeom>
           <a:solidFill xmlns:a="http://schemas.openxmlformats.org/drawingml/2006/main">
-            <a:srgbClr val="0E1B3E"/>
+            <a:srgbClr val="070F26"/>
           </a:solidFill>
           <a:ln xmlns:a="http://schemas.openxmlformats.org/drawingml/2006/main" w="0">
             <a:solidFill>
@@ -6174,7 +6174,7 @@
           <p:nvPr/>
         </p:nvPicPr>
         <p:blipFill>
-          <a:blip xmlns:r="http://schemas.openxmlformats.org/officeDocument/2006/relationships" xmlns:a="http://schemas.openxmlformats.org/drawingml/2006/main" r:embed="R17be6f83788042f5"/>
+          <a:blip xmlns:r="http://schemas.openxmlformats.org/officeDocument/2006/relationships" xmlns:a="http://schemas.openxmlformats.org/drawingml/2006/main" r:embed="R1756e6d79f8d4bb8"/>
           <a:stretch xmlns:a="http://schemas.openxmlformats.org/drawingml/2006/main"/>
         </p:blipFill>
         <p:spPr>
@@ -6192,7 +6192,7 @@
           <p:cNvPr id="3" name="">
             <a:extLst xmlns:a="http://schemas.openxmlformats.org/drawingml/2006/main">
               <a:ext uri="{FF2B5EF4-FFF2-40B4-BE49-F238E27FC236}">
-                <a16:creationId xmlns:a16="http://schemas.microsoft.com/office/drawing/2014/main" id="{646F601A-F2C8-4CEE-9109-A664F21319F4}"/>
+                <a16:creationId xmlns:a16="http://schemas.microsoft.com/office/drawing/2014/main" id="{537E004C-3A15-44B7-A3BA-350E7E67F868}"/>
               </a:ext>
             </a:extLst>
           </p:cNvPr>
@@ -6250,7 +6250,7 @@
           <p:cNvPr id="4" name="">
             <a:extLst xmlns:a="http://schemas.openxmlformats.org/drawingml/2006/main">
               <a:ext uri="{FF2B5EF4-FFF2-40B4-BE49-F238E27FC236}">
-                <a16:creationId xmlns:a16="http://schemas.microsoft.com/office/drawing/2014/main" id="{432C5D04-CC40-4EBC-8AFB-6B6B7DE2E1A5}"/>
+                <a16:creationId xmlns:a16="http://schemas.microsoft.com/office/drawing/2014/main" id="{B2CE488B-235C-4C72-BB7C-06DD1CBCF854}"/>
               </a:ext>
             </a:extLst>
           </p:cNvPr>
@@ -6308,7 +6308,7 @@
           <p:cNvPr id="5" name="">
             <a:extLst xmlns:a="http://schemas.openxmlformats.org/drawingml/2006/main">
               <a:ext uri="{FF2B5EF4-FFF2-40B4-BE49-F238E27FC236}">
-                <a16:creationId xmlns:a16="http://schemas.microsoft.com/office/drawing/2014/main" id="{2A71E33C-2E16-48E8-9BEA-85C2D083523C}"/>
+                <a16:creationId xmlns:a16="http://schemas.microsoft.com/office/drawing/2014/main" id="{960507F3-5027-402D-802A-C740DD48712D}"/>
               </a:ext>
             </a:extLst>
           </p:cNvPr>
@@ -6366,7 +6366,7 @@
           <p:cNvPr id="6" name="">
             <a:extLst xmlns:a="http://schemas.openxmlformats.org/drawingml/2006/main">
               <a:ext uri="{FF2B5EF4-FFF2-40B4-BE49-F238E27FC236}">
-                <a16:creationId xmlns:a16="http://schemas.microsoft.com/office/drawing/2014/main" id="{7AB19044-E951-4629-B16D-0077D788A4C6}"/>
+                <a16:creationId xmlns:a16="http://schemas.microsoft.com/office/drawing/2014/main" id="{4FF034D6-3100-420A-B970-5AAF91A8B328}"/>
               </a:ext>
             </a:extLst>
           </p:cNvPr>
@@ -6428,13 +6428,13 @@
           <p:nvPr/>
         </p:nvPicPr>
         <p:blipFill>
-          <a:blip xmlns:r="http://schemas.openxmlformats.org/officeDocument/2006/relationships" xmlns:a="http://schemas.openxmlformats.org/drawingml/2006/main" r:embed="R2b8561ed22494a6e"/>
+          <a:blip xmlns:r="http://schemas.openxmlformats.org/officeDocument/2006/relationships" xmlns:a="http://schemas.openxmlformats.org/drawingml/2006/main" r:embed="Rda6b75aa11eb4a5f"/>
           <a:stretch xmlns:a="http://schemas.openxmlformats.org/drawingml/2006/main"/>
         </p:blipFill>
         <p:spPr>
           <a:xfrm xmlns:a="http://schemas.openxmlformats.org/drawingml/2006/main">
-            <a:off x="476250" y="1257300"/>
-            <a:ext cx="2667000" cy="4533900"/>
+            <a:off x="0" y="1746250"/>
+            <a:ext cx="2667000" cy="3556000"/>
           </a:xfrm>
           <a:prstGeom xmlns:a="http://schemas.openxmlformats.org/drawingml/2006/main" prst="rect">
             <a:avLst/>
@@ -6446,7 +6446,7 @@
           <p:cNvPr id="8" name="">
             <a:extLst xmlns:a="http://schemas.openxmlformats.org/drawingml/2006/main">
               <a:ext uri="{FF2B5EF4-FFF2-40B4-BE49-F238E27FC236}">
-                <a16:creationId xmlns:a16="http://schemas.microsoft.com/office/drawing/2014/main" id="{B509608B-2200-428A-B511-E2B9545E9872}"/>
+                <a16:creationId xmlns:a16="http://schemas.microsoft.com/office/drawing/2014/main" id="{155FE5FC-BA41-4360-9157-762118EBB9D6}"/>
               </a:ext>
             </a:extLst>
           </p:cNvPr>
@@ -6504,7 +6504,7 @@
           <p:cNvPr id="9" name="">
             <a:extLst xmlns:a="http://schemas.openxmlformats.org/drawingml/2006/main">
               <a:ext uri="{FF2B5EF4-FFF2-40B4-BE49-F238E27FC236}">
-                <a16:creationId xmlns:a16="http://schemas.microsoft.com/office/drawing/2014/main" id="{A561ADDA-6755-4F0B-B602-68AE050F5DC7}"/>
+                <a16:creationId xmlns:a16="http://schemas.microsoft.com/office/drawing/2014/main" id="{31AF6EA8-F9FF-445C-A2C4-86F435ACF817}"/>
               </a:ext>
             </a:extLst>
           </p:cNvPr>
@@ -6562,7 +6562,7 @@
           <p:cNvPr id="10" name="">
             <a:extLst xmlns:a="http://schemas.openxmlformats.org/drawingml/2006/main">
               <a:ext uri="{FF2B5EF4-FFF2-40B4-BE49-F238E27FC236}">
-                <a16:creationId xmlns:a16="http://schemas.microsoft.com/office/drawing/2014/main" id="{2DDBDC71-2319-438A-9DC5-A56DCA9D6EC0}"/>
+                <a16:creationId xmlns:a16="http://schemas.microsoft.com/office/drawing/2014/main" id="{D40580F0-C6FE-4A50-81D0-D909DE8574BB}"/>
               </a:ext>
             </a:extLst>
           </p:cNvPr>
@@ -6618,7 +6618,7 @@
     </p:spTree>
     <p:extLst>
       <p:ext uri="{BB962C8B-B14F-4D97-AF65-F5344CB8AC3E}">
-        <p14:creationId xmlns:p14="http://schemas.microsoft.com/office/powerpoint/2010/main" val="2119058054"/>
+        <p14:creationId xmlns:p14="http://schemas.microsoft.com/office/powerpoint/2010/main" val="38984429"/>
       </p:ext>
     </p:extLst>
   </p:cSld>
@@ -6649,7 +6649,7 @@
           <p:cNvPr id="1" name="">
             <a:extLst xmlns:a="http://schemas.openxmlformats.org/drawingml/2006/main">
               <a:ext uri="{FF2B5EF4-FFF2-40B4-BE49-F238E27FC236}">
-                <a16:creationId xmlns:a16="http://schemas.microsoft.com/office/drawing/2014/main" id="{BD5A3032-F011-4EA5-B997-4C86214D9D93}"/>
+                <a16:creationId xmlns:a16="http://schemas.microsoft.com/office/drawing/2014/main" id="{5FAE4416-0F10-4332-98DF-1178AE431119}"/>
               </a:ext>
             </a:extLst>
           </p:cNvPr>
@@ -6688,7 +6688,7 @@
           <p:nvPr/>
         </p:nvPicPr>
         <p:blipFill>
-          <a:blip xmlns:r="http://schemas.openxmlformats.org/officeDocument/2006/relationships" xmlns:a="http://schemas.openxmlformats.org/drawingml/2006/main" r:embed="Rd0d9f33d2b7a461f"/>
+          <a:blip xmlns:r="http://schemas.openxmlformats.org/officeDocument/2006/relationships" xmlns:a="http://schemas.openxmlformats.org/drawingml/2006/main" r:embed="Rd59bfa5ce28f4f6b"/>
           <a:stretch xmlns:a="http://schemas.openxmlformats.org/drawingml/2006/main"/>
         </p:blipFill>
         <p:spPr>
@@ -6706,7 +6706,7 @@
           <p:cNvPr id="3" name="">
             <a:extLst xmlns:a="http://schemas.openxmlformats.org/drawingml/2006/main">
               <a:ext uri="{FF2B5EF4-FFF2-40B4-BE49-F238E27FC236}">
-                <a16:creationId xmlns:a16="http://schemas.microsoft.com/office/drawing/2014/main" id="{88701072-7907-42E9-B405-714AC8B408EF}"/>
+                <a16:creationId xmlns:a16="http://schemas.microsoft.com/office/drawing/2014/main" id="{DB7BFD8A-E2B3-4C76-863E-AF09B8D4D44B}"/>
               </a:ext>
             </a:extLst>
           </p:cNvPr>
@@ -6744,14 +6744,14 @@
             <a:pPr algn="r">
               <a:defRPr sz="825" b="1">
                 <a:solidFill>
-                  <a:srgbClr val="0E1B3E"/>
+                  <a:srgbClr val="070F26"/>
                 </a:solidFill>
               </a:defRPr>
             </a:pPr>
             <a:r>
               <a:rPr sz="825" b="1">
                 <a:solidFill>
-                  <a:srgbClr val="0E1B3E"/>
+                  <a:srgbClr val="070F26"/>
                 </a:solidFill>
               </a:rPr>
               <a:t>NTT DATA UNIVERSITY</a:t>
@@ -6764,7 +6764,7 @@
           <p:cNvPr id="4" name="">
             <a:extLst xmlns:a="http://schemas.openxmlformats.org/drawingml/2006/main">
               <a:ext uri="{FF2B5EF4-FFF2-40B4-BE49-F238E27FC236}">
-                <a16:creationId xmlns:a16="http://schemas.microsoft.com/office/drawing/2014/main" id="{7E459350-7563-476C-8490-5776BA82DBFA}"/>
+                <a16:creationId xmlns:a16="http://schemas.microsoft.com/office/drawing/2014/main" id="{4A87C662-CE31-4F39-BB0B-8E8DAF639BED}"/>
               </a:ext>
             </a:extLst>
           </p:cNvPr>
@@ -6822,7 +6822,7 @@
           <p:cNvPr id="5" name="">
             <a:extLst xmlns:a="http://schemas.openxmlformats.org/drawingml/2006/main">
               <a:ext uri="{FF2B5EF4-FFF2-40B4-BE49-F238E27FC236}">
-                <a16:creationId xmlns:a16="http://schemas.microsoft.com/office/drawing/2014/main" id="{5712F54A-1E97-4FC4-827F-A1C24D992331}"/>
+                <a16:creationId xmlns:a16="http://schemas.microsoft.com/office/drawing/2014/main" id="{44A5D61F-8C35-4B41-9A20-EFDD27EC0B68}"/>
               </a:ext>
             </a:extLst>
           </p:cNvPr>
@@ -6880,7 +6880,7 @@
           <p:cNvPr id="6" name="">
             <a:extLst xmlns:a="http://schemas.openxmlformats.org/drawingml/2006/main">
               <a:ext uri="{FF2B5EF4-FFF2-40B4-BE49-F238E27FC236}">
-                <a16:creationId xmlns:a16="http://schemas.microsoft.com/office/drawing/2014/main" id="{22704987-CFEE-4EC9-9F55-9A8127E1BEC9}"/>
+                <a16:creationId xmlns:a16="http://schemas.microsoft.com/office/drawing/2014/main" id="{C547A413-C732-4AAD-8472-F8549CF3505C}"/>
               </a:ext>
             </a:extLst>
           </p:cNvPr>
@@ -6918,14 +6918,14 @@
             <a:pPr algn="r">
               <a:defRPr sz="675" b="1">
                 <a:solidFill>
-                  <a:srgbClr val="0E1B3E"/>
+                  <a:srgbClr val="070F26"/>
                 </a:solidFill>
               </a:defRPr>
             </a:pPr>
             <a:r>
               <a:rPr sz="675" b="1">
                 <a:solidFill>
-                  <a:srgbClr val="0E1B3E"/>
+                  <a:srgbClr val="070F26"/>
                 </a:solidFill>
               </a:rPr>
               <a:t>NTT DATA UNIVERSITY</a:t>
@@ -6938,7 +6938,7 @@
           <p:cNvPr id="7" name="">
             <a:extLst xmlns:a="http://schemas.openxmlformats.org/drawingml/2006/main">
               <a:ext uri="{FF2B5EF4-FFF2-40B4-BE49-F238E27FC236}">
-                <a16:creationId xmlns:a16="http://schemas.microsoft.com/office/drawing/2014/main" id="{E45D896F-BA91-4BE8-A7C1-850594B9692E}"/>
+                <a16:creationId xmlns:a16="http://schemas.microsoft.com/office/drawing/2014/main" id="{0E8F2DC3-CB42-4EDC-873F-902FAD36D739}"/>
               </a:ext>
             </a:extLst>
           </p:cNvPr>
@@ -6996,7 +6996,7 @@
           <p:cNvPr id="8" name="">
             <a:extLst xmlns:a="http://schemas.openxmlformats.org/drawingml/2006/main">
               <a:ext uri="{FF2B5EF4-FFF2-40B4-BE49-F238E27FC236}">
-                <a16:creationId xmlns:a16="http://schemas.microsoft.com/office/drawing/2014/main" id="{B7A8DD8F-811E-40B1-945B-A75F5123F38E}"/>
+                <a16:creationId xmlns:a16="http://schemas.microsoft.com/office/drawing/2014/main" id="{D06B3A69-43E5-4BD0-AC9F-E58F85443D79}"/>
               </a:ext>
             </a:extLst>
           </p:cNvPr>
@@ -7034,14 +7034,14 @@
             <a:pPr algn="l">
               <a:defRPr sz="2400" b="0">
                 <a:solidFill>
-                  <a:srgbClr val="0E1B3E"/>
+                  <a:srgbClr val="070F26"/>
                 </a:solidFill>
               </a:defRPr>
             </a:pPr>
             <a:r>
               <a:rPr sz="2400" b="0">
                 <a:solidFill>
-                  <a:srgbClr val="0E1B3E"/>
+                  <a:srgbClr val="070F26"/>
                 </a:solidFill>
               </a:rPr>
               <a:t>O que cobrimos hoje</a:t>
@@ -7054,7 +7054,7 @@
           <p:cNvPr id="9" name="">
             <a:extLst xmlns:a="http://schemas.openxmlformats.org/drawingml/2006/main">
               <a:ext uri="{FF2B5EF4-FFF2-40B4-BE49-F238E27FC236}">
-                <a16:creationId xmlns:a16="http://schemas.microsoft.com/office/drawing/2014/main" id="{8FA78565-98B9-4E5B-B2A4-1CCA48558441}"/>
+                <a16:creationId xmlns:a16="http://schemas.microsoft.com/office/drawing/2014/main" id="{A719A4C4-C24C-4AE0-882C-E1684396E0B7}"/>
               </a:ext>
             </a:extLst>
           </p:cNvPr>
@@ -7112,7 +7112,7 @@
           <p:cNvPr id="10" name="">
             <a:extLst xmlns:a="http://schemas.openxmlformats.org/drawingml/2006/main">
               <a:ext uri="{FF2B5EF4-FFF2-40B4-BE49-F238E27FC236}">
-                <a16:creationId xmlns:a16="http://schemas.microsoft.com/office/drawing/2014/main" id="{32AB8097-51EB-4141-8AB2-FD5BA4BCB9BC}"/>
+                <a16:creationId xmlns:a16="http://schemas.microsoft.com/office/drawing/2014/main" id="{AF1ABF64-518D-44C0-8395-06234FEFE5A6}"/>
               </a:ext>
             </a:extLst>
           </p:cNvPr>
@@ -7145,7 +7145,7 @@
           <p:cNvPr id="11" name="">
             <a:extLst xmlns:a="http://schemas.openxmlformats.org/drawingml/2006/main">
               <a:ext uri="{FF2B5EF4-FFF2-40B4-BE49-F238E27FC236}">
-                <a16:creationId xmlns:a16="http://schemas.microsoft.com/office/drawing/2014/main" id="{65B9A49D-00FD-40A7-BDB0-C195282FBA23}"/>
+                <a16:creationId xmlns:a16="http://schemas.microsoft.com/office/drawing/2014/main" id="{A367B8CB-ECF1-42B3-A116-04E8CBF4AF41}"/>
               </a:ext>
             </a:extLst>
           </p:cNvPr>
@@ -7180,7 +7180,7 @@
           <p:cNvPr id="12" name="">
             <a:extLst xmlns:a="http://schemas.openxmlformats.org/drawingml/2006/main">
               <a:ext uri="{FF2B5EF4-FFF2-40B4-BE49-F238E27FC236}">
-                <a16:creationId xmlns:a16="http://schemas.microsoft.com/office/drawing/2014/main" id="{3EC45C94-5701-4F47-93B0-51003DB5BB8F}"/>
+                <a16:creationId xmlns:a16="http://schemas.microsoft.com/office/drawing/2014/main" id="{2ACA4107-297E-4861-9A54-6B38FFD8E47C}"/>
               </a:ext>
             </a:extLst>
           </p:cNvPr>
@@ -7238,7 +7238,7 @@
           <p:cNvPr id="13" name="">
             <a:extLst xmlns:a="http://schemas.openxmlformats.org/drawingml/2006/main">
               <a:ext uri="{FF2B5EF4-FFF2-40B4-BE49-F238E27FC236}">
-                <a16:creationId xmlns:a16="http://schemas.microsoft.com/office/drawing/2014/main" id="{39A78C54-8F9C-4E2C-8CA8-85DAF8EF588B}"/>
+                <a16:creationId xmlns:a16="http://schemas.microsoft.com/office/drawing/2014/main" id="{DAFD4CDE-9D53-43A6-9963-56803CC8B075}"/>
               </a:ext>
             </a:extLst>
           </p:cNvPr>
@@ -7296,7 +7296,7 @@
           <p:cNvPr id="14" name="">
             <a:extLst xmlns:a="http://schemas.openxmlformats.org/drawingml/2006/main">
               <a:ext uri="{FF2B5EF4-FFF2-40B4-BE49-F238E27FC236}">
-                <a16:creationId xmlns:a16="http://schemas.microsoft.com/office/drawing/2014/main" id="{0B6C365B-0BD9-470A-A3CE-4B254101514A}"/>
+                <a16:creationId xmlns:a16="http://schemas.microsoft.com/office/drawing/2014/main" id="{79D0E5FE-C6B1-4229-9328-ABE4DD9F827C}"/>
               </a:ext>
             </a:extLst>
           </p:cNvPr>
@@ -7329,7 +7329,7 @@
           <p:cNvPr id="15" name="">
             <a:extLst xmlns:a="http://schemas.openxmlformats.org/drawingml/2006/main">
               <a:ext uri="{FF2B5EF4-FFF2-40B4-BE49-F238E27FC236}">
-                <a16:creationId xmlns:a16="http://schemas.microsoft.com/office/drawing/2014/main" id="{BF98BD11-0314-47D7-86FF-EBA6C6B45A08}"/>
+                <a16:creationId xmlns:a16="http://schemas.microsoft.com/office/drawing/2014/main" id="{8D103010-1187-401D-9E90-3FBD0C7F326D}"/>
               </a:ext>
             </a:extLst>
           </p:cNvPr>
@@ -7364,7 +7364,7 @@
           <p:cNvPr id="16" name="">
             <a:extLst xmlns:a="http://schemas.openxmlformats.org/drawingml/2006/main">
               <a:ext uri="{FF2B5EF4-FFF2-40B4-BE49-F238E27FC236}">
-                <a16:creationId xmlns:a16="http://schemas.microsoft.com/office/drawing/2014/main" id="{EDEED63A-5ECC-4F2B-AF9F-4CD7614EA00E}"/>
+                <a16:creationId xmlns:a16="http://schemas.microsoft.com/office/drawing/2014/main" id="{D67759D6-8D4A-4D61-A83D-B7B749DD6EFF}"/>
               </a:ext>
             </a:extLst>
           </p:cNvPr>
@@ -7422,7 +7422,7 @@
           <p:cNvPr id="17" name="">
             <a:extLst xmlns:a="http://schemas.openxmlformats.org/drawingml/2006/main">
               <a:ext uri="{FF2B5EF4-FFF2-40B4-BE49-F238E27FC236}">
-                <a16:creationId xmlns:a16="http://schemas.microsoft.com/office/drawing/2014/main" id="{27DA4034-2AE1-4EEF-B712-6E512E9DCED9}"/>
+                <a16:creationId xmlns:a16="http://schemas.microsoft.com/office/drawing/2014/main" id="{0B012413-8FEA-41CF-874C-A7B68FB57ECF}"/>
               </a:ext>
             </a:extLst>
           </p:cNvPr>
@@ -7480,7 +7480,7 @@
           <p:cNvPr id="18" name="">
             <a:extLst xmlns:a="http://schemas.openxmlformats.org/drawingml/2006/main">
               <a:ext uri="{FF2B5EF4-FFF2-40B4-BE49-F238E27FC236}">
-                <a16:creationId xmlns:a16="http://schemas.microsoft.com/office/drawing/2014/main" id="{1AD9BB09-CEC5-46BD-B2AC-6CAF826CB5C1}"/>
+                <a16:creationId xmlns:a16="http://schemas.microsoft.com/office/drawing/2014/main" id="{62C652E7-1173-410D-88F5-16C19C2B76E7}"/>
               </a:ext>
             </a:extLst>
           </p:cNvPr>
@@ -7513,7 +7513,7 @@
           <p:cNvPr id="19" name="">
             <a:extLst xmlns:a="http://schemas.openxmlformats.org/drawingml/2006/main">
               <a:ext uri="{FF2B5EF4-FFF2-40B4-BE49-F238E27FC236}">
-                <a16:creationId xmlns:a16="http://schemas.microsoft.com/office/drawing/2014/main" id="{E92DDE83-318C-4221-ADD3-30B69E11C308}"/>
+                <a16:creationId xmlns:a16="http://schemas.microsoft.com/office/drawing/2014/main" id="{7DEA9742-DA26-4F2F-BCBA-BF9ADDCDD3DB}"/>
               </a:ext>
             </a:extLst>
           </p:cNvPr>
@@ -7548,7 +7548,7 @@
           <p:cNvPr id="20" name="">
             <a:extLst xmlns:a="http://schemas.openxmlformats.org/drawingml/2006/main">
               <a:ext uri="{FF2B5EF4-FFF2-40B4-BE49-F238E27FC236}">
-                <a16:creationId xmlns:a16="http://schemas.microsoft.com/office/drawing/2014/main" id="{DF0FB332-154F-4CCC-ADA6-21C87A056838}"/>
+                <a16:creationId xmlns:a16="http://schemas.microsoft.com/office/drawing/2014/main" id="{12EF39F4-2FF9-472D-97BD-610597E32CC3}"/>
               </a:ext>
             </a:extLst>
           </p:cNvPr>
@@ -7606,7 +7606,7 @@
           <p:cNvPr id="21" name="">
             <a:extLst xmlns:a="http://schemas.openxmlformats.org/drawingml/2006/main">
               <a:ext uri="{FF2B5EF4-FFF2-40B4-BE49-F238E27FC236}">
-                <a16:creationId xmlns:a16="http://schemas.microsoft.com/office/drawing/2014/main" id="{9FAE67A0-2B84-45C6-9102-C2A318CEE400}"/>
+                <a16:creationId xmlns:a16="http://schemas.microsoft.com/office/drawing/2014/main" id="{312CA2B1-ACA9-47F3-A14C-C410963E1298}"/>
               </a:ext>
             </a:extLst>
           </p:cNvPr>
@@ -7681,7 +7681,7 @@
           <p:cNvPr id="22" name="">
             <a:extLst xmlns:a="http://schemas.openxmlformats.org/drawingml/2006/main">
               <a:ext uri="{FF2B5EF4-FFF2-40B4-BE49-F238E27FC236}">
-                <a16:creationId xmlns:a16="http://schemas.microsoft.com/office/drawing/2014/main" id="{6139825A-7A5D-4066-9EF8-17D575FDC3CC}"/>
+                <a16:creationId xmlns:a16="http://schemas.microsoft.com/office/drawing/2014/main" id="{6A488F27-4C4E-4048-A4BF-A408D5B253A0}"/>
               </a:ext>
             </a:extLst>
           </p:cNvPr>
@@ -7714,7 +7714,7 @@
           <p:cNvPr id="23" name="">
             <a:extLst xmlns:a="http://schemas.openxmlformats.org/drawingml/2006/main">
               <a:ext uri="{FF2B5EF4-FFF2-40B4-BE49-F238E27FC236}">
-                <a16:creationId xmlns:a16="http://schemas.microsoft.com/office/drawing/2014/main" id="{99B251CD-F9D6-4A47-8726-9FAE2E95F927}"/>
+                <a16:creationId xmlns:a16="http://schemas.microsoft.com/office/drawing/2014/main" id="{F5109E26-D40A-44B7-ACF2-3EA0165E8776}"/>
               </a:ext>
             </a:extLst>
           </p:cNvPr>
@@ -7749,7 +7749,7 @@
           <p:cNvPr id="24" name="">
             <a:extLst xmlns:a="http://schemas.openxmlformats.org/drawingml/2006/main">
               <a:ext uri="{FF2B5EF4-FFF2-40B4-BE49-F238E27FC236}">
-                <a16:creationId xmlns:a16="http://schemas.microsoft.com/office/drawing/2014/main" id="{B5DA0946-1818-42A5-AC4C-C2A717C54BEF}"/>
+                <a16:creationId xmlns:a16="http://schemas.microsoft.com/office/drawing/2014/main" id="{B2A30763-CCAD-42A0-9888-3A92C8E21666}"/>
               </a:ext>
             </a:extLst>
           </p:cNvPr>
@@ -7807,7 +7807,7 @@
           <p:cNvPr id="25" name="">
             <a:extLst xmlns:a="http://schemas.openxmlformats.org/drawingml/2006/main">
               <a:ext uri="{FF2B5EF4-FFF2-40B4-BE49-F238E27FC236}">
-                <a16:creationId xmlns:a16="http://schemas.microsoft.com/office/drawing/2014/main" id="{F3C51FBF-32D3-4784-996B-9CBC3FBEFE0D}"/>
+                <a16:creationId xmlns:a16="http://schemas.microsoft.com/office/drawing/2014/main" id="{142B39ED-8AA8-4B2B-B187-F2370D387303}"/>
               </a:ext>
             </a:extLst>
           </p:cNvPr>
@@ -7880,7 +7880,7 @@
     </p:spTree>
     <p:extLst>
       <p:ext uri="{BB962C8B-B14F-4D97-AF65-F5344CB8AC3E}">
-        <p14:creationId xmlns:p14="http://schemas.microsoft.com/office/powerpoint/2010/main" val="1461018880"/>
+        <p14:creationId xmlns:p14="http://schemas.microsoft.com/office/powerpoint/2010/main" val="342303728"/>
       </p:ext>
     </p:extLst>
   </p:cSld>
@@ -7911,7 +7911,7 @@
           <p:cNvPr id="1" name="">
             <a:extLst xmlns:a="http://schemas.openxmlformats.org/drawingml/2006/main">
               <a:ext uri="{FF2B5EF4-FFF2-40B4-BE49-F238E27FC236}">
-                <a16:creationId xmlns:a16="http://schemas.microsoft.com/office/drawing/2014/main" id="{213363C6-F9AC-4A8C-B28A-A2F44D6FD656}"/>
+                <a16:creationId xmlns:a16="http://schemas.microsoft.com/office/drawing/2014/main" id="{6DB188A8-42C3-4B57-B510-C2443A7F8F12}"/>
               </a:ext>
             </a:extLst>
           </p:cNvPr>
@@ -7950,7 +7950,7 @@
           <p:nvPr/>
         </p:nvPicPr>
         <p:blipFill>
-          <a:blip xmlns:r="http://schemas.openxmlformats.org/officeDocument/2006/relationships" xmlns:a="http://schemas.openxmlformats.org/drawingml/2006/main" r:embed="R334e442e3f9944a2"/>
+          <a:blip xmlns:r="http://schemas.openxmlformats.org/officeDocument/2006/relationships" xmlns:a="http://schemas.openxmlformats.org/drawingml/2006/main" r:embed="R7195be963fa94881"/>
           <a:stretch xmlns:a="http://schemas.openxmlformats.org/drawingml/2006/main"/>
         </p:blipFill>
         <p:spPr>
@@ -7968,7 +7968,7 @@
           <p:cNvPr id="3" name="">
             <a:extLst xmlns:a="http://schemas.openxmlformats.org/drawingml/2006/main">
               <a:ext uri="{FF2B5EF4-FFF2-40B4-BE49-F238E27FC236}">
-                <a16:creationId xmlns:a16="http://schemas.microsoft.com/office/drawing/2014/main" id="{4C5FC85C-5A53-482F-AF7D-5E4F0C02779C}"/>
+                <a16:creationId xmlns:a16="http://schemas.microsoft.com/office/drawing/2014/main" id="{0315C7D6-0328-4363-95B9-F54ACAF80F9A}"/>
               </a:ext>
             </a:extLst>
           </p:cNvPr>
@@ -8006,14 +8006,14 @@
             <a:pPr algn="r">
               <a:defRPr sz="825" b="1">
                 <a:solidFill>
-                  <a:srgbClr val="0E1B3E"/>
+                  <a:srgbClr val="070F26"/>
                 </a:solidFill>
               </a:defRPr>
             </a:pPr>
             <a:r>
               <a:rPr sz="825" b="1">
                 <a:solidFill>
-                  <a:srgbClr val="0E1B3E"/>
+                  <a:srgbClr val="070F26"/>
                 </a:solidFill>
               </a:rPr>
               <a:t>NTT DATA UNIVERSITY</a:t>
@@ -8026,7 +8026,7 @@
           <p:cNvPr id="4" name="">
             <a:extLst xmlns:a="http://schemas.openxmlformats.org/drawingml/2006/main">
               <a:ext uri="{FF2B5EF4-FFF2-40B4-BE49-F238E27FC236}">
-                <a16:creationId xmlns:a16="http://schemas.microsoft.com/office/drawing/2014/main" id="{388E021E-89F5-4C29-BC80-B1B84B1FCD95}"/>
+                <a16:creationId xmlns:a16="http://schemas.microsoft.com/office/drawing/2014/main" id="{9C54A5C7-6A9D-4A60-8050-1588DF44E7A0}"/>
               </a:ext>
             </a:extLst>
           </p:cNvPr>
@@ -8084,7 +8084,7 @@
           <p:cNvPr id="5" name="">
             <a:extLst xmlns:a="http://schemas.openxmlformats.org/drawingml/2006/main">
               <a:ext uri="{FF2B5EF4-FFF2-40B4-BE49-F238E27FC236}">
-                <a16:creationId xmlns:a16="http://schemas.microsoft.com/office/drawing/2014/main" id="{EE17428A-CB8E-4B5B-ADD2-332605D9F159}"/>
+                <a16:creationId xmlns:a16="http://schemas.microsoft.com/office/drawing/2014/main" id="{6FEE41D8-C4EF-46A1-A0F1-1EF23E18D909}"/>
               </a:ext>
             </a:extLst>
           </p:cNvPr>
@@ -8142,7 +8142,7 @@
           <p:cNvPr id="6" name="">
             <a:extLst xmlns:a="http://schemas.openxmlformats.org/drawingml/2006/main">
               <a:ext uri="{FF2B5EF4-FFF2-40B4-BE49-F238E27FC236}">
-                <a16:creationId xmlns:a16="http://schemas.microsoft.com/office/drawing/2014/main" id="{859CEC78-CC92-4616-8D30-5AEE5E929B89}"/>
+                <a16:creationId xmlns:a16="http://schemas.microsoft.com/office/drawing/2014/main" id="{5ACAA957-5489-4CD1-8B76-8BE95E24A51D}"/>
               </a:ext>
             </a:extLst>
           </p:cNvPr>
@@ -8180,14 +8180,14 @@
             <a:pPr algn="r">
               <a:defRPr sz="675" b="1">
                 <a:solidFill>
-                  <a:srgbClr val="0E1B3E"/>
+                  <a:srgbClr val="070F26"/>
                 </a:solidFill>
               </a:defRPr>
             </a:pPr>
             <a:r>
               <a:rPr sz="675" b="1">
                 <a:solidFill>
-                  <a:srgbClr val="0E1B3E"/>
+                  <a:srgbClr val="070F26"/>
                 </a:solidFill>
               </a:rPr>
               <a:t>NTT DATA UNIVERSITY</a:t>
@@ -8200,7 +8200,7 @@
           <p:cNvPr id="7" name="">
             <a:extLst xmlns:a="http://schemas.openxmlformats.org/drawingml/2006/main">
               <a:ext uri="{FF2B5EF4-FFF2-40B4-BE49-F238E27FC236}">
-                <a16:creationId xmlns:a16="http://schemas.microsoft.com/office/drawing/2014/main" id="{8700732B-F5E0-4D98-8335-5D056FF93215}"/>
+                <a16:creationId xmlns:a16="http://schemas.microsoft.com/office/drawing/2014/main" id="{F9FAD206-230F-4489-AB0D-DBBF09B898FC}"/>
               </a:ext>
             </a:extLst>
           </p:cNvPr>
@@ -8258,7 +8258,7 @@
           <p:cNvPr id="8" name="">
             <a:extLst xmlns:a="http://schemas.openxmlformats.org/drawingml/2006/main">
               <a:ext uri="{FF2B5EF4-FFF2-40B4-BE49-F238E27FC236}">
-                <a16:creationId xmlns:a16="http://schemas.microsoft.com/office/drawing/2014/main" id="{F3E663C3-F4A2-423C-B5DA-6D049ACBA191}"/>
+                <a16:creationId xmlns:a16="http://schemas.microsoft.com/office/drawing/2014/main" id="{CE7D603F-348D-46A0-891F-C785857BB35D}"/>
               </a:ext>
             </a:extLst>
           </p:cNvPr>
@@ -8296,14 +8296,14 @@
             <a:pPr algn="l">
               <a:defRPr sz="2400" b="0">
                 <a:solidFill>
-                  <a:srgbClr val="0E1B3E"/>
+                  <a:srgbClr val="070F26"/>
                 </a:solidFill>
               </a:defRPr>
             </a:pPr>
             <a:r>
               <a:rPr sz="2400" b="0">
                 <a:solidFill>
-                  <a:srgbClr val="0E1B3E"/>
+                  <a:srgbClr val="070F26"/>
                 </a:solidFill>
               </a:rPr>
               <a:t>Módulo 3 — Formatos de Dados</a:t>
@@ -8316,7 +8316,7 @@
           <p:cNvPr id="9" name="">
             <a:extLst xmlns:a="http://schemas.openxmlformats.org/drawingml/2006/main">
               <a:ext uri="{FF2B5EF4-FFF2-40B4-BE49-F238E27FC236}">
-                <a16:creationId xmlns:a16="http://schemas.microsoft.com/office/drawing/2014/main" id="{85E73F39-0592-420A-A797-F8B022135D24}"/>
+                <a16:creationId xmlns:a16="http://schemas.microsoft.com/office/drawing/2014/main" id="{8B6198BB-33CE-4BE2-8D7B-183503B25840}"/>
               </a:ext>
             </a:extLst>
           </p:cNvPr>
@@ -8374,7 +8374,7 @@
           <p:cNvPr id="10" name="">
             <a:extLst xmlns:a="http://schemas.openxmlformats.org/drawingml/2006/main">
               <a:ext uri="{FF2B5EF4-FFF2-40B4-BE49-F238E27FC236}">
-                <a16:creationId xmlns:a16="http://schemas.microsoft.com/office/drawing/2014/main" id="{10C68838-5B91-4617-9DC0-937793A08FF8}"/>
+                <a16:creationId xmlns:a16="http://schemas.microsoft.com/office/drawing/2014/main" id="{DA7B3337-ED34-4115-8008-2C0A700BF1C7}"/>
               </a:ext>
             </a:extLst>
           </p:cNvPr>
@@ -8407,7 +8407,7 @@
           <p:cNvPr id="11" name="">
             <a:extLst xmlns:a="http://schemas.openxmlformats.org/drawingml/2006/main">
               <a:ext uri="{FF2B5EF4-FFF2-40B4-BE49-F238E27FC236}">
-                <a16:creationId xmlns:a16="http://schemas.microsoft.com/office/drawing/2014/main" id="{9FD77633-6E07-4F1C-AEF4-3F652122A9A5}"/>
+                <a16:creationId xmlns:a16="http://schemas.microsoft.com/office/drawing/2014/main" id="{9D3E8226-8A60-4185-8687-376FE0354C48}"/>
               </a:ext>
             </a:extLst>
           </p:cNvPr>
@@ -8442,7 +8442,7 @@
           <p:cNvPr id="12" name="">
             <a:extLst xmlns:a="http://schemas.openxmlformats.org/drawingml/2006/main">
               <a:ext uri="{FF2B5EF4-FFF2-40B4-BE49-F238E27FC236}">
-                <a16:creationId xmlns:a16="http://schemas.microsoft.com/office/drawing/2014/main" id="{1B28D8D0-2630-4502-B514-9435902ABC24}"/>
+                <a16:creationId xmlns:a16="http://schemas.microsoft.com/office/drawing/2014/main" id="{0408D1F5-E5FE-474C-BACB-D37FE9C754A2}"/>
               </a:ext>
             </a:extLst>
           </p:cNvPr>
@@ -8500,7 +8500,7 @@
           <p:cNvPr id="13" name="">
             <a:extLst xmlns:a="http://schemas.openxmlformats.org/drawingml/2006/main">
               <a:ext uri="{FF2B5EF4-FFF2-40B4-BE49-F238E27FC236}">
-                <a16:creationId xmlns:a16="http://schemas.microsoft.com/office/drawing/2014/main" id="{0EE649AE-07A4-43DC-AF0E-8B8D796E9A52}"/>
+                <a16:creationId xmlns:a16="http://schemas.microsoft.com/office/drawing/2014/main" id="{AD941352-669C-4675-BB01-AF356C216816}"/>
               </a:ext>
             </a:extLst>
           </p:cNvPr>
@@ -8592,7 +8592,7 @@
           <p:cNvPr id="14" name="">
             <a:extLst xmlns:a="http://schemas.openxmlformats.org/drawingml/2006/main">
               <a:ext uri="{FF2B5EF4-FFF2-40B4-BE49-F238E27FC236}">
-                <a16:creationId xmlns:a16="http://schemas.microsoft.com/office/drawing/2014/main" id="{BC19179C-259A-4B49-BF84-620D90A58568}"/>
+                <a16:creationId xmlns:a16="http://schemas.microsoft.com/office/drawing/2014/main" id="{5EAF3AED-DF98-4446-B30F-7A6527B76D08}"/>
               </a:ext>
             </a:extLst>
           </p:cNvPr>
@@ -8625,7 +8625,7 @@
           <p:cNvPr id="15" name="">
             <a:extLst xmlns:a="http://schemas.openxmlformats.org/drawingml/2006/main">
               <a:ext uri="{FF2B5EF4-FFF2-40B4-BE49-F238E27FC236}">
-                <a16:creationId xmlns:a16="http://schemas.microsoft.com/office/drawing/2014/main" id="{151808E0-37D9-494B-A787-BA061628552D}"/>
+                <a16:creationId xmlns:a16="http://schemas.microsoft.com/office/drawing/2014/main" id="{A66594A4-2753-4406-B007-2F8F802928FF}"/>
               </a:ext>
             </a:extLst>
           </p:cNvPr>
@@ -8660,7 +8660,7 @@
           <p:cNvPr id="16" name="">
             <a:extLst xmlns:a="http://schemas.openxmlformats.org/drawingml/2006/main">
               <a:ext uri="{FF2B5EF4-FFF2-40B4-BE49-F238E27FC236}">
-                <a16:creationId xmlns:a16="http://schemas.microsoft.com/office/drawing/2014/main" id="{1107571C-9287-42A2-AD02-413206B5DB09}"/>
+                <a16:creationId xmlns:a16="http://schemas.microsoft.com/office/drawing/2014/main" id="{69DDA4C7-2FFE-4C90-A4EE-49067A1C1F0E}"/>
               </a:ext>
             </a:extLst>
           </p:cNvPr>
@@ -8718,7 +8718,7 @@
           <p:cNvPr id="17" name="">
             <a:extLst xmlns:a="http://schemas.openxmlformats.org/drawingml/2006/main">
               <a:ext uri="{FF2B5EF4-FFF2-40B4-BE49-F238E27FC236}">
-                <a16:creationId xmlns:a16="http://schemas.microsoft.com/office/drawing/2014/main" id="{B0EBE7A9-0355-4961-8C40-1C10C5796B5F}"/>
+                <a16:creationId xmlns:a16="http://schemas.microsoft.com/office/drawing/2014/main" id="{9E3420E1-3EB4-4E40-85B3-2F669C8B7DB4}"/>
               </a:ext>
             </a:extLst>
           </p:cNvPr>
@@ -8810,7 +8810,7 @@
           <p:cNvPr id="18" name="">
             <a:extLst xmlns:a="http://schemas.openxmlformats.org/drawingml/2006/main">
               <a:ext uri="{FF2B5EF4-FFF2-40B4-BE49-F238E27FC236}">
-                <a16:creationId xmlns:a16="http://schemas.microsoft.com/office/drawing/2014/main" id="{051C7E6A-278F-4BFE-8EED-C54536F44B1E}"/>
+                <a16:creationId xmlns:a16="http://schemas.microsoft.com/office/drawing/2014/main" id="{774E3A42-F7FC-427D-87B1-2304D154DDD0}"/>
               </a:ext>
             </a:extLst>
           </p:cNvPr>
@@ -8843,7 +8843,7 @@
           <p:cNvPr id="19" name="">
             <a:extLst xmlns:a="http://schemas.openxmlformats.org/drawingml/2006/main">
               <a:ext uri="{FF2B5EF4-FFF2-40B4-BE49-F238E27FC236}">
-                <a16:creationId xmlns:a16="http://schemas.microsoft.com/office/drawing/2014/main" id="{65150D23-0348-4DBD-8AA1-E297D8FD77B7}"/>
+                <a16:creationId xmlns:a16="http://schemas.microsoft.com/office/drawing/2014/main" id="{0FB0A566-DE3F-41B5-884F-13BA6B55E9F3}"/>
               </a:ext>
             </a:extLst>
           </p:cNvPr>
@@ -8878,7 +8878,7 @@
           <p:cNvPr id="20" name="">
             <a:extLst xmlns:a="http://schemas.openxmlformats.org/drawingml/2006/main">
               <a:ext uri="{FF2B5EF4-FFF2-40B4-BE49-F238E27FC236}">
-                <a16:creationId xmlns:a16="http://schemas.microsoft.com/office/drawing/2014/main" id="{39E0E4C7-9B14-4844-8FE0-33A1C125A83F}"/>
+                <a16:creationId xmlns:a16="http://schemas.microsoft.com/office/drawing/2014/main" id="{8DFC18B9-D155-4F42-9633-2B05E44F024D}"/>
               </a:ext>
             </a:extLst>
           </p:cNvPr>
@@ -8936,7 +8936,7 @@
           <p:cNvPr id="21" name="">
             <a:extLst xmlns:a="http://schemas.openxmlformats.org/drawingml/2006/main">
               <a:ext uri="{FF2B5EF4-FFF2-40B4-BE49-F238E27FC236}">
-                <a16:creationId xmlns:a16="http://schemas.microsoft.com/office/drawing/2014/main" id="{6B030AEE-53D8-4AF6-8C17-1BB5DD0C040D}"/>
+                <a16:creationId xmlns:a16="http://schemas.microsoft.com/office/drawing/2014/main" id="{D30F92F3-B58E-40CD-88B8-DF9A95843152}"/>
               </a:ext>
             </a:extLst>
           </p:cNvPr>
@@ -9009,7 +9009,7 @@
     </p:spTree>
     <p:extLst>
       <p:ext uri="{BB962C8B-B14F-4D97-AF65-F5344CB8AC3E}">
-        <p14:creationId xmlns:p14="http://schemas.microsoft.com/office/powerpoint/2010/main" val="410671202"/>
+        <p14:creationId xmlns:p14="http://schemas.microsoft.com/office/powerpoint/2010/main" val="247271984"/>
       </p:ext>
     </p:extLst>
   </p:cSld>
@@ -9022,7 +9022,7 @@
     <p:bg>
       <p:bgPr>
         <a:solidFill xmlns:a="http://schemas.openxmlformats.org/drawingml/2006/main">
-          <a:srgbClr val="0E1B3E"/>
+          <a:srgbClr val="070F26"/>
         </a:solidFill>
       </p:bgPr>
     </p:bg>
@@ -9040,7 +9040,7 @@
           <p:cNvPr id="1" name="">
             <a:extLst xmlns:a="http://schemas.openxmlformats.org/drawingml/2006/main">
               <a:ext uri="{FF2B5EF4-FFF2-40B4-BE49-F238E27FC236}">
-                <a16:creationId xmlns:a16="http://schemas.microsoft.com/office/drawing/2014/main" id="{BD4E2DB7-44B4-4D97-9A49-60FC5722D099}"/>
+                <a16:creationId xmlns:a16="http://schemas.microsoft.com/office/drawing/2014/main" id="{3C3D9FCE-2448-4DCC-AF2B-92DBBC01ABCD}"/>
               </a:ext>
             </a:extLst>
           </p:cNvPr>
@@ -9058,7 +9058,7 @@
             <a:avLst/>
           </a:prstGeom>
           <a:solidFill xmlns:a="http://schemas.openxmlformats.org/drawingml/2006/main">
-            <a:srgbClr val="0E1B3E"/>
+            <a:srgbClr val="070F26"/>
           </a:solidFill>
           <a:ln xmlns:a="http://schemas.openxmlformats.org/drawingml/2006/main" w="0">
             <a:solidFill>
@@ -9079,7 +9079,7 @@
           <p:nvPr/>
         </p:nvPicPr>
         <p:blipFill>
-          <a:blip xmlns:r="http://schemas.openxmlformats.org/officeDocument/2006/relationships" xmlns:a="http://schemas.openxmlformats.org/drawingml/2006/main" r:embed="R533645de11144957"/>
+          <a:blip xmlns:r="http://schemas.openxmlformats.org/officeDocument/2006/relationships" xmlns:a="http://schemas.openxmlformats.org/drawingml/2006/main" r:embed="R5f134a8a035d4c45"/>
           <a:stretch xmlns:a="http://schemas.openxmlformats.org/drawingml/2006/main"/>
         </p:blipFill>
         <p:spPr>
@@ -9097,7 +9097,7 @@
           <p:cNvPr id="3" name="">
             <a:extLst xmlns:a="http://schemas.openxmlformats.org/drawingml/2006/main">
               <a:ext uri="{FF2B5EF4-FFF2-40B4-BE49-F238E27FC236}">
-                <a16:creationId xmlns:a16="http://schemas.microsoft.com/office/drawing/2014/main" id="{A0CDBEF5-8747-4749-ACFE-4C85C7FE9C05}"/>
+                <a16:creationId xmlns:a16="http://schemas.microsoft.com/office/drawing/2014/main" id="{33D0B294-C2CB-4935-9014-6D82FFD94D9F}"/>
               </a:ext>
             </a:extLst>
           </p:cNvPr>
@@ -9155,7 +9155,7 @@
           <p:cNvPr id="4" name="">
             <a:extLst xmlns:a="http://schemas.openxmlformats.org/drawingml/2006/main">
               <a:ext uri="{FF2B5EF4-FFF2-40B4-BE49-F238E27FC236}">
-                <a16:creationId xmlns:a16="http://schemas.microsoft.com/office/drawing/2014/main" id="{8E6C6B29-48E1-4606-804A-2CAEC21BA44D}"/>
+                <a16:creationId xmlns:a16="http://schemas.microsoft.com/office/drawing/2014/main" id="{F61A4027-5C7E-4805-9009-94191F34913C}"/>
               </a:ext>
             </a:extLst>
           </p:cNvPr>
@@ -9213,7 +9213,7 @@
           <p:cNvPr id="5" name="">
             <a:extLst xmlns:a="http://schemas.openxmlformats.org/drawingml/2006/main">
               <a:ext uri="{FF2B5EF4-FFF2-40B4-BE49-F238E27FC236}">
-                <a16:creationId xmlns:a16="http://schemas.microsoft.com/office/drawing/2014/main" id="{57CE63A5-775A-409E-9D36-586374EA2D0E}"/>
+                <a16:creationId xmlns:a16="http://schemas.microsoft.com/office/drawing/2014/main" id="{23AFC052-A7D5-4D2A-BF98-7A56A92B46CB}"/>
               </a:ext>
             </a:extLst>
           </p:cNvPr>
@@ -9275,7 +9275,7 @@
           <p:nvPr/>
         </p:nvPicPr>
         <p:blipFill>
-          <a:blip xmlns:r="http://schemas.openxmlformats.org/officeDocument/2006/relationships" xmlns:a="http://schemas.openxmlformats.org/drawingml/2006/main" r:embed="R3266b31f027a4d2c"/>
+          <a:blip xmlns:r="http://schemas.openxmlformats.org/officeDocument/2006/relationships" xmlns:a="http://schemas.openxmlformats.org/drawingml/2006/main" r:embed="Rcf8bece9cd194590"/>
           <a:stretch xmlns:a="http://schemas.openxmlformats.org/drawingml/2006/main"/>
         </p:blipFill>
         <p:spPr>
@@ -9293,7 +9293,7 @@
           <p:cNvPr id="7" name="">
             <a:extLst xmlns:a="http://schemas.openxmlformats.org/drawingml/2006/main">
               <a:ext uri="{FF2B5EF4-FFF2-40B4-BE49-F238E27FC236}">
-                <a16:creationId xmlns:a16="http://schemas.microsoft.com/office/drawing/2014/main" id="{A22B2833-B92F-4FB7-8474-EF4DB71BA7C2}"/>
+                <a16:creationId xmlns:a16="http://schemas.microsoft.com/office/drawing/2014/main" id="{CCFBA92B-7A8A-4FD3-A8F6-B3888CE984DF}"/>
               </a:ext>
             </a:extLst>
           </p:cNvPr>
@@ -9351,7 +9351,7 @@
           <p:cNvPr id="8" name="">
             <a:extLst xmlns:a="http://schemas.openxmlformats.org/drawingml/2006/main">
               <a:ext uri="{FF2B5EF4-FFF2-40B4-BE49-F238E27FC236}">
-                <a16:creationId xmlns:a16="http://schemas.microsoft.com/office/drawing/2014/main" id="{B8E7780A-EB1B-4451-A130-3A6F7C3EF0E0}"/>
+                <a16:creationId xmlns:a16="http://schemas.microsoft.com/office/drawing/2014/main" id="{83D9D158-64D6-40BC-9034-CCE3B6249951}"/>
               </a:ext>
             </a:extLst>
           </p:cNvPr>
@@ -9407,7 +9407,7 @@
     </p:spTree>
     <p:extLst>
       <p:ext uri="{BB962C8B-B14F-4D97-AF65-F5344CB8AC3E}">
-        <p14:creationId xmlns:p14="http://schemas.microsoft.com/office/powerpoint/2010/main" val="975614984"/>
+        <p14:creationId xmlns:p14="http://schemas.microsoft.com/office/powerpoint/2010/main" val="537492692"/>
       </p:ext>
     </p:extLst>
   </p:cSld>
@@ -9438,7 +9438,7 @@
           <p:cNvPr id="1" name="">
             <a:extLst xmlns:a="http://schemas.openxmlformats.org/drawingml/2006/main">
               <a:ext uri="{FF2B5EF4-FFF2-40B4-BE49-F238E27FC236}">
-                <a16:creationId xmlns:a16="http://schemas.microsoft.com/office/drawing/2014/main" id="{5C15989B-20C2-4B63-84C2-5B16BEC16529}"/>
+                <a16:creationId xmlns:a16="http://schemas.microsoft.com/office/drawing/2014/main" id="{165A8225-AC4F-45ED-9959-A7B85EAE29FC}"/>
               </a:ext>
             </a:extLst>
           </p:cNvPr>
@@ -9477,7 +9477,7 @@
           <p:nvPr/>
         </p:nvPicPr>
         <p:blipFill>
-          <a:blip xmlns:r="http://schemas.openxmlformats.org/officeDocument/2006/relationships" xmlns:a="http://schemas.openxmlformats.org/drawingml/2006/main" r:embed="R0270c43e1c144c34"/>
+          <a:blip xmlns:r="http://schemas.openxmlformats.org/officeDocument/2006/relationships" xmlns:a="http://schemas.openxmlformats.org/drawingml/2006/main" r:embed="R17bc6d13acfb487a"/>
           <a:stretch xmlns:a="http://schemas.openxmlformats.org/drawingml/2006/main"/>
         </p:blipFill>
         <p:spPr>
@@ -9495,7 +9495,7 @@
           <p:cNvPr id="3" name="">
             <a:extLst xmlns:a="http://schemas.openxmlformats.org/drawingml/2006/main">
               <a:ext uri="{FF2B5EF4-FFF2-40B4-BE49-F238E27FC236}">
-                <a16:creationId xmlns:a16="http://schemas.microsoft.com/office/drawing/2014/main" id="{9D56ED49-12A6-4609-A88E-7762CE2AA3C8}"/>
+                <a16:creationId xmlns:a16="http://schemas.microsoft.com/office/drawing/2014/main" id="{C2291F2D-87A6-4439-A2F5-8E532AAC541F}"/>
               </a:ext>
             </a:extLst>
           </p:cNvPr>
@@ -9533,14 +9533,14 @@
             <a:pPr algn="r">
               <a:defRPr sz="825" b="1">
                 <a:solidFill>
-                  <a:srgbClr val="0E1B3E"/>
+                  <a:srgbClr val="070F26"/>
                 </a:solidFill>
               </a:defRPr>
             </a:pPr>
             <a:r>
               <a:rPr sz="825" b="1">
                 <a:solidFill>
-                  <a:srgbClr val="0E1B3E"/>
+                  <a:srgbClr val="070F26"/>
                 </a:solidFill>
               </a:rPr>
               <a:t>NTT DATA UNIVERSITY</a:t>
@@ -9553,7 +9553,7 @@
           <p:cNvPr id="4" name="">
             <a:extLst xmlns:a="http://schemas.openxmlformats.org/drawingml/2006/main">
               <a:ext uri="{FF2B5EF4-FFF2-40B4-BE49-F238E27FC236}">
-                <a16:creationId xmlns:a16="http://schemas.microsoft.com/office/drawing/2014/main" id="{AC708347-43EB-4F51-ADB1-763FAB00360E}"/>
+                <a16:creationId xmlns:a16="http://schemas.microsoft.com/office/drawing/2014/main" id="{DAE021E2-0F89-4235-A3BA-C1939DF56EF8}"/>
               </a:ext>
             </a:extLst>
           </p:cNvPr>
@@ -9611,7 +9611,7 @@
           <p:cNvPr id="5" name="">
             <a:extLst xmlns:a="http://schemas.openxmlformats.org/drawingml/2006/main">
               <a:ext uri="{FF2B5EF4-FFF2-40B4-BE49-F238E27FC236}">
-                <a16:creationId xmlns:a16="http://schemas.microsoft.com/office/drawing/2014/main" id="{24E5D555-5C99-4F65-9A29-9921B4FA51B5}"/>
+                <a16:creationId xmlns:a16="http://schemas.microsoft.com/office/drawing/2014/main" id="{CBAC4B0B-C70D-47B4-9D71-56510A96B430}"/>
               </a:ext>
             </a:extLst>
           </p:cNvPr>
@@ -9669,7 +9669,7 @@
           <p:cNvPr id="6" name="">
             <a:extLst xmlns:a="http://schemas.openxmlformats.org/drawingml/2006/main">
               <a:ext uri="{FF2B5EF4-FFF2-40B4-BE49-F238E27FC236}">
-                <a16:creationId xmlns:a16="http://schemas.microsoft.com/office/drawing/2014/main" id="{917CA10D-C033-422C-8BC6-146D3CBD903A}"/>
+                <a16:creationId xmlns:a16="http://schemas.microsoft.com/office/drawing/2014/main" id="{EBE539B8-F4A2-445C-B3C3-5667386E2C49}"/>
               </a:ext>
             </a:extLst>
           </p:cNvPr>
@@ -9707,14 +9707,14 @@
             <a:pPr algn="r">
               <a:defRPr sz="675" b="1">
                 <a:solidFill>
-                  <a:srgbClr val="0E1B3E"/>
+                  <a:srgbClr val="070F26"/>
                 </a:solidFill>
               </a:defRPr>
             </a:pPr>
             <a:r>
               <a:rPr sz="675" b="1">
                 <a:solidFill>
-                  <a:srgbClr val="0E1B3E"/>
+                  <a:srgbClr val="070F26"/>
                 </a:solidFill>
               </a:rPr>
               <a:t>NTT DATA UNIVERSITY</a:t>
@@ -9727,7 +9727,7 @@
           <p:cNvPr id="7" name="">
             <a:extLst xmlns:a="http://schemas.openxmlformats.org/drawingml/2006/main">
               <a:ext uri="{FF2B5EF4-FFF2-40B4-BE49-F238E27FC236}">
-                <a16:creationId xmlns:a16="http://schemas.microsoft.com/office/drawing/2014/main" id="{A8BA63B6-D5E3-4D5F-BC96-CC788638A7F6}"/>
+                <a16:creationId xmlns:a16="http://schemas.microsoft.com/office/drawing/2014/main" id="{6366EF2F-728A-4228-A156-566CCF048D95}"/>
               </a:ext>
             </a:extLst>
           </p:cNvPr>
@@ -9785,7 +9785,7 @@
           <p:cNvPr id="8" name="">
             <a:extLst xmlns:a="http://schemas.openxmlformats.org/drawingml/2006/main">
               <a:ext uri="{FF2B5EF4-FFF2-40B4-BE49-F238E27FC236}">
-                <a16:creationId xmlns:a16="http://schemas.microsoft.com/office/drawing/2014/main" id="{3F3E48F0-5E75-4508-BC4A-D730B2005B8F}"/>
+                <a16:creationId xmlns:a16="http://schemas.microsoft.com/office/drawing/2014/main" id="{538A5008-98DE-455F-AD13-0C4EE3189772}"/>
               </a:ext>
             </a:extLst>
           </p:cNvPr>
@@ -9823,14 +9823,14 @@
             <a:pPr algn="l">
               <a:defRPr sz="2400" b="0">
                 <a:solidFill>
-                  <a:srgbClr val="0E1B3E"/>
+                  <a:srgbClr val="070F26"/>
                 </a:solidFill>
               </a:defRPr>
             </a:pPr>
             <a:r>
               <a:rPr sz="2400" b="0">
                 <a:solidFill>
-                  <a:srgbClr val="0E1B3E"/>
+                  <a:srgbClr val="070F26"/>
                 </a:solidFill>
               </a:rPr>
               <a:t>O que vamos fazer hoje</a:t>
@@ -9843,7 +9843,7 @@
           <p:cNvPr id="9" name="">
             <a:extLst xmlns:a="http://schemas.openxmlformats.org/drawingml/2006/main">
               <a:ext uri="{FF2B5EF4-FFF2-40B4-BE49-F238E27FC236}">
-                <a16:creationId xmlns:a16="http://schemas.microsoft.com/office/drawing/2014/main" id="{D7FDEDF1-B060-485B-83E5-03183EA135FD}"/>
+                <a16:creationId xmlns:a16="http://schemas.microsoft.com/office/drawing/2014/main" id="{3194CC0B-14BF-4414-A582-CA5C9A9FC6BF}"/>
               </a:ext>
             </a:extLst>
           </p:cNvPr>
@@ -9901,7 +9901,7 @@
           <p:cNvPr id="10" name="">
             <a:extLst xmlns:a="http://schemas.openxmlformats.org/drawingml/2006/main">
               <a:ext uri="{FF2B5EF4-FFF2-40B4-BE49-F238E27FC236}">
-                <a16:creationId xmlns:a16="http://schemas.microsoft.com/office/drawing/2014/main" id="{73B28241-A390-4304-A2BC-BFE83C1D9774}"/>
+                <a16:creationId xmlns:a16="http://schemas.microsoft.com/office/drawing/2014/main" id="{6071925E-F4BA-42F9-958A-CB92241472F9}"/>
               </a:ext>
             </a:extLst>
           </p:cNvPr>
@@ -9934,7 +9934,7 @@
           <p:cNvPr id="11" name="">
             <a:extLst xmlns:a="http://schemas.openxmlformats.org/drawingml/2006/main">
               <a:ext uri="{FF2B5EF4-FFF2-40B4-BE49-F238E27FC236}">
-                <a16:creationId xmlns:a16="http://schemas.microsoft.com/office/drawing/2014/main" id="{E6291C80-4AB0-43FE-90CC-78465938F996}"/>
+                <a16:creationId xmlns:a16="http://schemas.microsoft.com/office/drawing/2014/main" id="{2DC6EDB2-338B-4311-884B-91BEF4B09A42}"/>
               </a:ext>
             </a:extLst>
           </p:cNvPr>
@@ -9969,7 +9969,7 @@
           <p:cNvPr id="12" name="">
             <a:extLst xmlns:a="http://schemas.openxmlformats.org/drawingml/2006/main">
               <a:ext uri="{FF2B5EF4-FFF2-40B4-BE49-F238E27FC236}">
-                <a16:creationId xmlns:a16="http://schemas.microsoft.com/office/drawing/2014/main" id="{12263E1D-1DAF-4C6D-BEF0-52875683052B}"/>
+                <a16:creationId xmlns:a16="http://schemas.microsoft.com/office/drawing/2014/main" id="{B33BDEBC-C06F-42C6-A6D0-AD0A59455658}"/>
               </a:ext>
             </a:extLst>
           </p:cNvPr>
@@ -10027,7 +10027,7 @@
           <p:cNvPr id="13" name="">
             <a:extLst xmlns:a="http://schemas.openxmlformats.org/drawingml/2006/main">
               <a:ext uri="{FF2B5EF4-FFF2-40B4-BE49-F238E27FC236}">
-                <a16:creationId xmlns:a16="http://schemas.microsoft.com/office/drawing/2014/main" id="{9205F08C-EF94-4BF7-8596-D484B6776631}"/>
+                <a16:creationId xmlns:a16="http://schemas.microsoft.com/office/drawing/2014/main" id="{D8BEB413-7C54-4713-87DC-88DD344EF51C}"/>
               </a:ext>
             </a:extLst>
           </p:cNvPr>
@@ -10102,7 +10102,7 @@
           <p:cNvPr id="14" name="">
             <a:extLst xmlns:a="http://schemas.openxmlformats.org/drawingml/2006/main">
               <a:ext uri="{FF2B5EF4-FFF2-40B4-BE49-F238E27FC236}">
-                <a16:creationId xmlns:a16="http://schemas.microsoft.com/office/drawing/2014/main" id="{8091F876-01A2-4A7B-A432-ACE6CD7307EC}"/>
+                <a16:creationId xmlns:a16="http://schemas.microsoft.com/office/drawing/2014/main" id="{CEF9006F-CB70-44E1-9E0E-1F1D1847EECF}"/>
               </a:ext>
             </a:extLst>
           </p:cNvPr>
@@ -10135,7 +10135,7 @@
           <p:cNvPr id="15" name="">
             <a:extLst xmlns:a="http://schemas.openxmlformats.org/drawingml/2006/main">
               <a:ext uri="{FF2B5EF4-FFF2-40B4-BE49-F238E27FC236}">
-                <a16:creationId xmlns:a16="http://schemas.microsoft.com/office/drawing/2014/main" id="{B0542B49-6EAC-4775-85C0-64B527DDA676}"/>
+                <a16:creationId xmlns:a16="http://schemas.microsoft.com/office/drawing/2014/main" id="{BFB39097-3728-4AC1-8AE3-7395F750EF9F}"/>
               </a:ext>
             </a:extLst>
           </p:cNvPr>
@@ -10170,7 +10170,7 @@
           <p:cNvPr id="16" name="">
             <a:extLst xmlns:a="http://schemas.openxmlformats.org/drawingml/2006/main">
               <a:ext uri="{FF2B5EF4-FFF2-40B4-BE49-F238E27FC236}">
-                <a16:creationId xmlns:a16="http://schemas.microsoft.com/office/drawing/2014/main" id="{16098BB2-2608-404F-8783-98C8E0CA830E}"/>
+                <a16:creationId xmlns:a16="http://schemas.microsoft.com/office/drawing/2014/main" id="{2F1AF99F-AF6A-4496-8D6B-3F5B92387078}"/>
               </a:ext>
             </a:extLst>
           </p:cNvPr>
@@ -10228,7 +10228,7 @@
           <p:cNvPr id="17" name="">
             <a:extLst xmlns:a="http://schemas.openxmlformats.org/drawingml/2006/main">
               <a:ext uri="{FF2B5EF4-FFF2-40B4-BE49-F238E27FC236}">
-                <a16:creationId xmlns:a16="http://schemas.microsoft.com/office/drawing/2014/main" id="{150ADFC6-81DC-43B5-931A-9019C4895AB3}"/>
+                <a16:creationId xmlns:a16="http://schemas.microsoft.com/office/drawing/2014/main" id="{52BFCE5C-7CE4-4988-83E5-ED0EBF0A1F10}"/>
               </a:ext>
             </a:extLst>
           </p:cNvPr>
@@ -10320,7 +10320,7 @@
           <p:cNvPr id="18" name="">
             <a:extLst xmlns:a="http://schemas.openxmlformats.org/drawingml/2006/main">
               <a:ext uri="{FF2B5EF4-FFF2-40B4-BE49-F238E27FC236}">
-                <a16:creationId xmlns:a16="http://schemas.microsoft.com/office/drawing/2014/main" id="{1FAFC6D3-73DD-4C86-A824-18584D52EA50}"/>
+                <a16:creationId xmlns:a16="http://schemas.microsoft.com/office/drawing/2014/main" id="{99CF4E77-70ED-43D4-AEE4-4197F2E4B7AE}"/>
               </a:ext>
             </a:extLst>
           </p:cNvPr>
@@ -10353,7 +10353,7 @@
           <p:cNvPr id="19" name="">
             <a:extLst xmlns:a="http://schemas.openxmlformats.org/drawingml/2006/main">
               <a:ext uri="{FF2B5EF4-FFF2-40B4-BE49-F238E27FC236}">
-                <a16:creationId xmlns:a16="http://schemas.microsoft.com/office/drawing/2014/main" id="{2AEAFD81-B1FC-4671-910A-3D32EA025018}"/>
+                <a16:creationId xmlns:a16="http://schemas.microsoft.com/office/drawing/2014/main" id="{B0655484-4ECA-4B61-A941-C301D34581D0}"/>
               </a:ext>
             </a:extLst>
           </p:cNvPr>
@@ -10388,7 +10388,7 @@
           <p:cNvPr id="20" name="">
             <a:extLst xmlns:a="http://schemas.openxmlformats.org/drawingml/2006/main">
               <a:ext uri="{FF2B5EF4-FFF2-40B4-BE49-F238E27FC236}">
-                <a16:creationId xmlns:a16="http://schemas.microsoft.com/office/drawing/2014/main" id="{F0ACDDB4-C0BC-4C10-9088-6C68E663EEA1}"/>
+                <a16:creationId xmlns:a16="http://schemas.microsoft.com/office/drawing/2014/main" id="{C1797A04-AAFA-469E-BF4B-91C5F0B24DD4}"/>
               </a:ext>
             </a:extLst>
           </p:cNvPr>
@@ -10446,7 +10446,7 @@
           <p:cNvPr id="21" name="">
             <a:extLst xmlns:a="http://schemas.openxmlformats.org/drawingml/2006/main">
               <a:ext uri="{FF2B5EF4-FFF2-40B4-BE49-F238E27FC236}">
-                <a16:creationId xmlns:a16="http://schemas.microsoft.com/office/drawing/2014/main" id="{C6DB5A0C-4A29-4B56-BB4C-07C1DB682021}"/>
+                <a16:creationId xmlns:a16="http://schemas.microsoft.com/office/drawing/2014/main" id="{7D395523-C00A-4062-99C0-9F0F78B5BE2C}"/>
               </a:ext>
             </a:extLst>
           </p:cNvPr>
@@ -10536,7 +10536,7 @@
     </p:spTree>
     <p:extLst>
       <p:ext uri="{BB962C8B-B14F-4D97-AF65-F5344CB8AC3E}">
-        <p14:creationId xmlns:p14="http://schemas.microsoft.com/office/powerpoint/2010/main" val="849182380"/>
+        <p14:creationId xmlns:p14="http://schemas.microsoft.com/office/powerpoint/2010/main" val="815845895"/>
       </p:ext>
     </p:extLst>
   </p:cSld>
@@ -10549,7 +10549,7 @@
     <p:bg>
       <p:bgPr>
         <a:solidFill xmlns:a="http://schemas.openxmlformats.org/drawingml/2006/main">
-          <a:srgbClr val="0E1B3E"/>
+          <a:srgbClr val="070F26"/>
         </a:solidFill>
       </p:bgPr>
     </p:bg>
@@ -10567,7 +10567,7 @@
           <p:cNvPr id="1" name="">
             <a:extLst xmlns:a="http://schemas.openxmlformats.org/drawingml/2006/main">
               <a:ext uri="{FF2B5EF4-FFF2-40B4-BE49-F238E27FC236}">
-                <a16:creationId xmlns:a16="http://schemas.microsoft.com/office/drawing/2014/main" id="{1373AC96-53E7-4C48-8E09-C1EDB1299285}"/>
+                <a16:creationId xmlns:a16="http://schemas.microsoft.com/office/drawing/2014/main" id="{CFEE9CAF-CEF0-4589-B593-2F4D7F150732}"/>
               </a:ext>
             </a:extLst>
           </p:cNvPr>
@@ -10585,7 +10585,7 @@
             <a:avLst/>
           </a:prstGeom>
           <a:solidFill xmlns:a="http://schemas.openxmlformats.org/drawingml/2006/main">
-            <a:srgbClr val="0E1B3E"/>
+            <a:srgbClr val="070F26"/>
           </a:solidFill>
           <a:ln xmlns:a="http://schemas.openxmlformats.org/drawingml/2006/main" w="0">
             <a:solidFill>
@@ -10606,7 +10606,7 @@
           <p:nvPr/>
         </p:nvPicPr>
         <p:blipFill>
-          <a:blip xmlns:r="http://schemas.openxmlformats.org/officeDocument/2006/relationships" xmlns:a="http://schemas.openxmlformats.org/drawingml/2006/main" r:embed="Rc8ae1bc5901e4362"/>
+          <a:blip xmlns:r="http://schemas.openxmlformats.org/officeDocument/2006/relationships" xmlns:a="http://schemas.openxmlformats.org/drawingml/2006/main" r:embed="Rd1bbf2de872f4aef"/>
           <a:stretch xmlns:a="http://schemas.openxmlformats.org/drawingml/2006/main"/>
         </p:blipFill>
         <p:spPr>
@@ -10624,7 +10624,7 @@
           <p:cNvPr id="3" name="">
             <a:extLst xmlns:a="http://schemas.openxmlformats.org/drawingml/2006/main">
               <a:ext uri="{FF2B5EF4-FFF2-40B4-BE49-F238E27FC236}">
-                <a16:creationId xmlns:a16="http://schemas.microsoft.com/office/drawing/2014/main" id="{296A6E7B-F1D5-471F-953F-D2C5F7B7DCE2}"/>
+                <a16:creationId xmlns:a16="http://schemas.microsoft.com/office/drawing/2014/main" id="{19C145C7-FBF5-4018-BABA-71D3058E3F81}"/>
               </a:ext>
             </a:extLst>
           </p:cNvPr>
@@ -10682,7 +10682,7 @@
           <p:cNvPr id="4" name="">
             <a:extLst xmlns:a="http://schemas.openxmlformats.org/drawingml/2006/main">
               <a:ext uri="{FF2B5EF4-FFF2-40B4-BE49-F238E27FC236}">
-                <a16:creationId xmlns:a16="http://schemas.microsoft.com/office/drawing/2014/main" id="{8439B1F9-4095-47BE-AFA8-7AE4CFF607F9}"/>
+                <a16:creationId xmlns:a16="http://schemas.microsoft.com/office/drawing/2014/main" id="{9442EC36-655B-44EA-9114-E0036B7CB5C6}"/>
               </a:ext>
             </a:extLst>
           </p:cNvPr>
@@ -10740,7 +10740,7 @@
           <p:cNvPr id="5" name="">
             <a:extLst xmlns:a="http://schemas.openxmlformats.org/drawingml/2006/main">
               <a:ext uri="{FF2B5EF4-FFF2-40B4-BE49-F238E27FC236}">
-                <a16:creationId xmlns:a16="http://schemas.microsoft.com/office/drawing/2014/main" id="{36D94F99-40D3-4D17-B33B-A0807CD552F4}"/>
+                <a16:creationId xmlns:a16="http://schemas.microsoft.com/office/drawing/2014/main" id="{7BEEDD5B-0AB7-4997-9CF7-604FD43A08D1}"/>
               </a:ext>
             </a:extLst>
           </p:cNvPr>
@@ -10798,7 +10798,7 @@
           <p:cNvPr id="6" name="">
             <a:extLst xmlns:a="http://schemas.openxmlformats.org/drawingml/2006/main">
               <a:ext uri="{FF2B5EF4-FFF2-40B4-BE49-F238E27FC236}">
-                <a16:creationId xmlns:a16="http://schemas.microsoft.com/office/drawing/2014/main" id="{BD16FAF2-5AC6-433C-8AFC-A8615D2F4D5E}"/>
+                <a16:creationId xmlns:a16="http://schemas.microsoft.com/office/drawing/2014/main" id="{1AFA33C8-7455-43A7-A7E5-16260547F002}"/>
               </a:ext>
             </a:extLst>
           </p:cNvPr>
@@ -10860,13 +10860,13 @@
           <p:nvPr/>
         </p:nvPicPr>
         <p:blipFill>
-          <a:blip xmlns:r="http://schemas.openxmlformats.org/officeDocument/2006/relationships" xmlns:a="http://schemas.openxmlformats.org/drawingml/2006/main" r:embed="R06c35545c0864128"/>
+          <a:blip xmlns:r="http://schemas.openxmlformats.org/officeDocument/2006/relationships" xmlns:a="http://schemas.openxmlformats.org/drawingml/2006/main" r:embed="R1c9072ec7dbb4421"/>
           <a:stretch xmlns:a="http://schemas.openxmlformats.org/drawingml/2006/main"/>
         </p:blipFill>
         <p:spPr>
           <a:xfrm xmlns:a="http://schemas.openxmlformats.org/drawingml/2006/main">
-            <a:off x="476250" y="1257300"/>
-            <a:ext cx="2667000" cy="4533900"/>
+            <a:off x="0" y="1746250"/>
+            <a:ext cx="2667000" cy="3556000"/>
           </a:xfrm>
           <a:prstGeom xmlns:a="http://schemas.openxmlformats.org/drawingml/2006/main" prst="rect">
             <a:avLst/>
@@ -10878,7 +10878,7 @@
           <p:cNvPr id="8" name="">
             <a:extLst xmlns:a="http://schemas.openxmlformats.org/drawingml/2006/main">
               <a:ext uri="{FF2B5EF4-FFF2-40B4-BE49-F238E27FC236}">
-                <a16:creationId xmlns:a16="http://schemas.microsoft.com/office/drawing/2014/main" id="{7FBFABB1-6D59-4E1E-B536-B8208D73DA2B}"/>
+                <a16:creationId xmlns:a16="http://schemas.microsoft.com/office/drawing/2014/main" id="{D7E3A9CE-B56D-47AE-AC0B-E1F1360F96B8}"/>
               </a:ext>
             </a:extLst>
           </p:cNvPr>
@@ -10936,7 +10936,7 @@
           <p:cNvPr id="9" name="">
             <a:extLst xmlns:a="http://schemas.openxmlformats.org/drawingml/2006/main">
               <a:ext uri="{FF2B5EF4-FFF2-40B4-BE49-F238E27FC236}">
-                <a16:creationId xmlns:a16="http://schemas.microsoft.com/office/drawing/2014/main" id="{982E8B16-747A-400D-8EFF-0206ECC9BAAB}"/>
+                <a16:creationId xmlns:a16="http://schemas.microsoft.com/office/drawing/2014/main" id="{6394D97E-1C60-411F-A80D-D20A364F7125}"/>
               </a:ext>
             </a:extLst>
           </p:cNvPr>
@@ -10994,7 +10994,7 @@
           <p:cNvPr id="10" name="">
             <a:extLst xmlns:a="http://schemas.openxmlformats.org/drawingml/2006/main">
               <a:ext uri="{FF2B5EF4-FFF2-40B4-BE49-F238E27FC236}">
-                <a16:creationId xmlns:a16="http://schemas.microsoft.com/office/drawing/2014/main" id="{208818E0-3EB3-4930-84ED-E8A716408055}"/>
+                <a16:creationId xmlns:a16="http://schemas.microsoft.com/office/drawing/2014/main" id="{379A0E62-8192-4D24-988E-582428FFCA80}"/>
               </a:ext>
             </a:extLst>
           </p:cNvPr>
@@ -11050,7 +11050,7 @@
     </p:spTree>
     <p:extLst>
       <p:ext uri="{BB962C8B-B14F-4D97-AF65-F5344CB8AC3E}">
-        <p14:creationId xmlns:p14="http://schemas.microsoft.com/office/powerpoint/2010/main" val="393527786"/>
+        <p14:creationId xmlns:p14="http://schemas.microsoft.com/office/powerpoint/2010/main" val="1857522626"/>
       </p:ext>
     </p:extLst>
   </p:cSld>
@@ -11081,7 +11081,7 @@
           <p:cNvPr id="1" name="">
             <a:extLst xmlns:a="http://schemas.openxmlformats.org/drawingml/2006/main">
               <a:ext uri="{FF2B5EF4-FFF2-40B4-BE49-F238E27FC236}">
-                <a16:creationId xmlns:a16="http://schemas.microsoft.com/office/drawing/2014/main" id="{F290DD2D-4A26-4C18-9384-C57E2604DF99}"/>
+                <a16:creationId xmlns:a16="http://schemas.microsoft.com/office/drawing/2014/main" id="{37E84DA3-F73B-445D-8B09-BACA97E6924F}"/>
               </a:ext>
             </a:extLst>
           </p:cNvPr>
@@ -11120,7 +11120,7 @@
           <p:nvPr/>
         </p:nvPicPr>
         <p:blipFill>
-          <a:blip xmlns:r="http://schemas.openxmlformats.org/officeDocument/2006/relationships" xmlns:a="http://schemas.openxmlformats.org/drawingml/2006/main" r:embed="Rcbb84e8704844610"/>
+          <a:blip xmlns:r="http://schemas.openxmlformats.org/officeDocument/2006/relationships" xmlns:a="http://schemas.openxmlformats.org/drawingml/2006/main" r:embed="Rcfc5520a3d9542b5"/>
           <a:stretch xmlns:a="http://schemas.openxmlformats.org/drawingml/2006/main"/>
         </p:blipFill>
         <p:spPr>
@@ -11138,7 +11138,7 @@
           <p:cNvPr id="3" name="">
             <a:extLst xmlns:a="http://schemas.openxmlformats.org/drawingml/2006/main">
               <a:ext uri="{FF2B5EF4-FFF2-40B4-BE49-F238E27FC236}">
-                <a16:creationId xmlns:a16="http://schemas.microsoft.com/office/drawing/2014/main" id="{05DB6AE0-72A0-4C9E-B9C5-4CF2CEAF1F73}"/>
+                <a16:creationId xmlns:a16="http://schemas.microsoft.com/office/drawing/2014/main" id="{6C222063-B7B4-4054-8A1C-45C618034DD8}"/>
               </a:ext>
             </a:extLst>
           </p:cNvPr>
@@ -11176,14 +11176,14 @@
             <a:pPr algn="r">
               <a:defRPr sz="825" b="1">
                 <a:solidFill>
-                  <a:srgbClr val="0E1B3E"/>
+                  <a:srgbClr val="070F26"/>
                 </a:solidFill>
               </a:defRPr>
             </a:pPr>
             <a:r>
               <a:rPr sz="825" b="1">
                 <a:solidFill>
-                  <a:srgbClr val="0E1B3E"/>
+                  <a:srgbClr val="070F26"/>
                 </a:solidFill>
               </a:rPr>
               <a:t>NTT DATA UNIVERSITY</a:t>
@@ -11196,7 +11196,7 @@
           <p:cNvPr id="4" name="">
             <a:extLst xmlns:a="http://schemas.openxmlformats.org/drawingml/2006/main">
               <a:ext uri="{FF2B5EF4-FFF2-40B4-BE49-F238E27FC236}">
-                <a16:creationId xmlns:a16="http://schemas.microsoft.com/office/drawing/2014/main" id="{016EC7F3-7CCB-4899-B364-CC6C10F9EC42}"/>
+                <a16:creationId xmlns:a16="http://schemas.microsoft.com/office/drawing/2014/main" id="{677D6730-C70B-4CB2-A99A-F8EE20434E51}"/>
               </a:ext>
             </a:extLst>
           </p:cNvPr>
@@ -11254,7 +11254,7 @@
           <p:cNvPr id="5" name="">
             <a:extLst xmlns:a="http://schemas.openxmlformats.org/drawingml/2006/main">
               <a:ext uri="{FF2B5EF4-FFF2-40B4-BE49-F238E27FC236}">
-                <a16:creationId xmlns:a16="http://schemas.microsoft.com/office/drawing/2014/main" id="{F46916BF-84CD-457E-9C43-2C28CE92D926}"/>
+                <a16:creationId xmlns:a16="http://schemas.microsoft.com/office/drawing/2014/main" id="{A6439E0C-6274-4B9A-93FF-45CAABD5B549}"/>
               </a:ext>
             </a:extLst>
           </p:cNvPr>
@@ -11312,7 +11312,7 @@
           <p:cNvPr id="6" name="">
             <a:extLst xmlns:a="http://schemas.openxmlformats.org/drawingml/2006/main">
               <a:ext uri="{FF2B5EF4-FFF2-40B4-BE49-F238E27FC236}">
-                <a16:creationId xmlns:a16="http://schemas.microsoft.com/office/drawing/2014/main" id="{1EDDA74A-CB41-438D-874A-01E45531AA33}"/>
+                <a16:creationId xmlns:a16="http://schemas.microsoft.com/office/drawing/2014/main" id="{B294A1FF-7AE6-427C-A6CE-6EF5B175B3B1}"/>
               </a:ext>
             </a:extLst>
           </p:cNvPr>
@@ -11350,14 +11350,14 @@
             <a:pPr algn="r">
               <a:defRPr sz="675" b="1">
                 <a:solidFill>
-                  <a:srgbClr val="0E1B3E"/>
+                  <a:srgbClr val="070F26"/>
                 </a:solidFill>
               </a:defRPr>
             </a:pPr>
             <a:r>
               <a:rPr sz="675" b="1">
                 <a:solidFill>
-                  <a:srgbClr val="0E1B3E"/>
+                  <a:srgbClr val="070F26"/>
                 </a:solidFill>
               </a:rPr>
               <a:t>NTT DATA UNIVERSITY</a:t>
@@ -11370,7 +11370,7 @@
           <p:cNvPr id="7" name="">
             <a:extLst xmlns:a="http://schemas.openxmlformats.org/drawingml/2006/main">
               <a:ext uri="{FF2B5EF4-FFF2-40B4-BE49-F238E27FC236}">
-                <a16:creationId xmlns:a16="http://schemas.microsoft.com/office/drawing/2014/main" id="{458D2845-4E0F-4463-BD5E-422F32EFA1AB}"/>
+                <a16:creationId xmlns:a16="http://schemas.microsoft.com/office/drawing/2014/main" id="{1B71F099-2130-43A1-A0AB-46C29E2B8502}"/>
               </a:ext>
             </a:extLst>
           </p:cNvPr>
@@ -11428,7 +11428,7 @@
           <p:cNvPr id="8" name="">
             <a:extLst xmlns:a="http://schemas.openxmlformats.org/drawingml/2006/main">
               <a:ext uri="{FF2B5EF4-FFF2-40B4-BE49-F238E27FC236}">
-                <a16:creationId xmlns:a16="http://schemas.microsoft.com/office/drawing/2014/main" id="{20F44E24-0164-4045-890F-8166BC8AC832}"/>
+                <a16:creationId xmlns:a16="http://schemas.microsoft.com/office/drawing/2014/main" id="{85F5CB17-EA77-4A8D-8AB6-1C4A89E3B2B4}"/>
               </a:ext>
             </a:extLst>
           </p:cNvPr>
@@ -11466,14 +11466,14 @@
             <a:pPr algn="l">
               <a:defRPr sz="2400" b="0">
                 <a:solidFill>
-                  <a:srgbClr val="0E1B3E"/>
+                  <a:srgbClr val="070F26"/>
                 </a:solidFill>
               </a:defRPr>
             </a:pPr>
             <a:r>
               <a:rPr sz="2400" b="0">
                 <a:solidFill>
-                  <a:srgbClr val="0E1B3E"/>
+                  <a:srgbClr val="070F26"/>
                 </a:solidFill>
               </a:rPr>
               <a:t>Pontos que costumam gerar confusão</a:t>
@@ -11486,7 +11486,7 @@
           <p:cNvPr id="9" name="">
             <a:extLst xmlns:a="http://schemas.openxmlformats.org/drawingml/2006/main">
               <a:ext uri="{FF2B5EF4-FFF2-40B4-BE49-F238E27FC236}">
-                <a16:creationId xmlns:a16="http://schemas.microsoft.com/office/drawing/2014/main" id="{827E3A97-296E-4AAC-8EC0-B2B41D726D19}"/>
+                <a16:creationId xmlns:a16="http://schemas.microsoft.com/office/drawing/2014/main" id="{2EC49E02-6149-4C34-934C-16A0D1D1B4A8}"/>
               </a:ext>
             </a:extLst>
           </p:cNvPr>
@@ -11544,7 +11544,7 @@
           <p:cNvPr id="10" name="">
             <a:extLst xmlns:a="http://schemas.openxmlformats.org/drawingml/2006/main">
               <a:ext uri="{FF2B5EF4-FFF2-40B4-BE49-F238E27FC236}">
-                <a16:creationId xmlns:a16="http://schemas.microsoft.com/office/drawing/2014/main" id="{BDE123BB-DBAE-4B1B-9622-D96677B4FCEE}"/>
+                <a16:creationId xmlns:a16="http://schemas.microsoft.com/office/drawing/2014/main" id="{D18EB11F-A0C7-4EFA-BFA7-666A765E3C30}"/>
               </a:ext>
             </a:extLst>
           </p:cNvPr>
@@ -11577,7 +11577,7 @@
           <p:cNvPr id="11" name="">
             <a:extLst xmlns:a="http://schemas.openxmlformats.org/drawingml/2006/main">
               <a:ext uri="{FF2B5EF4-FFF2-40B4-BE49-F238E27FC236}">
-                <a16:creationId xmlns:a16="http://schemas.microsoft.com/office/drawing/2014/main" id="{598E02AE-82D3-44C9-A891-F6662E6670A1}"/>
+                <a16:creationId xmlns:a16="http://schemas.microsoft.com/office/drawing/2014/main" id="{11D8C2BB-4498-4065-8D57-72A369F6FF4D}"/>
               </a:ext>
             </a:extLst>
           </p:cNvPr>
@@ -11612,7 +11612,7 @@
           <p:cNvPr id="12" name="">
             <a:extLst xmlns:a="http://schemas.openxmlformats.org/drawingml/2006/main">
               <a:ext uri="{FF2B5EF4-FFF2-40B4-BE49-F238E27FC236}">
-                <a16:creationId xmlns:a16="http://schemas.microsoft.com/office/drawing/2014/main" id="{4C171E03-7603-4636-8F66-3EB61CDCBA4C}"/>
+                <a16:creationId xmlns:a16="http://schemas.microsoft.com/office/drawing/2014/main" id="{5FD8DBFC-D2EB-42FE-B0FC-ED8750D57565}"/>
               </a:ext>
             </a:extLst>
           </p:cNvPr>
@@ -11670,7 +11670,7 @@
           <p:cNvPr id="13" name="">
             <a:extLst xmlns:a="http://schemas.openxmlformats.org/drawingml/2006/main">
               <a:ext uri="{FF2B5EF4-FFF2-40B4-BE49-F238E27FC236}">
-                <a16:creationId xmlns:a16="http://schemas.microsoft.com/office/drawing/2014/main" id="{AAECB414-2F68-45FD-BC78-2AA470C2EB41}"/>
+                <a16:creationId xmlns:a16="http://schemas.microsoft.com/office/drawing/2014/main" id="{FE9129AA-2489-4F82-8BD2-04A492876C0C}"/>
               </a:ext>
             </a:extLst>
           </p:cNvPr>
@@ -11813,7 +11813,7 @@
           <p:cNvPr id="14" name="">
             <a:extLst xmlns:a="http://schemas.openxmlformats.org/drawingml/2006/main">
               <a:ext uri="{FF2B5EF4-FFF2-40B4-BE49-F238E27FC236}">
-                <a16:creationId xmlns:a16="http://schemas.microsoft.com/office/drawing/2014/main" id="{BE440E7A-CE99-4B47-BACB-562196F16248}"/>
+                <a16:creationId xmlns:a16="http://schemas.microsoft.com/office/drawing/2014/main" id="{40484E2C-E5D7-4E19-ADC5-69DDCB0B8300}"/>
               </a:ext>
             </a:extLst>
           </p:cNvPr>
@@ -11846,7 +11846,7 @@
           <p:cNvPr id="15" name="">
             <a:extLst xmlns:a="http://schemas.openxmlformats.org/drawingml/2006/main">
               <a:ext uri="{FF2B5EF4-FFF2-40B4-BE49-F238E27FC236}">
-                <a16:creationId xmlns:a16="http://schemas.microsoft.com/office/drawing/2014/main" id="{77D859C4-9BBD-4677-84B8-2E22761AD38F}"/>
+                <a16:creationId xmlns:a16="http://schemas.microsoft.com/office/drawing/2014/main" id="{532D23B9-3091-48A2-BB60-722C5FAAFC40}"/>
               </a:ext>
             </a:extLst>
           </p:cNvPr>
@@ -11881,7 +11881,7 @@
           <p:cNvPr id="16" name="">
             <a:extLst xmlns:a="http://schemas.openxmlformats.org/drawingml/2006/main">
               <a:ext uri="{FF2B5EF4-FFF2-40B4-BE49-F238E27FC236}">
-                <a16:creationId xmlns:a16="http://schemas.microsoft.com/office/drawing/2014/main" id="{B6CE6224-9E1F-49DC-91E7-3B5407D718D1}"/>
+                <a16:creationId xmlns:a16="http://schemas.microsoft.com/office/drawing/2014/main" id="{CE245F82-84C6-42EB-8A7D-39E38A26EE15}"/>
               </a:ext>
             </a:extLst>
           </p:cNvPr>
@@ -11939,7 +11939,7 @@
           <p:cNvPr id="17" name="">
             <a:extLst xmlns:a="http://schemas.openxmlformats.org/drawingml/2006/main">
               <a:ext uri="{FF2B5EF4-FFF2-40B4-BE49-F238E27FC236}">
-                <a16:creationId xmlns:a16="http://schemas.microsoft.com/office/drawing/2014/main" id="{65AA797D-BED5-477E-A963-AC06FA1DEBD8}"/>
+                <a16:creationId xmlns:a16="http://schemas.microsoft.com/office/drawing/2014/main" id="{0D1731EE-6257-49B7-8067-EDD6E9663103}"/>
               </a:ext>
             </a:extLst>
           </p:cNvPr>
@@ -12065,7 +12065,7 @@
           <p:cNvPr id="18" name="">
             <a:extLst xmlns:a="http://schemas.openxmlformats.org/drawingml/2006/main">
               <a:ext uri="{FF2B5EF4-FFF2-40B4-BE49-F238E27FC236}">
-                <a16:creationId xmlns:a16="http://schemas.microsoft.com/office/drawing/2014/main" id="{A9083B3C-73F3-429D-837A-D4DB2570CF7A}"/>
+                <a16:creationId xmlns:a16="http://schemas.microsoft.com/office/drawing/2014/main" id="{56BA1582-4480-4583-8727-9361285E70A5}"/>
               </a:ext>
             </a:extLst>
           </p:cNvPr>
@@ -12098,7 +12098,7 @@
           <p:cNvPr id="19" name="">
             <a:extLst xmlns:a="http://schemas.openxmlformats.org/drawingml/2006/main">
               <a:ext uri="{FF2B5EF4-FFF2-40B4-BE49-F238E27FC236}">
-                <a16:creationId xmlns:a16="http://schemas.microsoft.com/office/drawing/2014/main" id="{69809C20-1CF1-4654-B251-919074F45634}"/>
+                <a16:creationId xmlns:a16="http://schemas.microsoft.com/office/drawing/2014/main" id="{C1C33E8C-DACA-4478-9858-91C559D676C1}"/>
               </a:ext>
             </a:extLst>
           </p:cNvPr>
@@ -12133,7 +12133,7 @@
           <p:cNvPr id="20" name="">
             <a:extLst xmlns:a="http://schemas.openxmlformats.org/drawingml/2006/main">
               <a:ext uri="{FF2B5EF4-FFF2-40B4-BE49-F238E27FC236}">
-                <a16:creationId xmlns:a16="http://schemas.microsoft.com/office/drawing/2014/main" id="{E58DDEC8-489B-40AE-ABCB-B2626C44BEF3}"/>
+                <a16:creationId xmlns:a16="http://schemas.microsoft.com/office/drawing/2014/main" id="{FE36380E-CBF0-441B-BF92-C86D89DBD240}"/>
               </a:ext>
             </a:extLst>
           </p:cNvPr>
@@ -12191,7 +12191,7 @@
           <p:cNvPr id="21" name="">
             <a:extLst xmlns:a="http://schemas.openxmlformats.org/drawingml/2006/main">
               <a:ext uri="{FF2B5EF4-FFF2-40B4-BE49-F238E27FC236}">
-                <a16:creationId xmlns:a16="http://schemas.microsoft.com/office/drawing/2014/main" id="{448B66A5-EB47-4B41-8C20-E2FBFBD578AA}"/>
+                <a16:creationId xmlns:a16="http://schemas.microsoft.com/office/drawing/2014/main" id="{53794585-D81A-46AE-BA39-BDBBBC4B1C9A}"/>
               </a:ext>
             </a:extLst>
           </p:cNvPr>
@@ -12315,7 +12315,7 @@
     </p:spTree>
     <p:extLst>
       <p:ext uri="{BB962C8B-B14F-4D97-AF65-F5344CB8AC3E}">
-        <p14:creationId xmlns:p14="http://schemas.microsoft.com/office/powerpoint/2010/main" val="305638255"/>
+        <p14:creationId xmlns:p14="http://schemas.microsoft.com/office/powerpoint/2010/main" val="1450750736"/>
       </p:ext>
     </p:extLst>
   </p:cSld>
@@ -12328,7 +12328,7 @@
     <p:bg>
       <p:bgPr>
         <a:solidFill xmlns:a="http://schemas.openxmlformats.org/drawingml/2006/main">
-          <a:srgbClr val="0E1B3E"/>
+          <a:srgbClr val="070F26"/>
         </a:solidFill>
       </p:bgPr>
     </p:bg>
@@ -12346,7 +12346,7 @@
           <p:cNvPr id="1" name="">
             <a:extLst xmlns:a="http://schemas.openxmlformats.org/drawingml/2006/main">
               <a:ext uri="{FF2B5EF4-FFF2-40B4-BE49-F238E27FC236}">
-                <a16:creationId xmlns:a16="http://schemas.microsoft.com/office/drawing/2014/main" id="{4FAAB1F3-5BA7-4CE3-88F4-DA36AB69048A}"/>
+                <a16:creationId xmlns:a16="http://schemas.microsoft.com/office/drawing/2014/main" id="{E8A8BB1D-18E7-4872-AE7F-FC64D697BEE0}"/>
               </a:ext>
             </a:extLst>
           </p:cNvPr>
@@ -12364,7 +12364,7 @@
             <a:avLst/>
           </a:prstGeom>
           <a:solidFill xmlns:a="http://schemas.openxmlformats.org/drawingml/2006/main">
-            <a:srgbClr val="0E1B3E"/>
+            <a:srgbClr val="070F26"/>
           </a:solidFill>
           <a:ln xmlns:a="http://schemas.openxmlformats.org/drawingml/2006/main" w="0">
             <a:solidFill>
@@ -12385,7 +12385,7 @@
           <p:nvPr/>
         </p:nvPicPr>
         <p:blipFill>
-          <a:blip xmlns:r="http://schemas.openxmlformats.org/officeDocument/2006/relationships" xmlns:a="http://schemas.openxmlformats.org/drawingml/2006/main" r:embed="Ra98a4678807b4418"/>
+          <a:blip xmlns:r="http://schemas.openxmlformats.org/officeDocument/2006/relationships" xmlns:a="http://schemas.openxmlformats.org/drawingml/2006/main" r:embed="Rec38275308db4c56"/>
           <a:stretch xmlns:a="http://schemas.openxmlformats.org/drawingml/2006/main"/>
         </p:blipFill>
         <p:spPr>
@@ -12403,7 +12403,7 @@
           <p:cNvPr id="3" name="">
             <a:extLst xmlns:a="http://schemas.openxmlformats.org/drawingml/2006/main">
               <a:ext uri="{FF2B5EF4-FFF2-40B4-BE49-F238E27FC236}">
-                <a16:creationId xmlns:a16="http://schemas.microsoft.com/office/drawing/2014/main" id="{5CAB3B39-D6C7-4FB0-92F4-F0B6758FA489}"/>
+                <a16:creationId xmlns:a16="http://schemas.microsoft.com/office/drawing/2014/main" id="{D7A0FDB5-EC2B-4FA0-8D88-17647AFE5513}"/>
               </a:ext>
             </a:extLst>
           </p:cNvPr>
@@ -12461,7 +12461,7 @@
           <p:cNvPr id="4" name="">
             <a:extLst xmlns:a="http://schemas.openxmlformats.org/drawingml/2006/main">
               <a:ext uri="{FF2B5EF4-FFF2-40B4-BE49-F238E27FC236}">
-                <a16:creationId xmlns:a16="http://schemas.microsoft.com/office/drawing/2014/main" id="{AFEE9BD9-B2A4-40C0-9040-226F8C9DD143}"/>
+                <a16:creationId xmlns:a16="http://schemas.microsoft.com/office/drawing/2014/main" id="{0B41A461-BA66-4167-AF3C-763378FCC09E}"/>
               </a:ext>
             </a:extLst>
           </p:cNvPr>
@@ -12519,7 +12519,7 @@
           <p:cNvPr id="5" name="">
             <a:extLst xmlns:a="http://schemas.openxmlformats.org/drawingml/2006/main">
               <a:ext uri="{FF2B5EF4-FFF2-40B4-BE49-F238E27FC236}">
-                <a16:creationId xmlns:a16="http://schemas.microsoft.com/office/drawing/2014/main" id="{EFECB4FE-B149-4309-B6F3-B0FB8923F4E3}"/>
+                <a16:creationId xmlns:a16="http://schemas.microsoft.com/office/drawing/2014/main" id="{6747C54A-5F95-4150-BCA8-CC2A5BA32FAE}"/>
               </a:ext>
             </a:extLst>
           </p:cNvPr>
@@ -12577,7 +12577,7 @@
           <p:cNvPr id="6" name="">
             <a:extLst xmlns:a="http://schemas.openxmlformats.org/drawingml/2006/main">
               <a:ext uri="{FF2B5EF4-FFF2-40B4-BE49-F238E27FC236}">
-                <a16:creationId xmlns:a16="http://schemas.microsoft.com/office/drawing/2014/main" id="{DA237057-7AED-4DA9-8143-359740AC2C3B}"/>
+                <a16:creationId xmlns:a16="http://schemas.microsoft.com/office/drawing/2014/main" id="{3BC37503-FCF0-4FA6-BC6D-6629680B44C2}"/>
               </a:ext>
             </a:extLst>
           </p:cNvPr>
@@ -12639,13 +12639,13 @@
           <p:nvPr/>
         </p:nvPicPr>
         <p:blipFill>
-          <a:blip xmlns:r="http://schemas.openxmlformats.org/officeDocument/2006/relationships" xmlns:a="http://schemas.openxmlformats.org/drawingml/2006/main" r:embed="R458e43e808d14f11"/>
+          <a:blip xmlns:r="http://schemas.openxmlformats.org/officeDocument/2006/relationships" xmlns:a="http://schemas.openxmlformats.org/drawingml/2006/main" r:embed="R9494a683a5144d45"/>
           <a:stretch xmlns:a="http://schemas.openxmlformats.org/drawingml/2006/main"/>
         </p:blipFill>
         <p:spPr>
           <a:xfrm xmlns:a="http://schemas.openxmlformats.org/drawingml/2006/main">
-            <a:off x="476250" y="1257300"/>
-            <a:ext cx="2667000" cy="4533900"/>
+            <a:off x="0" y="1746250"/>
+            <a:ext cx="2667000" cy="3556000"/>
           </a:xfrm>
           <a:prstGeom xmlns:a="http://schemas.openxmlformats.org/drawingml/2006/main" prst="rect">
             <a:avLst/>
@@ -12657,7 +12657,7 @@
           <p:cNvPr id="8" name="">
             <a:extLst xmlns:a="http://schemas.openxmlformats.org/drawingml/2006/main">
               <a:ext uri="{FF2B5EF4-FFF2-40B4-BE49-F238E27FC236}">
-                <a16:creationId xmlns:a16="http://schemas.microsoft.com/office/drawing/2014/main" id="{6494C8CE-3F2E-440A-8452-33AB8E733E3A}"/>
+                <a16:creationId xmlns:a16="http://schemas.microsoft.com/office/drawing/2014/main" id="{B9A3D124-EA02-4455-A464-1B7349112C1E}"/>
               </a:ext>
             </a:extLst>
           </p:cNvPr>
@@ -12715,7 +12715,7 @@
           <p:cNvPr id="9" name="">
             <a:extLst xmlns:a="http://schemas.openxmlformats.org/drawingml/2006/main">
               <a:ext uri="{FF2B5EF4-FFF2-40B4-BE49-F238E27FC236}">
-                <a16:creationId xmlns:a16="http://schemas.microsoft.com/office/drawing/2014/main" id="{1127CB39-8AC0-41AB-BB96-1B5F6E9A5E12}"/>
+                <a16:creationId xmlns:a16="http://schemas.microsoft.com/office/drawing/2014/main" id="{1D4CA6B6-7353-440F-8185-232E66EDE577}"/>
               </a:ext>
             </a:extLst>
           </p:cNvPr>
@@ -12773,7 +12773,7 @@
           <p:cNvPr id="10" name="">
             <a:extLst xmlns:a="http://schemas.openxmlformats.org/drawingml/2006/main">
               <a:ext uri="{FF2B5EF4-FFF2-40B4-BE49-F238E27FC236}">
-                <a16:creationId xmlns:a16="http://schemas.microsoft.com/office/drawing/2014/main" id="{365E0A67-2635-4C22-B4BF-8EB685681FB6}"/>
+                <a16:creationId xmlns:a16="http://schemas.microsoft.com/office/drawing/2014/main" id="{8A6B9582-1910-4C30-B517-DD7B2418AF56}"/>
               </a:ext>
             </a:extLst>
           </p:cNvPr>
@@ -12829,7 +12829,7 @@
     </p:spTree>
     <p:extLst>
       <p:ext uri="{BB962C8B-B14F-4D97-AF65-F5344CB8AC3E}">
-        <p14:creationId xmlns:p14="http://schemas.microsoft.com/office/powerpoint/2010/main" val="1688671426"/>
+        <p14:creationId xmlns:p14="http://schemas.microsoft.com/office/powerpoint/2010/main" val="1493571266"/>
       </p:ext>
     </p:extLst>
   </p:cSld>
@@ -12860,7 +12860,7 @@
           <p:cNvPr id="1" name="">
             <a:extLst xmlns:a="http://schemas.openxmlformats.org/drawingml/2006/main">
               <a:ext uri="{FF2B5EF4-FFF2-40B4-BE49-F238E27FC236}">
-                <a16:creationId xmlns:a16="http://schemas.microsoft.com/office/drawing/2014/main" id="{477DA769-1112-44F3-B495-A3C2E8A6D58D}"/>
+                <a16:creationId xmlns:a16="http://schemas.microsoft.com/office/drawing/2014/main" id="{B82EBBBF-98E8-4A27-9687-A1CC9B703C2B}"/>
               </a:ext>
             </a:extLst>
           </p:cNvPr>
@@ -12899,7 +12899,7 @@
           <p:nvPr/>
         </p:nvPicPr>
         <p:blipFill>
-          <a:blip xmlns:r="http://schemas.openxmlformats.org/officeDocument/2006/relationships" xmlns:a="http://schemas.openxmlformats.org/drawingml/2006/main" r:embed="R6a55749479604d90"/>
+          <a:blip xmlns:r="http://schemas.openxmlformats.org/officeDocument/2006/relationships" xmlns:a="http://schemas.openxmlformats.org/drawingml/2006/main" r:embed="R7302c040365b4d5a"/>
           <a:stretch xmlns:a="http://schemas.openxmlformats.org/drawingml/2006/main"/>
         </p:blipFill>
         <p:spPr>
@@ -12917,7 +12917,7 @@
           <p:cNvPr id="3" name="">
             <a:extLst xmlns:a="http://schemas.openxmlformats.org/drawingml/2006/main">
               <a:ext uri="{FF2B5EF4-FFF2-40B4-BE49-F238E27FC236}">
-                <a16:creationId xmlns:a16="http://schemas.microsoft.com/office/drawing/2014/main" id="{1AFA1193-58E0-42BC-A003-4C9342E157A0}"/>
+                <a16:creationId xmlns:a16="http://schemas.microsoft.com/office/drawing/2014/main" id="{4293503F-EF83-4AB2-A90F-FD689662DA95}"/>
               </a:ext>
             </a:extLst>
           </p:cNvPr>
@@ -12955,14 +12955,14 @@
             <a:pPr algn="r">
               <a:defRPr sz="825" b="1">
                 <a:solidFill>
-                  <a:srgbClr val="0E1B3E"/>
+                  <a:srgbClr val="070F26"/>
                 </a:solidFill>
               </a:defRPr>
             </a:pPr>
             <a:r>
               <a:rPr sz="825" b="1">
                 <a:solidFill>
-                  <a:srgbClr val="0E1B3E"/>
+                  <a:srgbClr val="070F26"/>
                 </a:solidFill>
               </a:rPr>
               <a:t>NTT DATA UNIVERSITY</a:t>
@@ -12975,7 +12975,7 @@
           <p:cNvPr id="4" name="">
             <a:extLst xmlns:a="http://schemas.openxmlformats.org/drawingml/2006/main">
               <a:ext uri="{FF2B5EF4-FFF2-40B4-BE49-F238E27FC236}">
-                <a16:creationId xmlns:a16="http://schemas.microsoft.com/office/drawing/2014/main" id="{E79D450D-01BD-43D8-98BA-BB4B0FA893C9}"/>
+                <a16:creationId xmlns:a16="http://schemas.microsoft.com/office/drawing/2014/main" id="{78096E0C-DD96-46D1-B1DF-225B551B3682}"/>
               </a:ext>
             </a:extLst>
           </p:cNvPr>
@@ -13033,7 +13033,7 @@
           <p:cNvPr id="5" name="">
             <a:extLst xmlns:a="http://schemas.openxmlformats.org/drawingml/2006/main">
               <a:ext uri="{FF2B5EF4-FFF2-40B4-BE49-F238E27FC236}">
-                <a16:creationId xmlns:a16="http://schemas.microsoft.com/office/drawing/2014/main" id="{1ABC8135-5C81-435F-BF1E-A605ACD640EB}"/>
+                <a16:creationId xmlns:a16="http://schemas.microsoft.com/office/drawing/2014/main" id="{D410CA86-6976-43ED-B50F-F267F16AFC6B}"/>
               </a:ext>
             </a:extLst>
           </p:cNvPr>
@@ -13091,7 +13091,7 @@
           <p:cNvPr id="6" name="">
             <a:extLst xmlns:a="http://schemas.openxmlformats.org/drawingml/2006/main">
               <a:ext uri="{FF2B5EF4-FFF2-40B4-BE49-F238E27FC236}">
-                <a16:creationId xmlns:a16="http://schemas.microsoft.com/office/drawing/2014/main" id="{182B0543-F6B2-4B9A-9D9F-5018BBF0B9F8}"/>
+                <a16:creationId xmlns:a16="http://schemas.microsoft.com/office/drawing/2014/main" id="{A34BCEC8-E483-4C1A-834A-C31D66470595}"/>
               </a:ext>
             </a:extLst>
           </p:cNvPr>
@@ -13129,14 +13129,14 @@
             <a:pPr algn="r">
               <a:defRPr sz="675" b="1">
                 <a:solidFill>
-                  <a:srgbClr val="0E1B3E"/>
+                  <a:srgbClr val="070F26"/>
                 </a:solidFill>
               </a:defRPr>
             </a:pPr>
             <a:r>
               <a:rPr sz="675" b="1">
                 <a:solidFill>
-                  <a:srgbClr val="0E1B3E"/>
+                  <a:srgbClr val="070F26"/>
                 </a:solidFill>
               </a:rPr>
               <a:t>NTT DATA UNIVERSITY</a:t>
@@ -13149,7 +13149,7 @@
           <p:cNvPr id="7" name="">
             <a:extLst xmlns:a="http://schemas.openxmlformats.org/drawingml/2006/main">
               <a:ext uri="{FF2B5EF4-FFF2-40B4-BE49-F238E27FC236}">
-                <a16:creationId xmlns:a16="http://schemas.microsoft.com/office/drawing/2014/main" id="{6174D031-F914-46FF-86B7-E4ADCC397B37}"/>
+                <a16:creationId xmlns:a16="http://schemas.microsoft.com/office/drawing/2014/main" id="{7798F556-92AA-426B-839C-CB2A4EFE1A6E}"/>
               </a:ext>
             </a:extLst>
           </p:cNvPr>
@@ -13207,7 +13207,7 @@
           <p:cNvPr id="8" name="">
             <a:extLst xmlns:a="http://schemas.openxmlformats.org/drawingml/2006/main">
               <a:ext uri="{FF2B5EF4-FFF2-40B4-BE49-F238E27FC236}">
-                <a16:creationId xmlns:a16="http://schemas.microsoft.com/office/drawing/2014/main" id="{EE0C1062-99C2-4A12-805E-F96529783287}"/>
+                <a16:creationId xmlns:a16="http://schemas.microsoft.com/office/drawing/2014/main" id="{BDDB808D-4359-4840-962F-2D72B36DB8B0}"/>
               </a:ext>
             </a:extLst>
           </p:cNvPr>
@@ -13245,14 +13245,14 @@
             <a:pPr algn="l">
               <a:defRPr sz="2400" b="0">
                 <a:solidFill>
-                  <a:srgbClr val="0E1B3E"/>
+                  <a:srgbClr val="070F26"/>
                 </a:solidFill>
               </a:defRPr>
             </a:pPr>
             <a:r>
               <a:rPr sz="2400" b="0">
                 <a:solidFill>
-                  <a:srgbClr val="0E1B3E"/>
+                  <a:srgbClr val="070F26"/>
                 </a:solidFill>
               </a:rPr>
               <a:t>Desenhar o schema atual e identificar PKs e FKs</a:t>
@@ -13265,7 +13265,7 @@
           <p:cNvPr id="9" name="">
             <a:extLst xmlns:a="http://schemas.openxmlformats.org/drawingml/2006/main">
               <a:ext uri="{FF2B5EF4-FFF2-40B4-BE49-F238E27FC236}">
-                <a16:creationId xmlns:a16="http://schemas.microsoft.com/office/drawing/2014/main" id="{B9572540-068D-4338-967E-8B05D7994EC8}"/>
+                <a16:creationId xmlns:a16="http://schemas.microsoft.com/office/drawing/2014/main" id="{E6DAB673-85F5-4D49-80BC-6F2A9E667446}"/>
               </a:ext>
             </a:extLst>
           </p:cNvPr>
@@ -13323,7 +13323,7 @@
           <p:cNvPr id="10" name="">
             <a:extLst xmlns:a="http://schemas.openxmlformats.org/drawingml/2006/main">
               <a:ext uri="{FF2B5EF4-FFF2-40B4-BE49-F238E27FC236}">
-                <a16:creationId xmlns:a16="http://schemas.microsoft.com/office/drawing/2014/main" id="{D928E743-C927-423F-A46B-61769BC54C50}"/>
+                <a16:creationId xmlns:a16="http://schemas.microsoft.com/office/drawing/2014/main" id="{169FA27E-3E2F-4209-9AFE-3F83B317C9FE}"/>
               </a:ext>
             </a:extLst>
           </p:cNvPr>
@@ -13356,7 +13356,7 @@
           <p:cNvPr id="11" name="">
             <a:extLst xmlns:a="http://schemas.openxmlformats.org/drawingml/2006/main">
               <a:ext uri="{FF2B5EF4-FFF2-40B4-BE49-F238E27FC236}">
-                <a16:creationId xmlns:a16="http://schemas.microsoft.com/office/drawing/2014/main" id="{13E65A9C-6EF0-4849-93E6-E8F7563393EB}"/>
+                <a16:creationId xmlns:a16="http://schemas.microsoft.com/office/drawing/2014/main" id="{AB65BBDF-62A0-42E6-A11B-19619339651F}"/>
               </a:ext>
             </a:extLst>
           </p:cNvPr>
@@ -13391,7 +13391,7 @@
           <p:cNvPr id="12" name="">
             <a:extLst xmlns:a="http://schemas.openxmlformats.org/drawingml/2006/main">
               <a:ext uri="{FF2B5EF4-FFF2-40B4-BE49-F238E27FC236}">
-                <a16:creationId xmlns:a16="http://schemas.microsoft.com/office/drawing/2014/main" id="{85C92F82-FFED-4D30-9D0C-A7B14DBC9D5A}"/>
+                <a16:creationId xmlns:a16="http://schemas.microsoft.com/office/drawing/2014/main" id="{96B54CF2-19E5-4FA8-91E4-804E848C4094}"/>
               </a:ext>
             </a:extLst>
           </p:cNvPr>
@@ -13449,7 +13449,7 @@
           <p:cNvPr id="13" name="">
             <a:extLst xmlns:a="http://schemas.openxmlformats.org/drawingml/2006/main">
               <a:ext uri="{FF2B5EF4-FFF2-40B4-BE49-F238E27FC236}">
-                <a16:creationId xmlns:a16="http://schemas.microsoft.com/office/drawing/2014/main" id="{D8A30A7C-52BE-4A80-AE14-93442A0C02B8}"/>
+                <a16:creationId xmlns:a16="http://schemas.microsoft.com/office/drawing/2014/main" id="{F8CCBD33-ADC1-452C-8D64-4E6D3D43D209}"/>
               </a:ext>
             </a:extLst>
           </p:cNvPr>
@@ -13733,7 +13733,7 @@
           <p:cNvPr id="14" name="">
             <a:extLst xmlns:a="http://schemas.openxmlformats.org/drawingml/2006/main">
               <a:ext uri="{FF2B5EF4-FFF2-40B4-BE49-F238E27FC236}">
-                <a16:creationId xmlns:a16="http://schemas.microsoft.com/office/drawing/2014/main" id="{05D1A9F3-4071-4BDF-A847-E93EBF464859}"/>
+                <a16:creationId xmlns:a16="http://schemas.microsoft.com/office/drawing/2014/main" id="{8DA5BB00-2B91-4A7D-8FA3-202DE9028545}"/>
               </a:ext>
             </a:extLst>
           </p:cNvPr>
@@ -13766,7 +13766,7 @@
           <p:cNvPr id="15" name="">
             <a:extLst xmlns:a="http://schemas.openxmlformats.org/drawingml/2006/main">
               <a:ext uri="{FF2B5EF4-FFF2-40B4-BE49-F238E27FC236}">
-                <a16:creationId xmlns:a16="http://schemas.microsoft.com/office/drawing/2014/main" id="{54B83A16-B1CE-4763-9A15-67C776BD6E06}"/>
+                <a16:creationId xmlns:a16="http://schemas.microsoft.com/office/drawing/2014/main" id="{2CB052EC-02AD-450D-858A-F5FE120726EE}"/>
               </a:ext>
             </a:extLst>
           </p:cNvPr>
@@ -13801,7 +13801,7 @@
           <p:cNvPr id="16" name="">
             <a:extLst xmlns:a="http://schemas.openxmlformats.org/drawingml/2006/main">
               <a:ext uri="{FF2B5EF4-FFF2-40B4-BE49-F238E27FC236}">
-                <a16:creationId xmlns:a16="http://schemas.microsoft.com/office/drawing/2014/main" id="{7D7F70DB-8936-45EA-BCF0-A1610340E095}"/>
+                <a16:creationId xmlns:a16="http://schemas.microsoft.com/office/drawing/2014/main" id="{A3125A91-0DED-4B5D-8D2E-6B9C36A8A0BD}"/>
               </a:ext>
             </a:extLst>
           </p:cNvPr>
@@ -13859,7 +13859,7 @@
           <p:cNvPr id="17" name="">
             <a:extLst xmlns:a="http://schemas.openxmlformats.org/drawingml/2006/main">
               <a:ext uri="{FF2B5EF4-FFF2-40B4-BE49-F238E27FC236}">
-                <a16:creationId xmlns:a16="http://schemas.microsoft.com/office/drawing/2014/main" id="{95113028-828C-48A8-BEE9-DF37CDBEC194}"/>
+                <a16:creationId xmlns:a16="http://schemas.microsoft.com/office/drawing/2014/main" id="{F75F5854-A913-4136-89BC-FE15F2A39A48}"/>
               </a:ext>
             </a:extLst>
           </p:cNvPr>
@@ -14059,7 +14059,7 @@
     </p:spTree>
     <p:extLst>
       <p:ext uri="{BB962C8B-B14F-4D97-AF65-F5344CB8AC3E}">
-        <p14:creationId xmlns:p14="http://schemas.microsoft.com/office/powerpoint/2010/main" val="2052784920"/>
+        <p14:creationId xmlns:p14="http://schemas.microsoft.com/office/powerpoint/2010/main" val="1187752338"/>
       </p:ext>
     </p:extLst>
   </p:cSld>
@@ -14090,7 +14090,7 @@
           <p:cNvPr id="1" name="">
             <a:extLst xmlns:a="http://schemas.openxmlformats.org/drawingml/2006/main">
               <a:ext uri="{FF2B5EF4-FFF2-40B4-BE49-F238E27FC236}">
-                <a16:creationId xmlns:a16="http://schemas.microsoft.com/office/drawing/2014/main" id="{C93F9979-33D7-49C2-9008-827C08DA963C}"/>
+                <a16:creationId xmlns:a16="http://schemas.microsoft.com/office/drawing/2014/main" id="{F0450E25-B13D-4BEE-9170-48B76F6EBF20}"/>
               </a:ext>
             </a:extLst>
           </p:cNvPr>
@@ -14129,7 +14129,7 @@
           <p:nvPr/>
         </p:nvPicPr>
         <p:blipFill>
-          <a:blip xmlns:r="http://schemas.openxmlformats.org/officeDocument/2006/relationships" xmlns:a="http://schemas.openxmlformats.org/drawingml/2006/main" r:embed="R63e7bde12fcd4a81"/>
+          <a:blip xmlns:r="http://schemas.openxmlformats.org/officeDocument/2006/relationships" xmlns:a="http://schemas.openxmlformats.org/drawingml/2006/main" r:embed="R923852674ed94daf"/>
           <a:stretch xmlns:a="http://schemas.openxmlformats.org/drawingml/2006/main"/>
         </p:blipFill>
         <p:spPr>
@@ -14147,7 +14147,7 @@
           <p:cNvPr id="3" name="">
             <a:extLst xmlns:a="http://schemas.openxmlformats.org/drawingml/2006/main">
               <a:ext uri="{FF2B5EF4-FFF2-40B4-BE49-F238E27FC236}">
-                <a16:creationId xmlns:a16="http://schemas.microsoft.com/office/drawing/2014/main" id="{16140835-88F3-4402-9D89-2F3B4E5E6D2F}"/>
+                <a16:creationId xmlns:a16="http://schemas.microsoft.com/office/drawing/2014/main" id="{019E46B5-1984-4FEE-9799-3B639FD47168}"/>
               </a:ext>
             </a:extLst>
           </p:cNvPr>
@@ -14185,14 +14185,14 @@
             <a:pPr algn="r">
               <a:defRPr sz="825" b="1">
                 <a:solidFill>
-                  <a:srgbClr val="0E1B3E"/>
+                  <a:srgbClr val="070F26"/>
                 </a:solidFill>
               </a:defRPr>
             </a:pPr>
             <a:r>
               <a:rPr sz="825" b="1">
                 <a:solidFill>
-                  <a:srgbClr val="0E1B3E"/>
+                  <a:srgbClr val="070F26"/>
                 </a:solidFill>
               </a:rPr>
               <a:t>NTT DATA UNIVERSITY</a:t>
@@ -14205,7 +14205,7 @@
           <p:cNvPr id="4" name="">
             <a:extLst xmlns:a="http://schemas.openxmlformats.org/drawingml/2006/main">
               <a:ext uri="{FF2B5EF4-FFF2-40B4-BE49-F238E27FC236}">
-                <a16:creationId xmlns:a16="http://schemas.microsoft.com/office/drawing/2014/main" id="{1BB0CC82-03D6-4ACF-8267-AD53A6A6524D}"/>
+                <a16:creationId xmlns:a16="http://schemas.microsoft.com/office/drawing/2014/main" id="{5DE3356A-6BC0-4A8A-B556-1E180999F9CA}"/>
               </a:ext>
             </a:extLst>
           </p:cNvPr>
@@ -14263,7 +14263,7 @@
           <p:cNvPr id="5" name="">
             <a:extLst xmlns:a="http://schemas.openxmlformats.org/drawingml/2006/main">
               <a:ext uri="{FF2B5EF4-FFF2-40B4-BE49-F238E27FC236}">
-                <a16:creationId xmlns:a16="http://schemas.microsoft.com/office/drawing/2014/main" id="{2E6FB36B-D038-4E3F-832F-ECA5D0AAA6BC}"/>
+                <a16:creationId xmlns:a16="http://schemas.microsoft.com/office/drawing/2014/main" id="{E7EAB667-187D-4F6C-A329-A5C877564180}"/>
               </a:ext>
             </a:extLst>
           </p:cNvPr>
@@ -14321,7 +14321,7 @@
           <p:cNvPr id="6" name="">
             <a:extLst xmlns:a="http://schemas.openxmlformats.org/drawingml/2006/main">
               <a:ext uri="{FF2B5EF4-FFF2-40B4-BE49-F238E27FC236}">
-                <a16:creationId xmlns:a16="http://schemas.microsoft.com/office/drawing/2014/main" id="{022704C9-29B9-4D12-879D-A4669AEC4C95}"/>
+                <a16:creationId xmlns:a16="http://schemas.microsoft.com/office/drawing/2014/main" id="{12869FCC-A2BB-4820-8D10-0F5141F51586}"/>
               </a:ext>
             </a:extLst>
           </p:cNvPr>
@@ -14359,14 +14359,14 @@
             <a:pPr algn="r">
               <a:defRPr sz="675" b="1">
                 <a:solidFill>
-                  <a:srgbClr val="0E1B3E"/>
+                  <a:srgbClr val="070F26"/>
                 </a:solidFill>
               </a:defRPr>
             </a:pPr>
             <a:r>
               <a:rPr sz="675" b="1">
                 <a:solidFill>
-                  <a:srgbClr val="0E1B3E"/>
+                  <a:srgbClr val="070F26"/>
                 </a:solidFill>
               </a:rPr>
               <a:t>NTT DATA UNIVERSITY</a:t>
@@ -14379,7 +14379,7 @@
           <p:cNvPr id="7" name="">
             <a:extLst xmlns:a="http://schemas.openxmlformats.org/drawingml/2006/main">
               <a:ext uri="{FF2B5EF4-FFF2-40B4-BE49-F238E27FC236}">
-                <a16:creationId xmlns:a16="http://schemas.microsoft.com/office/drawing/2014/main" id="{5259C67F-C7B2-4F85-AFD4-CEC41D0694B7}"/>
+                <a16:creationId xmlns:a16="http://schemas.microsoft.com/office/drawing/2014/main" id="{0C093A31-3469-4F3D-BEE2-90899749F5B8}"/>
               </a:ext>
             </a:extLst>
           </p:cNvPr>
@@ -14437,7 +14437,7 @@
           <p:cNvPr id="8" name="">
             <a:extLst xmlns:a="http://schemas.openxmlformats.org/drawingml/2006/main">
               <a:ext uri="{FF2B5EF4-FFF2-40B4-BE49-F238E27FC236}">
-                <a16:creationId xmlns:a16="http://schemas.microsoft.com/office/drawing/2014/main" id="{6717DBEC-0F86-4F18-BBF6-CCCDA27843B2}"/>
+                <a16:creationId xmlns:a16="http://schemas.microsoft.com/office/drawing/2014/main" id="{17F2A7C3-FE26-4BD3-9C9B-9DF908799C2A}"/>
               </a:ext>
             </a:extLst>
           </p:cNvPr>
@@ -14475,14 +14475,14 @@
             <a:pPr algn="l">
               <a:defRPr sz="2400" b="0">
                 <a:solidFill>
-                  <a:srgbClr val="0E1B3E"/>
+                  <a:srgbClr val="070F26"/>
                 </a:solidFill>
               </a:defRPr>
             </a:pPr>
             <a:r>
               <a:rPr sz="2400" b="0">
                 <a:solidFill>
-                  <a:srgbClr val="0E1B3E"/>
+                  <a:srgbClr val="070F26"/>
                 </a:solidFill>
               </a:rPr>
               <a:t>vendas é uma tabela fato em essência</a:t>
@@ -14495,7 +14495,7 @@
           <p:cNvPr id="9" name="">
             <a:extLst xmlns:a="http://schemas.openxmlformats.org/drawingml/2006/main">
               <a:ext uri="{FF2B5EF4-FFF2-40B4-BE49-F238E27FC236}">
-                <a16:creationId xmlns:a16="http://schemas.microsoft.com/office/drawing/2014/main" id="{F5DD4192-909B-426D-899B-9131DCE49411}"/>
+                <a16:creationId xmlns:a16="http://schemas.microsoft.com/office/drawing/2014/main" id="{D9F3911F-A693-4394-9905-384DDA297851}"/>
               </a:ext>
             </a:extLst>
           </p:cNvPr>
@@ -14553,7 +14553,7 @@
           <p:cNvPr id="10" name="">
             <a:extLst xmlns:a="http://schemas.openxmlformats.org/drawingml/2006/main">
               <a:ext uri="{FF2B5EF4-FFF2-40B4-BE49-F238E27FC236}">
-                <a16:creationId xmlns:a16="http://schemas.microsoft.com/office/drawing/2014/main" id="{0AA48894-217A-49D6-912B-FCECE0D32BE1}"/>
+                <a16:creationId xmlns:a16="http://schemas.microsoft.com/office/drawing/2014/main" id="{3BF50221-B7EB-42D3-8895-3FF2958CE02A}"/>
               </a:ext>
             </a:extLst>
           </p:cNvPr>
@@ -14586,7 +14586,7 @@
           <p:cNvPr id="11" name="">
             <a:extLst xmlns:a="http://schemas.openxmlformats.org/drawingml/2006/main">
               <a:ext uri="{FF2B5EF4-FFF2-40B4-BE49-F238E27FC236}">
-                <a16:creationId xmlns:a16="http://schemas.microsoft.com/office/drawing/2014/main" id="{A3DF89D0-E4DE-43EA-95DD-C4BFE5404087}"/>
+                <a16:creationId xmlns:a16="http://schemas.microsoft.com/office/drawing/2014/main" id="{21DCAACC-9FE2-436D-B757-07477F2020C5}"/>
               </a:ext>
             </a:extLst>
           </p:cNvPr>
@@ -14621,7 +14621,7 @@
           <p:cNvPr id="12" name="">
             <a:extLst xmlns:a="http://schemas.openxmlformats.org/drawingml/2006/main">
               <a:ext uri="{FF2B5EF4-FFF2-40B4-BE49-F238E27FC236}">
-                <a16:creationId xmlns:a16="http://schemas.microsoft.com/office/drawing/2014/main" id="{49E7D493-74F0-43EB-8126-7DD78CD2286D}"/>
+                <a16:creationId xmlns:a16="http://schemas.microsoft.com/office/drawing/2014/main" id="{858C5CC8-AA42-4BE5-AD11-4812FBFB2F53}"/>
               </a:ext>
             </a:extLst>
           </p:cNvPr>
@@ -14679,7 +14679,7 @@
           <p:cNvPr id="13" name="">
             <a:extLst xmlns:a="http://schemas.openxmlformats.org/drawingml/2006/main">
               <a:ext uri="{FF2B5EF4-FFF2-40B4-BE49-F238E27FC236}">
-                <a16:creationId xmlns:a16="http://schemas.microsoft.com/office/drawing/2014/main" id="{CD2C4026-88CE-40B1-BBB0-73DBAD55128A}"/>
+                <a16:creationId xmlns:a16="http://schemas.microsoft.com/office/drawing/2014/main" id="{5A31C110-2D60-409E-8EF2-7B5305C32952}"/>
               </a:ext>
             </a:extLst>
           </p:cNvPr>
@@ -14788,7 +14788,7 @@
           <p:cNvPr id="14" name="">
             <a:extLst xmlns:a="http://schemas.openxmlformats.org/drawingml/2006/main">
               <a:ext uri="{FF2B5EF4-FFF2-40B4-BE49-F238E27FC236}">
-                <a16:creationId xmlns:a16="http://schemas.microsoft.com/office/drawing/2014/main" id="{30DC9A73-0EC4-4F9E-A8EF-71654D2C73A9}"/>
+                <a16:creationId xmlns:a16="http://schemas.microsoft.com/office/drawing/2014/main" id="{C868DF98-96E3-4DDA-9F23-D0092A8A30EA}"/>
               </a:ext>
             </a:extLst>
           </p:cNvPr>
@@ -14821,7 +14821,7 @@
           <p:cNvPr id="15" name="">
             <a:extLst xmlns:a="http://schemas.openxmlformats.org/drawingml/2006/main">
               <a:ext uri="{FF2B5EF4-FFF2-40B4-BE49-F238E27FC236}">
-                <a16:creationId xmlns:a16="http://schemas.microsoft.com/office/drawing/2014/main" id="{4E6F7B72-A6B4-4E8F-9EA0-DC779AC1D9A3}"/>
+                <a16:creationId xmlns:a16="http://schemas.microsoft.com/office/drawing/2014/main" id="{423CEC36-8E00-4316-BA07-D311DFFC4BBA}"/>
               </a:ext>
             </a:extLst>
           </p:cNvPr>
@@ -14856,7 +14856,7 @@
           <p:cNvPr id="16" name="">
             <a:extLst xmlns:a="http://schemas.openxmlformats.org/drawingml/2006/main">
               <a:ext uri="{FF2B5EF4-FFF2-40B4-BE49-F238E27FC236}">
-                <a16:creationId xmlns:a16="http://schemas.microsoft.com/office/drawing/2014/main" id="{66659773-9BAB-408D-AD43-D6B30F313F60}"/>
+                <a16:creationId xmlns:a16="http://schemas.microsoft.com/office/drawing/2014/main" id="{E29A706C-D2A3-43B0-B8E5-D77F022F10F2}"/>
               </a:ext>
             </a:extLst>
           </p:cNvPr>
@@ -14914,7 +14914,7 @@
           <p:cNvPr id="17" name="">
             <a:extLst xmlns:a="http://schemas.openxmlformats.org/drawingml/2006/main">
               <a:ext uri="{FF2B5EF4-FFF2-40B4-BE49-F238E27FC236}">
-                <a16:creationId xmlns:a16="http://schemas.microsoft.com/office/drawing/2014/main" id="{5FF3D00F-4176-4012-B06A-9DE62C518CCC}"/>
+                <a16:creationId xmlns:a16="http://schemas.microsoft.com/office/drawing/2014/main" id="{CA4C7B12-F0F4-4EE0-9FB4-82FD5F7795B4}"/>
               </a:ext>
             </a:extLst>
           </p:cNvPr>
@@ -15006,7 +15006,7 @@
           <p:cNvPr id="18" name="">
             <a:extLst xmlns:a="http://schemas.openxmlformats.org/drawingml/2006/main">
               <a:ext uri="{FF2B5EF4-FFF2-40B4-BE49-F238E27FC236}">
-                <a16:creationId xmlns:a16="http://schemas.microsoft.com/office/drawing/2014/main" id="{54C2A04C-0760-45B5-AA89-3B1026640780}"/>
+                <a16:creationId xmlns:a16="http://schemas.microsoft.com/office/drawing/2014/main" id="{CCB279E2-8EB7-4BBA-AACF-43E85AC509F1}"/>
               </a:ext>
             </a:extLst>
           </p:cNvPr>
@@ -15039,7 +15039,7 @@
           <p:cNvPr id="19" name="">
             <a:extLst xmlns:a="http://schemas.openxmlformats.org/drawingml/2006/main">
               <a:ext uri="{FF2B5EF4-FFF2-40B4-BE49-F238E27FC236}">
-                <a16:creationId xmlns:a16="http://schemas.microsoft.com/office/drawing/2014/main" id="{F44863AF-ED0B-4C21-AC3D-A7CE3C280263}"/>
+                <a16:creationId xmlns:a16="http://schemas.microsoft.com/office/drawing/2014/main" id="{D64FBB59-69F6-4AEE-B9AB-ED69F2FEF385}"/>
               </a:ext>
             </a:extLst>
           </p:cNvPr>
@@ -15074,7 +15074,7 @@
           <p:cNvPr id="20" name="">
             <a:extLst xmlns:a="http://schemas.openxmlformats.org/drawingml/2006/main">
               <a:ext uri="{FF2B5EF4-FFF2-40B4-BE49-F238E27FC236}">
-                <a16:creationId xmlns:a16="http://schemas.microsoft.com/office/drawing/2014/main" id="{2348B55F-A17E-406E-A32B-6C10F0886652}"/>
+                <a16:creationId xmlns:a16="http://schemas.microsoft.com/office/drawing/2014/main" id="{1BF4BB4D-3F89-4624-850D-BECF8E34E56A}"/>
               </a:ext>
             </a:extLst>
           </p:cNvPr>
@@ -15132,7 +15132,7 @@
           <p:cNvPr id="21" name="">
             <a:extLst xmlns:a="http://schemas.openxmlformats.org/drawingml/2006/main">
               <a:ext uri="{FF2B5EF4-FFF2-40B4-BE49-F238E27FC236}">
-                <a16:creationId xmlns:a16="http://schemas.microsoft.com/office/drawing/2014/main" id="{C3ED5D34-F48E-4CFB-B11A-759493707344}"/>
+                <a16:creationId xmlns:a16="http://schemas.microsoft.com/office/drawing/2014/main" id="{93DC96D4-3EA4-438A-9D35-A78B7BCD3968}"/>
               </a:ext>
             </a:extLst>
           </p:cNvPr>
@@ -15239,7 +15239,7 @@
     </p:spTree>
     <p:extLst>
       <p:ext uri="{BB962C8B-B14F-4D97-AF65-F5344CB8AC3E}">
-        <p14:creationId xmlns:p14="http://schemas.microsoft.com/office/powerpoint/2010/main" val="691842415"/>
+        <p14:creationId xmlns:p14="http://schemas.microsoft.com/office/powerpoint/2010/main" val="1657394681"/>
       </p:ext>
     </p:extLst>
   </p:cSld>
@@ -15252,7 +15252,7 @@
     <p:bg>
       <p:bgPr>
         <a:solidFill xmlns:a="http://schemas.openxmlformats.org/drawingml/2006/main">
-          <a:srgbClr val="0E1B3E"/>
+          <a:srgbClr val="070F26"/>
         </a:solidFill>
       </p:bgPr>
     </p:bg>
@@ -15270,7 +15270,7 @@
           <p:cNvPr id="1" name="">
             <a:extLst xmlns:a="http://schemas.openxmlformats.org/drawingml/2006/main">
               <a:ext uri="{FF2B5EF4-FFF2-40B4-BE49-F238E27FC236}">
-                <a16:creationId xmlns:a16="http://schemas.microsoft.com/office/drawing/2014/main" id="{ADC8F743-CC85-4FE5-A27A-6AA094B9CE60}"/>
+                <a16:creationId xmlns:a16="http://schemas.microsoft.com/office/drawing/2014/main" id="{BED4F25C-D9F5-40FA-B800-9FB396D2C871}"/>
               </a:ext>
             </a:extLst>
           </p:cNvPr>
@@ -15288,7 +15288,7 @@
             <a:avLst/>
           </a:prstGeom>
           <a:solidFill xmlns:a="http://schemas.openxmlformats.org/drawingml/2006/main">
-            <a:srgbClr val="0E1B3E"/>
+            <a:srgbClr val="070F26"/>
           </a:solidFill>
           <a:ln xmlns:a="http://schemas.openxmlformats.org/drawingml/2006/main" w="0">
             <a:solidFill>
@@ -15309,7 +15309,7 @@
           <p:nvPr/>
         </p:nvPicPr>
         <p:blipFill>
-          <a:blip xmlns:r="http://schemas.openxmlformats.org/officeDocument/2006/relationships" xmlns:a="http://schemas.openxmlformats.org/drawingml/2006/main" r:embed="R47a20a0f5e7343f9"/>
+          <a:blip xmlns:r="http://schemas.openxmlformats.org/officeDocument/2006/relationships" xmlns:a="http://schemas.openxmlformats.org/drawingml/2006/main" r:embed="R90b6d6755b19476e"/>
           <a:stretch xmlns:a="http://schemas.openxmlformats.org/drawingml/2006/main"/>
         </p:blipFill>
         <p:spPr>
@@ -15327,7 +15327,7 @@
           <p:cNvPr id="3" name="">
             <a:extLst xmlns:a="http://schemas.openxmlformats.org/drawingml/2006/main">
               <a:ext uri="{FF2B5EF4-FFF2-40B4-BE49-F238E27FC236}">
-                <a16:creationId xmlns:a16="http://schemas.microsoft.com/office/drawing/2014/main" id="{1EFD5241-ADD4-48E3-8771-99C4130407DE}"/>
+                <a16:creationId xmlns:a16="http://schemas.microsoft.com/office/drawing/2014/main" id="{229C1737-9B11-4A24-9B82-44CC5BCFC7BF}"/>
               </a:ext>
             </a:extLst>
           </p:cNvPr>
@@ -15385,7 +15385,7 @@
           <p:cNvPr id="4" name="">
             <a:extLst xmlns:a="http://schemas.openxmlformats.org/drawingml/2006/main">
               <a:ext uri="{FF2B5EF4-FFF2-40B4-BE49-F238E27FC236}">
-                <a16:creationId xmlns:a16="http://schemas.microsoft.com/office/drawing/2014/main" id="{66DC6161-240A-4EBD-A277-A62C62E802A6}"/>
+                <a16:creationId xmlns:a16="http://schemas.microsoft.com/office/drawing/2014/main" id="{05C060D6-8213-459C-9405-DEA82111DE3B}"/>
               </a:ext>
             </a:extLst>
           </p:cNvPr>
@@ -15443,7 +15443,7 @@
           <p:cNvPr id="5" name="">
             <a:extLst xmlns:a="http://schemas.openxmlformats.org/drawingml/2006/main">
               <a:ext uri="{FF2B5EF4-FFF2-40B4-BE49-F238E27FC236}">
-                <a16:creationId xmlns:a16="http://schemas.microsoft.com/office/drawing/2014/main" id="{6B1ACAED-1E22-4EEB-8930-0B31691DC53B}"/>
+                <a16:creationId xmlns:a16="http://schemas.microsoft.com/office/drawing/2014/main" id="{84CF1F51-5AB9-4D55-83A7-5EBCED3AD383}"/>
               </a:ext>
             </a:extLst>
           </p:cNvPr>
@@ -15501,7 +15501,7 @@
           <p:cNvPr id="6" name="">
             <a:extLst xmlns:a="http://schemas.openxmlformats.org/drawingml/2006/main">
               <a:ext uri="{FF2B5EF4-FFF2-40B4-BE49-F238E27FC236}">
-                <a16:creationId xmlns:a16="http://schemas.microsoft.com/office/drawing/2014/main" id="{83AD2394-2179-402E-BD83-D5632F162B84}"/>
+                <a16:creationId xmlns:a16="http://schemas.microsoft.com/office/drawing/2014/main" id="{6DDC19D6-EEF9-4C9A-98F9-34B9233DDF5A}"/>
               </a:ext>
             </a:extLst>
           </p:cNvPr>
@@ -15563,13 +15563,13 @@
           <p:nvPr/>
         </p:nvPicPr>
         <p:blipFill>
-          <a:blip xmlns:r="http://schemas.openxmlformats.org/officeDocument/2006/relationships" xmlns:a="http://schemas.openxmlformats.org/drawingml/2006/main" r:embed="Ree79fca4203f41e8"/>
+          <a:blip xmlns:r="http://schemas.openxmlformats.org/officeDocument/2006/relationships" xmlns:a="http://schemas.openxmlformats.org/drawingml/2006/main" r:embed="R99687f12f9294375"/>
           <a:stretch xmlns:a="http://schemas.openxmlformats.org/drawingml/2006/main"/>
         </p:blipFill>
         <p:spPr>
           <a:xfrm xmlns:a="http://schemas.openxmlformats.org/drawingml/2006/main">
-            <a:off x="476250" y="1257300"/>
-            <a:ext cx="2667000" cy="4533900"/>
+            <a:off x="0" y="1746250"/>
+            <a:ext cx="2667000" cy="3556000"/>
           </a:xfrm>
           <a:prstGeom xmlns:a="http://schemas.openxmlformats.org/drawingml/2006/main" prst="rect">
             <a:avLst/>
@@ -15581,7 +15581,7 @@
           <p:cNvPr id="8" name="">
             <a:extLst xmlns:a="http://schemas.openxmlformats.org/drawingml/2006/main">
               <a:ext uri="{FF2B5EF4-FFF2-40B4-BE49-F238E27FC236}">
-                <a16:creationId xmlns:a16="http://schemas.microsoft.com/office/drawing/2014/main" id="{28C6DFB0-518E-417F-A1BE-F1DD4952BFAE}"/>
+                <a16:creationId xmlns:a16="http://schemas.microsoft.com/office/drawing/2014/main" id="{FA6063DC-8975-430B-BFCC-C5956817A2B6}"/>
               </a:ext>
             </a:extLst>
           </p:cNvPr>
@@ -15639,7 +15639,7 @@
           <p:cNvPr id="9" name="">
             <a:extLst xmlns:a="http://schemas.openxmlformats.org/drawingml/2006/main">
               <a:ext uri="{FF2B5EF4-FFF2-40B4-BE49-F238E27FC236}">
-                <a16:creationId xmlns:a16="http://schemas.microsoft.com/office/drawing/2014/main" id="{EA823A76-8D38-40F7-A12C-E490A53DAF7F}"/>
+                <a16:creationId xmlns:a16="http://schemas.microsoft.com/office/drawing/2014/main" id="{10520CD6-5AE7-4F00-9E44-4F3EDCBAE1D3}"/>
               </a:ext>
             </a:extLst>
           </p:cNvPr>
@@ -15697,7 +15697,7 @@
           <p:cNvPr id="10" name="">
             <a:extLst xmlns:a="http://schemas.openxmlformats.org/drawingml/2006/main">
               <a:ext uri="{FF2B5EF4-FFF2-40B4-BE49-F238E27FC236}">
-                <a16:creationId xmlns:a16="http://schemas.microsoft.com/office/drawing/2014/main" id="{C48A362C-9163-4D0C-AFB0-CFC12087432E}"/>
+                <a16:creationId xmlns:a16="http://schemas.microsoft.com/office/drawing/2014/main" id="{07DF00A7-C690-4B57-B03D-8C402EC74D15}"/>
               </a:ext>
             </a:extLst>
           </p:cNvPr>
@@ -15753,7 +15753,7 @@
     </p:spTree>
     <p:extLst>
       <p:ext uri="{BB962C8B-B14F-4D97-AF65-F5344CB8AC3E}">
-        <p14:creationId xmlns:p14="http://schemas.microsoft.com/office/powerpoint/2010/main" val="165802932"/>
+        <p14:creationId xmlns:p14="http://schemas.microsoft.com/office/powerpoint/2010/main" val="91588162"/>
       </p:ext>
     </p:extLst>
   </p:cSld>
@@ -15784,7 +15784,7 @@
           <p:cNvPr id="1" name="">
             <a:extLst xmlns:a="http://schemas.openxmlformats.org/drawingml/2006/main">
               <a:ext uri="{FF2B5EF4-FFF2-40B4-BE49-F238E27FC236}">
-                <a16:creationId xmlns:a16="http://schemas.microsoft.com/office/drawing/2014/main" id="{287FD5BC-F6D1-4087-B91C-3E7C32595756}"/>
+                <a16:creationId xmlns:a16="http://schemas.microsoft.com/office/drawing/2014/main" id="{E1492AB5-AA0C-47A2-9022-A32D2A7B9A1C}"/>
               </a:ext>
             </a:extLst>
           </p:cNvPr>
@@ -15823,7 +15823,7 @@
           <p:nvPr/>
         </p:nvPicPr>
         <p:blipFill>
-          <a:blip xmlns:r="http://schemas.openxmlformats.org/officeDocument/2006/relationships" xmlns:a="http://schemas.openxmlformats.org/drawingml/2006/main" r:embed="R4cd3575bf62942c6"/>
+          <a:blip xmlns:r="http://schemas.openxmlformats.org/officeDocument/2006/relationships" xmlns:a="http://schemas.openxmlformats.org/drawingml/2006/main" r:embed="R3ca45f00768d413e"/>
           <a:stretch xmlns:a="http://schemas.openxmlformats.org/drawingml/2006/main"/>
         </p:blipFill>
         <p:spPr>
@@ -15841,7 +15841,7 @@
           <p:cNvPr id="3" name="">
             <a:extLst xmlns:a="http://schemas.openxmlformats.org/drawingml/2006/main">
               <a:ext uri="{FF2B5EF4-FFF2-40B4-BE49-F238E27FC236}">
-                <a16:creationId xmlns:a16="http://schemas.microsoft.com/office/drawing/2014/main" id="{8EE72142-E655-4730-9883-12627DCDD3A5}"/>
+                <a16:creationId xmlns:a16="http://schemas.microsoft.com/office/drawing/2014/main" id="{7DDFDD0E-2795-4F85-8B66-66802617090B}"/>
               </a:ext>
             </a:extLst>
           </p:cNvPr>
@@ -15879,14 +15879,14 @@
             <a:pPr algn="r">
               <a:defRPr sz="825" b="1">
                 <a:solidFill>
-                  <a:srgbClr val="0E1B3E"/>
+                  <a:srgbClr val="070F26"/>
                 </a:solidFill>
               </a:defRPr>
             </a:pPr>
             <a:r>
               <a:rPr sz="825" b="1">
                 <a:solidFill>
-                  <a:srgbClr val="0E1B3E"/>
+                  <a:srgbClr val="070F26"/>
                 </a:solidFill>
               </a:rPr>
               <a:t>NTT DATA UNIVERSITY</a:t>
@@ -15899,7 +15899,7 @@
           <p:cNvPr id="4" name="">
             <a:extLst xmlns:a="http://schemas.openxmlformats.org/drawingml/2006/main">
               <a:ext uri="{FF2B5EF4-FFF2-40B4-BE49-F238E27FC236}">
-                <a16:creationId xmlns:a16="http://schemas.microsoft.com/office/drawing/2014/main" id="{5A829FF9-1DCF-4D16-9406-EBAB1EDAE057}"/>
+                <a16:creationId xmlns:a16="http://schemas.microsoft.com/office/drawing/2014/main" id="{00F01CCF-FA0F-436B-B069-2B34C614FEF8}"/>
               </a:ext>
             </a:extLst>
           </p:cNvPr>
@@ -15957,7 +15957,7 @@
           <p:cNvPr id="5" name="">
             <a:extLst xmlns:a="http://schemas.openxmlformats.org/drawingml/2006/main">
               <a:ext uri="{FF2B5EF4-FFF2-40B4-BE49-F238E27FC236}">
-                <a16:creationId xmlns:a16="http://schemas.microsoft.com/office/drawing/2014/main" id="{5A465D43-EBE9-4FA0-958F-034A3C078C2F}"/>
+                <a16:creationId xmlns:a16="http://schemas.microsoft.com/office/drawing/2014/main" id="{4D993023-91D2-447C-B195-664D51FBAC52}"/>
               </a:ext>
             </a:extLst>
           </p:cNvPr>
@@ -16015,7 +16015,7 @@
           <p:cNvPr id="6" name="">
             <a:extLst xmlns:a="http://schemas.openxmlformats.org/drawingml/2006/main">
               <a:ext uri="{FF2B5EF4-FFF2-40B4-BE49-F238E27FC236}">
-                <a16:creationId xmlns:a16="http://schemas.microsoft.com/office/drawing/2014/main" id="{B07E2107-9128-457F-B727-DF6F75579C21}"/>
+                <a16:creationId xmlns:a16="http://schemas.microsoft.com/office/drawing/2014/main" id="{5BEACCC8-0F76-4949-BE81-B05D78898E76}"/>
               </a:ext>
             </a:extLst>
           </p:cNvPr>
@@ -16053,14 +16053,14 @@
             <a:pPr algn="r">
               <a:defRPr sz="675" b="1">
                 <a:solidFill>
-                  <a:srgbClr val="0E1B3E"/>
+                  <a:srgbClr val="070F26"/>
                 </a:solidFill>
               </a:defRPr>
             </a:pPr>
             <a:r>
               <a:rPr sz="675" b="1">
                 <a:solidFill>
-                  <a:srgbClr val="0E1B3E"/>
+                  <a:srgbClr val="070F26"/>
                 </a:solidFill>
               </a:rPr>
               <a:t>NTT DATA UNIVERSITY</a:t>
@@ -16073,7 +16073,7 @@
           <p:cNvPr id="7" name="">
             <a:extLst xmlns:a="http://schemas.openxmlformats.org/drawingml/2006/main">
               <a:ext uri="{FF2B5EF4-FFF2-40B4-BE49-F238E27FC236}">
-                <a16:creationId xmlns:a16="http://schemas.microsoft.com/office/drawing/2014/main" id="{6C66E71E-F339-40B3-BEEB-1F11CA0346ED}"/>
+                <a16:creationId xmlns:a16="http://schemas.microsoft.com/office/drawing/2014/main" id="{40AF1BE4-1614-4336-A569-38681B04A27B}"/>
               </a:ext>
             </a:extLst>
           </p:cNvPr>
@@ -16131,7 +16131,7 @@
           <p:cNvPr id="8" name="">
             <a:extLst xmlns:a="http://schemas.openxmlformats.org/drawingml/2006/main">
               <a:ext uri="{FF2B5EF4-FFF2-40B4-BE49-F238E27FC236}">
-                <a16:creationId xmlns:a16="http://schemas.microsoft.com/office/drawing/2014/main" id="{DD342877-7F9B-4E34-8BE4-87FB9A29C659}"/>
+                <a16:creationId xmlns:a16="http://schemas.microsoft.com/office/drawing/2014/main" id="{FD9A87BE-CF30-478C-85A5-D7CCC6504A12}"/>
               </a:ext>
             </a:extLst>
           </p:cNvPr>
@@ -16169,14 +16169,14 @@
             <a:pPr algn="l">
               <a:defRPr sz="2400" b="0">
                 <a:solidFill>
-                  <a:srgbClr val="0E1B3E"/>
+                  <a:srgbClr val="070F26"/>
                 </a:solidFill>
               </a:defRPr>
             </a:pPr>
             <a:r>
               <a:rPr sz="2400" b="0">
                 <a:solidFill>
-                  <a:srgbClr val="0E1B3E"/>
+                  <a:srgbClr val="070F26"/>
                 </a:solidFill>
               </a:rPr>
               <a:t>Três fases para construir o modelo coletivamente</a:t>
@@ -16189,7 +16189,7 @@
           <p:cNvPr id="9" name="">
             <a:extLst xmlns:a="http://schemas.openxmlformats.org/drawingml/2006/main">
               <a:ext uri="{FF2B5EF4-FFF2-40B4-BE49-F238E27FC236}">
-                <a16:creationId xmlns:a16="http://schemas.microsoft.com/office/drawing/2014/main" id="{F4785687-DBE6-41CE-9FD0-F06939189A11}"/>
+                <a16:creationId xmlns:a16="http://schemas.microsoft.com/office/drawing/2014/main" id="{9B132568-258B-4000-87EB-FA3AF6555F8E}"/>
               </a:ext>
             </a:extLst>
           </p:cNvPr>
@@ -16247,7 +16247,7 @@
           <p:cNvPr id="10" name="">
             <a:extLst xmlns:a="http://schemas.openxmlformats.org/drawingml/2006/main">
               <a:ext uri="{FF2B5EF4-FFF2-40B4-BE49-F238E27FC236}">
-                <a16:creationId xmlns:a16="http://schemas.microsoft.com/office/drawing/2014/main" id="{1C4D6ABB-74BA-4437-8E54-468E21823041}"/>
+                <a16:creationId xmlns:a16="http://schemas.microsoft.com/office/drawing/2014/main" id="{DDD7751F-4EA7-4FA3-A023-CB70552E22A4}"/>
               </a:ext>
             </a:extLst>
           </p:cNvPr>
@@ -16280,7 +16280,7 @@
           <p:cNvPr id="11" name="">
             <a:extLst xmlns:a="http://schemas.openxmlformats.org/drawingml/2006/main">
               <a:ext uri="{FF2B5EF4-FFF2-40B4-BE49-F238E27FC236}">
-                <a16:creationId xmlns:a16="http://schemas.microsoft.com/office/drawing/2014/main" id="{CCA89FC9-9D31-4982-BF13-13B85A21A4F6}"/>
+                <a16:creationId xmlns:a16="http://schemas.microsoft.com/office/drawing/2014/main" id="{44BB4290-EC16-4C8A-9595-234C15BB39A2}"/>
               </a:ext>
             </a:extLst>
           </p:cNvPr>
@@ -16315,7 +16315,7 @@
           <p:cNvPr id="12" name="">
             <a:extLst xmlns:a="http://schemas.openxmlformats.org/drawingml/2006/main">
               <a:ext uri="{FF2B5EF4-FFF2-40B4-BE49-F238E27FC236}">
-                <a16:creationId xmlns:a16="http://schemas.microsoft.com/office/drawing/2014/main" id="{2AD6C86B-1468-4C4C-9458-0583591F3AB9}"/>
+                <a16:creationId xmlns:a16="http://schemas.microsoft.com/office/drawing/2014/main" id="{17426987-4FCC-4D02-80AA-1BDC91FBF29B}"/>
               </a:ext>
             </a:extLst>
           </p:cNvPr>
@@ -16373,7 +16373,7 @@
           <p:cNvPr id="13" name="">
             <a:extLst xmlns:a="http://schemas.openxmlformats.org/drawingml/2006/main">
               <a:ext uri="{FF2B5EF4-FFF2-40B4-BE49-F238E27FC236}">
-                <a16:creationId xmlns:a16="http://schemas.microsoft.com/office/drawing/2014/main" id="{37027F9B-BC26-4588-B97E-ADB4FAA220FC}"/>
+                <a16:creationId xmlns:a16="http://schemas.microsoft.com/office/drawing/2014/main" id="{36D85E95-5D87-4259-AFE5-0FE504DA384F}"/>
               </a:ext>
             </a:extLst>
           </p:cNvPr>
@@ -16411,14 +16411,14 @@
             <a:pPr algn="l">
               <a:defRPr sz="1050" b="1">
                 <a:solidFill>
-                  <a:srgbClr val="0E1B3E"/>
+                  <a:srgbClr val="070F26"/>
                 </a:solidFill>
               </a:defRPr>
             </a:pPr>
             <a:r>
               <a:rPr sz="1050" b="1">
                 <a:solidFill>
-                  <a:srgbClr val="0E1B3E"/>
+                  <a:srgbClr val="070F26"/>
                 </a:solidFill>
               </a:rPr>
               <a:t>Individual — 20 min</a:t>
@@ -16431,7 +16431,7 @@
           <p:cNvPr id="14" name="">
             <a:extLst xmlns:a="http://schemas.openxmlformats.org/drawingml/2006/main">
               <a:ext uri="{FF2B5EF4-FFF2-40B4-BE49-F238E27FC236}">
-                <a16:creationId xmlns:a16="http://schemas.microsoft.com/office/drawing/2014/main" id="{CF224460-601E-46D5-B2E1-78E6C223CCCA}"/>
+                <a16:creationId xmlns:a16="http://schemas.microsoft.com/office/drawing/2014/main" id="{4AABB785-8A4A-48FA-A1DE-8962F5E3EEFF}"/>
               </a:ext>
             </a:extLst>
           </p:cNvPr>
@@ -16523,7 +16523,7 @@
           <p:cNvPr id="15" name="">
             <a:extLst xmlns:a="http://schemas.openxmlformats.org/drawingml/2006/main">
               <a:ext uri="{FF2B5EF4-FFF2-40B4-BE49-F238E27FC236}">
-                <a16:creationId xmlns:a16="http://schemas.microsoft.com/office/drawing/2014/main" id="{9A059575-64F1-421C-A8FA-B278597F78D0}"/>
+                <a16:creationId xmlns:a16="http://schemas.microsoft.com/office/drawing/2014/main" id="{56F84208-A0EF-46FC-AE1B-A47C0879C075}"/>
               </a:ext>
             </a:extLst>
           </p:cNvPr>
@@ -16556,7 +16556,7 @@
           <p:cNvPr id="16" name="">
             <a:extLst xmlns:a="http://schemas.openxmlformats.org/drawingml/2006/main">
               <a:ext uri="{FF2B5EF4-FFF2-40B4-BE49-F238E27FC236}">
-                <a16:creationId xmlns:a16="http://schemas.microsoft.com/office/drawing/2014/main" id="{061ED775-2B32-40DA-BA49-F6A6F716A3EF}"/>
+                <a16:creationId xmlns:a16="http://schemas.microsoft.com/office/drawing/2014/main" id="{1DF15E19-E378-435F-B54B-C69AE914E0ED}"/>
               </a:ext>
             </a:extLst>
           </p:cNvPr>
@@ -16591,7 +16591,7 @@
           <p:cNvPr id="17" name="">
             <a:extLst xmlns:a="http://schemas.openxmlformats.org/drawingml/2006/main">
               <a:ext uri="{FF2B5EF4-FFF2-40B4-BE49-F238E27FC236}">
-                <a16:creationId xmlns:a16="http://schemas.microsoft.com/office/drawing/2014/main" id="{F6B37FC5-A406-40C1-8C4F-90F252C70B65}"/>
+                <a16:creationId xmlns:a16="http://schemas.microsoft.com/office/drawing/2014/main" id="{73CE63A4-C008-46AD-822D-2607F3BD12AF}"/>
               </a:ext>
             </a:extLst>
           </p:cNvPr>
@@ -16649,7 +16649,7 @@
           <p:cNvPr id="18" name="">
             <a:extLst xmlns:a="http://schemas.openxmlformats.org/drawingml/2006/main">
               <a:ext uri="{FF2B5EF4-FFF2-40B4-BE49-F238E27FC236}">
-                <a16:creationId xmlns:a16="http://schemas.microsoft.com/office/drawing/2014/main" id="{E7FDCB95-4C7E-4650-A5BF-CCBA4ED847C0}"/>
+                <a16:creationId xmlns:a16="http://schemas.microsoft.com/office/drawing/2014/main" id="{4141839B-DB57-4276-AFBB-7192A99CCDE5}"/>
               </a:ext>
             </a:extLst>
           </p:cNvPr>
@@ -16687,14 +16687,14 @@
             <a:pPr algn="l">
               <a:defRPr sz="1050" b="1">
                 <a:solidFill>
-                  <a:srgbClr val="0E1B3E"/>
+                  <a:srgbClr val="070F26"/>
                 </a:solidFill>
               </a:defRPr>
             </a:pPr>
             <a:r>
               <a:rPr sz="1050" b="1">
                 <a:solidFill>
-                  <a:srgbClr val="0E1B3E"/>
+                  <a:srgbClr val="070F26"/>
                 </a:solidFill>
               </a:rPr>
               <a:t>Discussão — 30 min</a:t>
@@ -16707,7 +16707,7 @@
           <p:cNvPr id="19" name="">
             <a:extLst xmlns:a="http://schemas.openxmlformats.org/drawingml/2006/main">
               <a:ext uri="{FF2B5EF4-FFF2-40B4-BE49-F238E27FC236}">
-                <a16:creationId xmlns:a16="http://schemas.microsoft.com/office/drawing/2014/main" id="{0F274E83-8807-49F6-B1DC-C41E509F6F86}"/>
+                <a16:creationId xmlns:a16="http://schemas.microsoft.com/office/drawing/2014/main" id="{22A9A8BB-D329-4BDE-809B-EB7A5E376C3A}"/>
               </a:ext>
             </a:extLst>
           </p:cNvPr>
@@ -16799,7 +16799,7 @@
           <p:cNvPr id="20" name="">
             <a:extLst xmlns:a="http://schemas.openxmlformats.org/drawingml/2006/main">
               <a:ext uri="{FF2B5EF4-FFF2-40B4-BE49-F238E27FC236}">
-                <a16:creationId xmlns:a16="http://schemas.microsoft.com/office/drawing/2014/main" id="{6861B483-AA98-4D08-A6B1-1383ECB1CF19}"/>
+                <a16:creationId xmlns:a16="http://schemas.microsoft.com/office/drawing/2014/main" id="{0E4DFB44-9F96-402B-A644-561DE463AD82}"/>
               </a:ext>
             </a:extLst>
           </p:cNvPr>
@@ -16832,7 +16832,7 @@
           <p:cNvPr id="21" name="">
             <a:extLst xmlns:a="http://schemas.openxmlformats.org/drawingml/2006/main">
               <a:ext uri="{FF2B5EF4-FFF2-40B4-BE49-F238E27FC236}">
-                <a16:creationId xmlns:a16="http://schemas.microsoft.com/office/drawing/2014/main" id="{97C1EB34-F3C9-47C2-9FEA-EFA18FEB3748}"/>
+                <a16:creationId xmlns:a16="http://schemas.microsoft.com/office/drawing/2014/main" id="{CA523892-ADE5-4E02-86B4-47B2AA741892}"/>
               </a:ext>
             </a:extLst>
           </p:cNvPr>
@@ -16867,7 +16867,7 @@
           <p:cNvPr id="22" name="">
             <a:extLst xmlns:a="http://schemas.openxmlformats.org/drawingml/2006/main">
               <a:ext uri="{FF2B5EF4-FFF2-40B4-BE49-F238E27FC236}">
-                <a16:creationId xmlns:a16="http://schemas.microsoft.com/office/drawing/2014/main" id="{05527423-1C11-4BC4-9E4D-900AFAF24220}"/>
+                <a16:creationId xmlns:a16="http://schemas.microsoft.com/office/drawing/2014/main" id="{7129420C-8E24-4C32-A7ED-C64A3D0F2D38}"/>
               </a:ext>
             </a:extLst>
           </p:cNvPr>
@@ -16925,7 +16925,7 @@
           <p:cNvPr id="23" name="">
             <a:extLst xmlns:a="http://schemas.openxmlformats.org/drawingml/2006/main">
               <a:ext uri="{FF2B5EF4-FFF2-40B4-BE49-F238E27FC236}">
-                <a16:creationId xmlns:a16="http://schemas.microsoft.com/office/drawing/2014/main" id="{FE6CDCD4-2E3E-400A-AAA3-143BCEA22021}"/>
+                <a16:creationId xmlns:a16="http://schemas.microsoft.com/office/drawing/2014/main" id="{3C759728-4501-4B8E-98E2-30673CBDBBA7}"/>
               </a:ext>
             </a:extLst>
           </p:cNvPr>
@@ -16963,14 +16963,14 @@
             <a:pPr algn="l">
               <a:defRPr sz="1050" b="1">
                 <a:solidFill>
-                  <a:srgbClr val="0E1B3E"/>
+                  <a:srgbClr val="070F26"/>
                 </a:solidFill>
               </a:defRPr>
             </a:pPr>
             <a:r>
               <a:rPr sz="1050" b="1">
                 <a:solidFill>
-                  <a:srgbClr val="0E1B3E"/>
+                  <a:srgbClr val="070F26"/>
                 </a:solidFill>
               </a:rPr>
               <a:t>Consenso — 20 min</a:t>
@@ -16983,7 +16983,7 @@
           <p:cNvPr id="24" name="">
             <a:extLst xmlns:a="http://schemas.openxmlformats.org/drawingml/2006/main">
               <a:ext uri="{FF2B5EF4-FFF2-40B4-BE49-F238E27FC236}">
-                <a16:creationId xmlns:a16="http://schemas.microsoft.com/office/drawing/2014/main" id="{8BD9E860-0721-4081-8BA4-31BF9E4CC802}"/>
+                <a16:creationId xmlns:a16="http://schemas.microsoft.com/office/drawing/2014/main" id="{879888BB-6FD8-4564-84DB-511EB15D37A2}"/>
               </a:ext>
             </a:extLst>
           </p:cNvPr>
@@ -17073,7 +17073,7 @@
     </p:spTree>
     <p:extLst>
       <p:ext uri="{BB962C8B-B14F-4D97-AF65-F5344CB8AC3E}">
-        <p14:creationId xmlns:p14="http://schemas.microsoft.com/office/powerpoint/2010/main" val="1561951482"/>
+        <p14:creationId xmlns:p14="http://schemas.microsoft.com/office/powerpoint/2010/main" val="1993835553"/>
       </p:ext>
     </p:extLst>
   </p:cSld>
